--- a/Hospital Management System.pptx
+++ b/Hospital Management System.pptx
@@ -10,29 +10,30 @@
     <p:sldId id="258" r:id="rId4"/>
     <p:sldId id="259" r:id="rId5"/>
     <p:sldId id="260" r:id="rId6"/>
-    <p:sldId id="261" r:id="rId7"/>
-    <p:sldId id="262" r:id="rId8"/>
-    <p:sldId id="263" r:id="rId9"/>
-    <p:sldId id="264" r:id="rId10"/>
+    <p:sldId id="265" r:id="rId7"/>
+    <p:sldId id="261" r:id="rId8"/>
+    <p:sldId id="262" r:id="rId9"/>
+    <p:sldId id="263" r:id="rId10"/>
+    <p:sldId id="264" r:id="rId11"/>
   </p:sldIdLst>
   <p:sldSz cx="18288000" cy="10287000"/>
   <p:notesSz cx="6858000" cy="9144000"/>
   <p:embeddedFontLst>
     <p:embeddedFont>
       <p:font typeface="Forum" panose="020B0604020202020204" charset="0"/>
-      <p:regular r:id="rId11"/>
+      <p:regular r:id="rId12"/>
     </p:embeddedFont>
     <p:embeddedFont>
       <p:font typeface="Hammersmith One" panose="02010703030501060504" pitchFamily="2" charset="0"/>
-      <p:regular r:id="rId12"/>
+      <p:regular r:id="rId13"/>
     </p:embeddedFont>
     <p:embeddedFont>
       <p:font typeface="Open Sans" panose="020B0606030504020204" pitchFamily="34" charset="0"/>
-      <p:regular r:id="rId13"/>
+      <p:regular r:id="rId14"/>
     </p:embeddedFont>
     <p:embeddedFont>
       <p:font typeface="Open Sans Bold" panose="020B0806030504020204" charset="0"/>
-      <p:regular r:id="rId14"/>
+      <p:regular r:id="rId15"/>
     </p:embeddedFont>
   </p:embeddedFontLst>
   <p:defaultTextStyle>
@@ -3452,2314 +3453,7 @@
 </p:sld>
 </file>
 
-<file path=ppt/slides/slide2.xml><?xml version="1.0" encoding="utf-8"?>
-<p:sld xmlns:a="http://schemas.openxmlformats.org/drawingml/2006/main" xmlns:r="http://schemas.openxmlformats.org/officeDocument/2006/relationships" xmlns:p="http://schemas.openxmlformats.org/presentationml/2006/main">
-  <p:cSld>
-    <p:bg>
-      <p:bgPr>
-        <a:solidFill>
-          <a:srgbClr val="E3F4FF"/>
-        </a:solidFill>
-        <a:effectLst/>
-      </p:bgPr>
-    </p:bg>
-    <p:spTree>
-      <p:nvGrpSpPr>
-        <p:cNvPr id="1" name=""/>
-        <p:cNvGrpSpPr/>
-        <p:nvPr/>
-      </p:nvGrpSpPr>
-      <p:grpSpPr>
-        <a:xfrm>
-          <a:off x="0" y="0"/>
-          <a:ext cx="0" cy="0"/>
-          <a:chOff x="0" y="0"/>
-          <a:chExt cx="0" cy="0"/>
-        </a:xfrm>
-      </p:grpSpPr>
-      <p:sp>
-        <p:nvSpPr>
-          <p:cNvPr id="2" name="Freeform 2"/>
-          <p:cNvSpPr/>
-          <p:nvPr/>
-        </p:nvSpPr>
-        <p:spPr>
-          <a:xfrm>
-            <a:off x="0" y="6889242"/>
-            <a:ext cx="18288000" cy="4559808"/>
-          </a:xfrm>
-          <a:custGeom>
-            <a:avLst/>
-            <a:gdLst/>
-            <a:ahLst/>
-            <a:cxnLst/>
-            <a:rect l="l" t="t" r="r" b="b"/>
-            <a:pathLst>
-              <a:path w="18288000" h="4559808">
-                <a:moveTo>
-                  <a:pt x="0" y="0"/>
-                </a:moveTo>
-                <a:lnTo>
-                  <a:pt x="18288000" y="0"/>
-                </a:lnTo>
-                <a:lnTo>
-                  <a:pt x="18288000" y="4559808"/>
-                </a:lnTo>
-                <a:lnTo>
-                  <a:pt x="0" y="4559808"/>
-                </a:lnTo>
-                <a:lnTo>
-                  <a:pt x="0" y="0"/>
-                </a:lnTo>
-                <a:close/>
-              </a:path>
-            </a:pathLst>
-          </a:custGeom>
-          <a:blipFill>
-            <a:blip>
-              <a:extLst>
-                <a:ext uri="{96DAC541-7B7A-43D3-8B79-37D633B846F1}">
-                  <asvg:svgBlip xmlns:asvg="http://schemas.microsoft.com/office/drawing/2016/SVG/main" r:embed="rId2"/>
-                </a:ext>
-              </a:extLst>
-            </a:blip>
-            <a:stretch>
-              <a:fillRect/>
-            </a:stretch>
-          </a:blipFill>
-        </p:spPr>
-        <p:txBody>
-          <a:bodyPr/>
-          <a:lstStyle/>
-          <a:p>
-            <a:endParaRPr lang="en-US"/>
-          </a:p>
-        </p:txBody>
-      </p:sp>
-      <p:sp>
-        <p:nvSpPr>
-          <p:cNvPr id="3" name="TextBox 3"/>
-          <p:cNvSpPr txBox="1"/>
-          <p:nvPr/>
-        </p:nvSpPr>
-        <p:spPr>
-          <a:xfrm>
-            <a:off x="4125961" y="838200"/>
-            <a:ext cx="10036077" cy="1734535"/>
-          </a:xfrm>
-          <a:prstGeom prst="rect">
-            <a:avLst/>
-          </a:prstGeom>
-        </p:spPr>
-        <p:txBody>
-          <a:bodyPr lIns="0" tIns="0" rIns="0" bIns="0" rtlCol="0" anchor="t">
-            <a:spAutoFit/>
-          </a:bodyPr>
-          <a:lstStyle/>
-          <a:p>
-            <a:pPr algn="ctr">
-              <a:lnSpc>
-                <a:spcPts val="14198"/>
-              </a:lnSpc>
-            </a:pPr>
-            <a:r>
-              <a:rPr lang="en-US" sz="10141">
-                <a:solidFill>
-                  <a:srgbClr val="071947"/>
-                </a:solidFill>
-                <a:latin typeface="Hammersmith One"/>
-                <a:ea typeface="Hammersmith One"/>
-                <a:cs typeface="Hammersmith One"/>
-                <a:sym typeface="Hammersmith One"/>
-              </a:rPr>
-              <a:t>Introduction</a:t>
-            </a:r>
-          </a:p>
-        </p:txBody>
-      </p:sp>
-      <p:sp>
-        <p:nvSpPr>
-          <p:cNvPr id="4" name="TextBox 4"/>
-          <p:cNvSpPr txBox="1"/>
-          <p:nvPr/>
-        </p:nvSpPr>
-        <p:spPr>
-          <a:xfrm>
-            <a:off x="1892114" y="2981902"/>
-            <a:ext cx="14503773" cy="4461250"/>
-          </a:xfrm>
-          <a:prstGeom prst="rect">
-            <a:avLst/>
-          </a:prstGeom>
-        </p:spPr>
-        <p:txBody>
-          <a:bodyPr lIns="0" tIns="0" rIns="0" bIns="0" rtlCol="0" anchor="t">
-            <a:spAutoFit/>
-          </a:bodyPr>
-          <a:lstStyle/>
-          <a:p>
-            <a:pPr algn="just">
-              <a:lnSpc>
-                <a:spcPts val="5064"/>
-              </a:lnSpc>
-            </a:pPr>
-            <a:r>
-              <a:rPr lang="en-US" sz="3617">
-                <a:solidFill>
-                  <a:srgbClr val="071947"/>
-                </a:solidFill>
-                <a:latin typeface="Forum"/>
-                <a:ea typeface="Forum"/>
-                <a:cs typeface="Forum"/>
-                <a:sym typeface="Forum"/>
-              </a:rPr>
-              <a:t>The primary goal of this study is to design and implement a robust "Hospital Management System" that automates healthcare workflows such as patient registration, doctor scheduling, surgical history tracking, and financial billing. The project demonstrates the practical application of a hybrid database approach: using a Relational Database (PostgreSQL) for transactional integrity and a NoSQL Database (MongoDB) for flexible, high-performance data retrieval.</a:t>
-            </a:r>
-          </a:p>
-        </p:txBody>
-      </p:sp>
-    </p:spTree>
-  </p:cSld>
-  <p:clrMapOvr>
-    <a:masterClrMapping/>
-  </p:clrMapOvr>
-  <p:transition>
-    <p:fade/>
-  </p:transition>
-</p:sld>
-</file>
-
-<file path=ppt/slides/slide3.xml><?xml version="1.0" encoding="utf-8"?>
-<p:sld xmlns:a="http://schemas.openxmlformats.org/drawingml/2006/main" xmlns:r="http://schemas.openxmlformats.org/officeDocument/2006/relationships" xmlns:p="http://schemas.openxmlformats.org/presentationml/2006/main">
-  <p:cSld>
-    <p:bg>
-      <p:bgPr>
-        <a:solidFill>
-          <a:srgbClr val="E3F4FF"/>
-        </a:solidFill>
-        <a:effectLst/>
-      </p:bgPr>
-    </p:bg>
-    <p:spTree>
-      <p:nvGrpSpPr>
-        <p:cNvPr id="1" name=""/>
-        <p:cNvGrpSpPr/>
-        <p:nvPr/>
-      </p:nvGrpSpPr>
-      <p:grpSpPr>
-        <a:xfrm>
-          <a:off x="0" y="0"/>
-          <a:ext cx="0" cy="0"/>
-          <a:chOff x="0" y="0"/>
-          <a:chExt cx="0" cy="0"/>
-        </a:xfrm>
-      </p:grpSpPr>
-      <p:sp>
-        <p:nvSpPr>
-          <p:cNvPr id="2" name="Freeform 2"/>
-          <p:cNvSpPr/>
-          <p:nvPr/>
-        </p:nvSpPr>
-        <p:spPr>
-          <a:xfrm flipH="1" flipV="1">
-            <a:off x="0" y="39349"/>
-            <a:ext cx="6491574" cy="3434365"/>
-          </a:xfrm>
-          <a:custGeom>
-            <a:avLst/>
-            <a:gdLst/>
-            <a:ahLst/>
-            <a:cxnLst/>
-            <a:rect l="l" t="t" r="r" b="b"/>
-            <a:pathLst>
-              <a:path w="6491574" h="3434365">
-                <a:moveTo>
-                  <a:pt x="6491574" y="3434364"/>
-                </a:moveTo>
-                <a:lnTo>
-                  <a:pt x="0" y="3434364"/>
-                </a:lnTo>
-                <a:lnTo>
-                  <a:pt x="0" y="0"/>
-                </a:lnTo>
-                <a:lnTo>
-                  <a:pt x="6491574" y="0"/>
-                </a:lnTo>
-                <a:lnTo>
-                  <a:pt x="6491574" y="3434364"/>
-                </a:lnTo>
-                <a:close/>
-              </a:path>
-            </a:pathLst>
-          </a:custGeom>
-          <a:blipFill>
-            <a:blip>
-              <a:extLst>
-                <a:ext uri="{96DAC541-7B7A-43D3-8B79-37D633B846F1}">
-                  <asvg:svgBlip xmlns:asvg="http://schemas.microsoft.com/office/drawing/2016/SVG/main" r:embed="rId2"/>
-                </a:ext>
-              </a:extLst>
-            </a:blip>
-            <a:stretch>
-              <a:fillRect/>
-            </a:stretch>
-          </a:blipFill>
-        </p:spPr>
-        <p:txBody>
-          <a:bodyPr/>
-          <a:lstStyle/>
-          <a:p>
-            <a:endParaRPr lang="en-US"/>
-          </a:p>
-        </p:txBody>
-      </p:sp>
-      <p:sp>
-        <p:nvSpPr>
-          <p:cNvPr id="3" name="Freeform 3"/>
-          <p:cNvSpPr/>
-          <p:nvPr/>
-        </p:nvSpPr>
-        <p:spPr>
-          <a:xfrm>
-            <a:off x="11796426" y="6852635"/>
-            <a:ext cx="6491574" cy="3434365"/>
-          </a:xfrm>
-          <a:custGeom>
-            <a:avLst/>
-            <a:gdLst/>
-            <a:ahLst/>
-            <a:cxnLst/>
-            <a:rect l="l" t="t" r="r" b="b"/>
-            <a:pathLst>
-              <a:path w="6491574" h="3434365">
-                <a:moveTo>
-                  <a:pt x="0" y="0"/>
-                </a:moveTo>
-                <a:lnTo>
-                  <a:pt x="6491574" y="0"/>
-                </a:lnTo>
-                <a:lnTo>
-                  <a:pt x="6491574" y="3434365"/>
-                </a:lnTo>
-                <a:lnTo>
-                  <a:pt x="0" y="3434365"/>
-                </a:lnTo>
-                <a:lnTo>
-                  <a:pt x="0" y="0"/>
-                </a:lnTo>
-                <a:close/>
-              </a:path>
-            </a:pathLst>
-          </a:custGeom>
-          <a:blipFill>
-            <a:blip>
-              <a:extLst>
-                <a:ext uri="{96DAC541-7B7A-43D3-8B79-37D633B846F1}">
-                  <asvg:svgBlip xmlns:asvg="http://schemas.microsoft.com/office/drawing/2016/SVG/main" r:embed="rId2"/>
-                </a:ext>
-              </a:extLst>
-            </a:blip>
-            <a:stretch>
-              <a:fillRect/>
-            </a:stretch>
-          </a:blipFill>
-        </p:spPr>
-        <p:txBody>
-          <a:bodyPr/>
-          <a:lstStyle/>
-          <a:p>
-            <a:endParaRPr lang="en-US"/>
-          </a:p>
-        </p:txBody>
-      </p:sp>
-      <p:sp>
-        <p:nvSpPr>
-          <p:cNvPr id="4" name="TextBox 4"/>
-          <p:cNvSpPr txBox="1"/>
-          <p:nvPr/>
-        </p:nvSpPr>
-        <p:spPr>
-          <a:xfrm>
-            <a:off x="1209856" y="2715221"/>
-            <a:ext cx="15868288" cy="7345793"/>
-          </a:xfrm>
-          <a:prstGeom prst="rect">
-            <a:avLst/>
-          </a:prstGeom>
-        </p:spPr>
-        <p:txBody>
-          <a:bodyPr lIns="0" tIns="0" rIns="0" bIns="0" rtlCol="0" anchor="t">
-            <a:spAutoFit/>
-          </a:bodyPr>
-          <a:lstStyle/>
-          <a:p>
-            <a:pPr algn="l">
-              <a:lnSpc>
-                <a:spcPts val="4781"/>
-              </a:lnSpc>
-            </a:pPr>
-            <a:r>
-              <a:rPr lang="en-US" sz="3415" dirty="0">
-                <a:solidFill>
-                  <a:srgbClr val="071947"/>
-                </a:solidFill>
-                <a:latin typeface="Open Sans"/>
-                <a:ea typeface="Open Sans"/>
-                <a:cs typeface="Open Sans"/>
-                <a:sym typeface="Open Sans"/>
-              </a:rPr>
-              <a:t>Before technical implementation, we established the "Hospital Policy" to define how data moves through the system. We identified key business rules such as:</a:t>
-            </a:r>
-          </a:p>
-          <a:p>
-            <a:pPr algn="l">
-              <a:lnSpc>
-                <a:spcPts val="4781"/>
-              </a:lnSpc>
-            </a:pPr>
-            <a:endParaRPr lang="en-US" sz="3415" dirty="0">
-              <a:solidFill>
-                <a:srgbClr val="071947"/>
-              </a:solidFill>
-              <a:latin typeface="Open Sans"/>
-              <a:ea typeface="Open Sans"/>
-              <a:cs typeface="Open Sans"/>
-              <a:sym typeface="Open Sans"/>
-            </a:endParaRPr>
-          </a:p>
-          <a:p>
-            <a:pPr marL="737335" lvl="1" indent="-368668" algn="l">
-              <a:lnSpc>
-                <a:spcPts val="4781"/>
-              </a:lnSpc>
-              <a:buFont typeface="Arial"/>
-              <a:buChar char="•"/>
-            </a:pPr>
-            <a:r>
-              <a:rPr lang="en-US" sz="3415" dirty="0">
-                <a:solidFill>
-                  <a:srgbClr val="071947"/>
-                </a:solidFill>
-                <a:latin typeface="Open Sans"/>
-                <a:ea typeface="Open Sans"/>
-                <a:cs typeface="Open Sans"/>
-                <a:sym typeface="Open Sans"/>
-              </a:rPr>
-              <a:t>A patient cannot be hospitalized without a direct assignment from a doctor.</a:t>
-            </a:r>
-          </a:p>
-          <a:p>
-            <a:pPr marL="737335" lvl="1" indent="-368668" algn="l">
-              <a:lnSpc>
-                <a:spcPts val="4781"/>
-              </a:lnSpc>
-              <a:buFont typeface="Arial"/>
-              <a:buChar char="•"/>
-            </a:pPr>
-            <a:r>
-              <a:rPr lang="en-US" sz="3415" dirty="0">
-                <a:solidFill>
-                  <a:srgbClr val="071947"/>
-                </a:solidFill>
-                <a:latin typeface="Open Sans"/>
-                <a:ea typeface="Open Sans"/>
-                <a:cs typeface="Open Sans"/>
-                <a:sym typeface="Open Sans"/>
-              </a:rPr>
-              <a:t>Every financial transaction and bill must have a strictly tracked payment status.</a:t>
-            </a:r>
-          </a:p>
-          <a:p>
-            <a:pPr marL="737335" lvl="1" indent="-368668" algn="l">
-              <a:lnSpc>
-                <a:spcPts val="4781"/>
-              </a:lnSpc>
-              <a:buFont typeface="Arial"/>
-              <a:buChar char="•"/>
-            </a:pPr>
-            <a:r>
-              <a:rPr lang="en-US" sz="3415" dirty="0">
-                <a:solidFill>
-                  <a:srgbClr val="071947"/>
-                </a:solidFill>
-                <a:latin typeface="Open Sans"/>
-                <a:ea typeface="Open Sans"/>
-                <a:cs typeface="Open Sans"/>
-                <a:sym typeface="Open Sans"/>
-              </a:rPr>
-              <a:t>The system manages </a:t>
-            </a:r>
-            <a:r>
-              <a:rPr lang="en-US" sz="3415" b="1" dirty="0">
-                <a:solidFill>
-                  <a:srgbClr val="071947"/>
-                </a:solidFill>
-                <a:latin typeface="Open Sans Bold"/>
-                <a:ea typeface="Open Sans Bold"/>
-                <a:cs typeface="Open Sans Bold"/>
-                <a:sym typeface="Open Sans Bold"/>
-              </a:rPr>
-              <a:t>11 critical entities</a:t>
-            </a:r>
-            <a:r>
-              <a:rPr lang="en-US" sz="3415" dirty="0">
-                <a:solidFill>
-                  <a:srgbClr val="071947"/>
-                </a:solidFill>
-                <a:latin typeface="Open Sans"/>
-                <a:ea typeface="Open Sans"/>
-                <a:cs typeface="Open Sans"/>
-                <a:sym typeface="Open Sans"/>
-              </a:rPr>
-              <a:t>, including Doctors, Patients, Wards, and Surgeries. This phase allowed us to map complex healthcare processes into a structured data format.</a:t>
-            </a:r>
-          </a:p>
-          <a:p>
-            <a:pPr algn="l">
-              <a:lnSpc>
-                <a:spcPts val="4781"/>
-              </a:lnSpc>
-            </a:pPr>
-            <a:endParaRPr lang="en-US" sz="3415" dirty="0">
-              <a:solidFill>
-                <a:srgbClr val="071947"/>
-              </a:solidFill>
-              <a:latin typeface="Open Sans"/>
-              <a:ea typeface="Open Sans"/>
-              <a:cs typeface="Open Sans"/>
-              <a:sym typeface="Open Sans"/>
-            </a:endParaRPr>
-          </a:p>
-        </p:txBody>
-      </p:sp>
-      <p:sp>
-        <p:nvSpPr>
-          <p:cNvPr id="5" name="TextBox 5"/>
-          <p:cNvSpPr txBox="1"/>
-          <p:nvPr/>
-        </p:nvSpPr>
-        <p:spPr>
-          <a:xfrm>
-            <a:off x="2962987" y="616866"/>
-            <a:ext cx="12362027" cy="2155505"/>
-          </a:xfrm>
-          <a:prstGeom prst="rect">
-            <a:avLst/>
-          </a:prstGeom>
-        </p:spPr>
-        <p:txBody>
-          <a:bodyPr lIns="0" tIns="0" rIns="0" bIns="0" rtlCol="0" anchor="t">
-            <a:spAutoFit/>
-          </a:bodyPr>
-          <a:lstStyle/>
-          <a:p>
-            <a:pPr algn="ctr">
-              <a:lnSpc>
-                <a:spcPts val="8621"/>
-              </a:lnSpc>
-            </a:pPr>
-            <a:r>
-              <a:rPr lang="en-US" sz="6158">
-                <a:solidFill>
-                  <a:srgbClr val="071947"/>
-                </a:solidFill>
-                <a:latin typeface="Hammersmith One"/>
-                <a:ea typeface="Hammersmith One"/>
-                <a:cs typeface="Hammersmith One"/>
-                <a:sym typeface="Hammersmith One"/>
-              </a:rPr>
-              <a:t>The Foundation: Business Rules &amp; Domain Definition</a:t>
-            </a:r>
-          </a:p>
-        </p:txBody>
-      </p:sp>
-      <p:sp>
-        <p:nvSpPr>
-          <p:cNvPr id="6" name="Rectangle 1">
-            <a:extLst>
-              <a:ext uri="{FF2B5EF4-FFF2-40B4-BE49-F238E27FC236}">
-                <a16:creationId xmlns:a16="http://schemas.microsoft.com/office/drawing/2014/main" id="{D3BE912C-3B00-E94A-1EE8-2255D44634C6}"/>
-              </a:ext>
-            </a:extLst>
-          </p:cNvPr>
-          <p:cNvSpPr>
-            <a:spLocks noChangeArrowheads="1"/>
-          </p:cNvSpPr>
-          <p:nvPr/>
-        </p:nvSpPr>
-        <p:spPr bwMode="auto">
-          <a:xfrm>
-            <a:off x="0" y="0"/>
-            <a:ext cx="18288000" cy="0"/>
-          </a:xfrm>
-          <a:prstGeom prst="rect">
-            <a:avLst/>
-          </a:prstGeom>
-          <a:noFill/>
-          <a:ln>
-            <a:noFill/>
-          </a:ln>
-          <a:effectLst/>
-          <a:extLst>
-            <a:ext uri="{909E8E84-426E-40DD-AFC4-6F175D3DCCD1}">
-              <a14:hiddenFill xmlns:a14="http://schemas.microsoft.com/office/drawing/2010/main">
-                <a:solidFill>
-                  <a:schemeClr val="accent1"/>
-                </a:solidFill>
-              </a14:hiddenFill>
-            </a:ext>
-            <a:ext uri="{91240B29-F687-4F45-9708-019B960494DF}">
-              <a14:hiddenLine xmlns:a14="http://schemas.microsoft.com/office/drawing/2010/main" w="9525">
-                <a:solidFill>
-                  <a:schemeClr val="tx1"/>
-                </a:solidFill>
-                <a:miter lim="800000"/>
-                <a:headEnd/>
-                <a:tailEnd/>
-              </a14:hiddenLine>
-            </a:ext>
-            <a:ext uri="{AF507438-7753-43E0-B8FC-AC1667EBCBE1}">
-              <a14:hiddenEffects xmlns:a14="http://schemas.microsoft.com/office/drawing/2010/main">
-                <a:effectLst>
-                  <a:outerShdw dist="35921" dir="2700000" algn="ctr" rotWithShape="0">
-                    <a:schemeClr val="bg2"/>
-                  </a:outerShdw>
-                </a:effectLst>
-              </a14:hiddenEffects>
-            </a:ext>
-          </a:extLst>
-        </p:spPr>
-        <p:txBody>
-          <a:bodyPr vert="horz" wrap="none" lIns="91440" tIns="45720" rIns="91440" bIns="45720" numCol="1" anchor="ctr" anchorCtr="0" compatLnSpc="1">
-            <a:prstTxWarp prst="textNoShape">
-              <a:avLst/>
-            </a:prstTxWarp>
-            <a:spAutoFit/>
-          </a:bodyPr>
-          <a:lstStyle/>
-          <a:p>
-            <a:pPr marL="0" marR="0" lvl="0" indent="0" algn="l" defTabSz="914400" rtl="0" eaLnBrk="0" fontAlgn="base" latinLnBrk="0" hangingPunct="0">
-              <a:lnSpc>
-                <a:spcPct val="100000"/>
-              </a:lnSpc>
-              <a:spcBef>
-                <a:spcPct val="0"/>
-              </a:spcBef>
-              <a:spcAft>
-                <a:spcPct val="0"/>
-              </a:spcAft>
-              <a:buClrTx/>
-              <a:buSzTx/>
-              <a:buFontTx/>
-              <a:buChar char="•"/>
-              <a:tabLst/>
-            </a:pPr>
-            <a:r>
-              <a:rPr kumimoji="0" lang="en-US" altLang="en-US" sz="1800" b="1" i="0" u="none" strike="noStrike" cap="none" normalizeH="0" baseline="0">
-                <a:ln>
-                  <a:noFill/>
-                </a:ln>
-                <a:solidFill>
-                  <a:schemeClr val="tx1"/>
-                </a:solidFill>
-                <a:effectLst/>
-                <a:latin typeface="Arial" panose="020B0604020202020204" pitchFamily="34" charset="0"/>
-              </a:rPr>
-              <a:t>Hospitalization Requirement</a:t>
-            </a:r>
-            <a:r>
-              <a:rPr kumimoji="0" lang="en-US" altLang="en-US" sz="1800" b="0" i="0" u="none" strike="noStrike" cap="none" normalizeH="0" baseline="0">
-                <a:ln>
-                  <a:noFill/>
-                </a:ln>
-                <a:solidFill>
-                  <a:schemeClr val="tx1"/>
-                </a:solidFill>
-                <a:effectLst/>
-                <a:latin typeface="Arial" panose="020B0604020202020204" pitchFamily="34" charset="0"/>
-              </a:rPr>
-              <a:t>: A patient cannot be hospitalized without being assigned to a specific </a:t>
-            </a:r>
-            <a:r>
-              <a:rPr kumimoji="0" lang="en-US" altLang="en-US" sz="1800" b="1" i="0" u="none" strike="noStrike" cap="none" normalizeH="0" baseline="0">
-                <a:ln>
-                  <a:noFill/>
-                </a:ln>
-                <a:solidFill>
-                  <a:schemeClr val="tx1"/>
-                </a:solidFill>
-                <a:effectLst/>
-                <a:latin typeface="Arial" panose="020B0604020202020204" pitchFamily="34" charset="0"/>
-              </a:rPr>
-              <a:t>Ward</a:t>
-            </a:r>
-            <a:r>
-              <a:rPr kumimoji="0" lang="en-US" altLang="en-US" sz="1800" b="0" i="0" u="none" strike="noStrike" cap="none" normalizeH="0" baseline="0">
-                <a:ln>
-                  <a:noFill/>
-                </a:ln>
-                <a:solidFill>
-                  <a:schemeClr val="tx1"/>
-                </a:solidFill>
-                <a:effectLst/>
-                <a:latin typeface="Arial" panose="020B0604020202020204" pitchFamily="34" charset="0"/>
-              </a:rPr>
-              <a:t> with available </a:t>
-            </a:r>
-            <a:r>
-              <a:rPr kumimoji="0" lang="en-US" altLang="en-US" sz="1800" b="1" i="0" u="none" strike="noStrike" cap="none" normalizeH="0" baseline="0">
-                <a:ln>
-                  <a:noFill/>
-                </a:ln>
-                <a:solidFill>
-                  <a:schemeClr val="tx1"/>
-                </a:solidFill>
-                <a:effectLst/>
-                <a:latin typeface="Arial" panose="020B0604020202020204" pitchFamily="34" charset="0"/>
-              </a:rPr>
-              <a:t>Capacity</a:t>
-            </a:r>
-            <a:r>
-              <a:rPr kumimoji="0" lang="en-US" altLang="en-US" sz="1800" b="0" i="0" u="none" strike="noStrike" cap="none" normalizeH="0" baseline="0">
-                <a:ln>
-                  <a:noFill/>
-                </a:ln>
-                <a:solidFill>
-                  <a:schemeClr val="tx1"/>
-                </a:solidFill>
-                <a:effectLst/>
-                <a:latin typeface="Arial" panose="020B0604020202020204" pitchFamily="34" charset="0"/>
-              </a:rPr>
-              <a:t>.</a:t>
-            </a:r>
-          </a:p>
-          <a:p>
-            <a:pPr marL="0" marR="0" lvl="0" indent="0" algn="l" defTabSz="914400" rtl="0" eaLnBrk="0" fontAlgn="base" latinLnBrk="0" hangingPunct="0">
-              <a:lnSpc>
-                <a:spcPct val="100000"/>
-              </a:lnSpc>
-              <a:spcBef>
-                <a:spcPct val="0"/>
-              </a:spcBef>
-              <a:spcAft>
-                <a:spcPct val="0"/>
-              </a:spcAft>
-              <a:buClrTx/>
-              <a:buSzTx/>
-              <a:buFontTx/>
-              <a:buChar char="•"/>
-              <a:tabLst/>
-            </a:pPr>
-            <a:endParaRPr kumimoji="0" lang="en-US" altLang="en-US" sz="1800" b="0" i="0" u="none" strike="noStrike" cap="none" normalizeH="0" baseline="0">
-              <a:ln>
-                <a:noFill/>
-              </a:ln>
-              <a:solidFill>
-                <a:schemeClr val="tx1"/>
-              </a:solidFill>
-              <a:effectLst/>
-              <a:latin typeface="Arial" panose="020B0604020202020204" pitchFamily="34" charset="0"/>
-            </a:endParaRPr>
-          </a:p>
-        </p:txBody>
-      </p:sp>
-    </p:spTree>
-  </p:cSld>
-  <p:clrMapOvr>
-    <a:masterClrMapping/>
-  </p:clrMapOvr>
-  <p:transition>
-    <p:fade/>
-  </p:transition>
-</p:sld>
-</file>
-
-<file path=ppt/slides/slide4.xml><?xml version="1.0" encoding="utf-8"?>
-<p:sld xmlns:a="http://schemas.openxmlformats.org/drawingml/2006/main" xmlns:r="http://schemas.openxmlformats.org/officeDocument/2006/relationships" xmlns:p="http://schemas.openxmlformats.org/presentationml/2006/main">
-  <p:cSld>
-    <p:bg>
-      <p:bgPr>
-        <a:solidFill>
-          <a:srgbClr val="E3F4FF"/>
-        </a:solidFill>
-        <a:effectLst/>
-      </p:bgPr>
-    </p:bg>
-    <p:spTree>
-      <p:nvGrpSpPr>
-        <p:cNvPr id="1" name=""/>
-        <p:cNvGrpSpPr/>
-        <p:nvPr/>
-      </p:nvGrpSpPr>
-      <p:grpSpPr>
-        <a:xfrm>
-          <a:off x="0" y="0"/>
-          <a:ext cx="0" cy="0"/>
-          <a:chOff x="0" y="0"/>
-          <a:chExt cx="0" cy="0"/>
-        </a:xfrm>
-      </p:grpSpPr>
-      <p:sp>
-        <p:nvSpPr>
-          <p:cNvPr id="2" name="Freeform 2"/>
-          <p:cNvSpPr/>
-          <p:nvPr/>
-        </p:nvSpPr>
-        <p:spPr>
-          <a:xfrm>
-            <a:off x="0" y="6172200"/>
-            <a:ext cx="4114800" cy="4114800"/>
-          </a:xfrm>
-          <a:custGeom>
-            <a:avLst/>
-            <a:gdLst/>
-            <a:ahLst/>
-            <a:cxnLst/>
-            <a:rect l="l" t="t" r="r" b="b"/>
-            <a:pathLst>
-              <a:path w="4114800" h="4114800">
-                <a:moveTo>
-                  <a:pt x="0" y="0"/>
-                </a:moveTo>
-                <a:lnTo>
-                  <a:pt x="4114800" y="0"/>
-                </a:lnTo>
-                <a:lnTo>
-                  <a:pt x="4114800" y="4114800"/>
-                </a:lnTo>
-                <a:lnTo>
-                  <a:pt x="0" y="4114800"/>
-                </a:lnTo>
-                <a:lnTo>
-                  <a:pt x="0" y="0"/>
-                </a:lnTo>
-                <a:close/>
-              </a:path>
-            </a:pathLst>
-          </a:custGeom>
-          <a:blipFill>
-            <a:blip>
-              <a:extLst>
-                <a:ext uri="{96DAC541-7B7A-43D3-8B79-37D633B846F1}">
-                  <asvg:svgBlip xmlns:asvg="http://schemas.microsoft.com/office/drawing/2016/SVG/main" r:embed="rId2"/>
-                </a:ext>
-              </a:extLst>
-            </a:blip>
-            <a:stretch>
-              <a:fillRect/>
-            </a:stretch>
-          </a:blipFill>
-        </p:spPr>
-        <p:txBody>
-          <a:bodyPr/>
-          <a:lstStyle/>
-          <a:p>
-            <a:endParaRPr lang="en-US"/>
-          </a:p>
-        </p:txBody>
-      </p:sp>
-      <p:sp>
-        <p:nvSpPr>
-          <p:cNvPr id="3" name="Freeform 3"/>
-          <p:cNvSpPr/>
-          <p:nvPr/>
-        </p:nvSpPr>
-        <p:spPr>
-          <a:xfrm flipH="1" flipV="1">
-            <a:off x="14173200" y="0"/>
-            <a:ext cx="4114800" cy="4114800"/>
-          </a:xfrm>
-          <a:custGeom>
-            <a:avLst/>
-            <a:gdLst/>
-            <a:ahLst/>
-            <a:cxnLst/>
-            <a:rect l="l" t="t" r="r" b="b"/>
-            <a:pathLst>
-              <a:path w="4114800" h="4114800">
-                <a:moveTo>
-                  <a:pt x="4114800" y="4114800"/>
-                </a:moveTo>
-                <a:lnTo>
-                  <a:pt x="0" y="4114800"/>
-                </a:lnTo>
-                <a:lnTo>
-                  <a:pt x="0" y="0"/>
-                </a:lnTo>
-                <a:lnTo>
-                  <a:pt x="4114800" y="0"/>
-                </a:lnTo>
-                <a:lnTo>
-                  <a:pt x="4114800" y="4114800"/>
-                </a:lnTo>
-                <a:close/>
-              </a:path>
-            </a:pathLst>
-          </a:custGeom>
-          <a:blipFill>
-            <a:blip>
-              <a:extLst>
-                <a:ext uri="{96DAC541-7B7A-43D3-8B79-37D633B846F1}">
-                  <asvg:svgBlip xmlns:asvg="http://schemas.microsoft.com/office/drawing/2016/SVG/main" r:embed="rId2"/>
-                </a:ext>
-              </a:extLst>
-            </a:blip>
-            <a:stretch>
-              <a:fillRect/>
-            </a:stretch>
-          </a:blipFill>
-        </p:spPr>
-        <p:txBody>
-          <a:bodyPr/>
-          <a:lstStyle/>
-          <a:p>
-            <a:endParaRPr lang="en-US"/>
-          </a:p>
-        </p:txBody>
-      </p:sp>
-      <p:sp>
-        <p:nvSpPr>
-          <p:cNvPr id="4" name="Freeform 4"/>
-          <p:cNvSpPr/>
-          <p:nvPr/>
-        </p:nvSpPr>
-        <p:spPr>
-          <a:xfrm>
-            <a:off x="2426915" y="538487"/>
-            <a:ext cx="13434171" cy="9210025"/>
-          </a:xfrm>
-          <a:custGeom>
-            <a:avLst/>
-            <a:gdLst/>
-            <a:ahLst/>
-            <a:cxnLst/>
-            <a:rect l="l" t="t" r="r" b="b"/>
-            <a:pathLst>
-              <a:path w="13434171" h="9210025">
-                <a:moveTo>
-                  <a:pt x="0" y="0"/>
-                </a:moveTo>
-                <a:lnTo>
-                  <a:pt x="13434170" y="0"/>
-                </a:lnTo>
-                <a:lnTo>
-                  <a:pt x="13434170" y="9210026"/>
-                </a:lnTo>
-                <a:lnTo>
-                  <a:pt x="0" y="9210026"/>
-                </a:lnTo>
-                <a:lnTo>
-                  <a:pt x="0" y="0"/>
-                </a:lnTo>
-                <a:close/>
-              </a:path>
-            </a:pathLst>
-          </a:custGeom>
-          <a:blipFill>
-            <a:blip r:embed="rId3"/>
-            <a:stretch>
-              <a:fillRect l="-1449" r="-1449"/>
-            </a:stretch>
-          </a:blipFill>
-        </p:spPr>
-        <p:txBody>
-          <a:bodyPr/>
-          <a:lstStyle/>
-          <a:p>
-            <a:endParaRPr lang="en-US"/>
-          </a:p>
-        </p:txBody>
-      </p:sp>
-    </p:spTree>
-  </p:cSld>
-  <p:clrMapOvr>
-    <a:masterClrMapping/>
-  </p:clrMapOvr>
-  <p:transition>
-    <p:fade/>
-  </p:transition>
-</p:sld>
-</file>
-
-<file path=ppt/slides/slide5.xml><?xml version="1.0" encoding="utf-8"?>
-<p:sld xmlns:a="http://schemas.openxmlformats.org/drawingml/2006/main" xmlns:r="http://schemas.openxmlformats.org/officeDocument/2006/relationships" xmlns:p="http://schemas.openxmlformats.org/presentationml/2006/main">
-  <p:cSld>
-    <p:bg>
-      <p:bgPr>
-        <a:solidFill>
-          <a:srgbClr val="E3F4FF"/>
-        </a:solidFill>
-        <a:effectLst/>
-      </p:bgPr>
-    </p:bg>
-    <p:spTree>
-      <p:nvGrpSpPr>
-        <p:cNvPr id="1" name=""/>
-        <p:cNvGrpSpPr/>
-        <p:nvPr/>
-      </p:nvGrpSpPr>
-      <p:grpSpPr>
-        <a:xfrm>
-          <a:off x="0" y="0"/>
-          <a:ext cx="0" cy="0"/>
-          <a:chOff x="0" y="0"/>
-          <a:chExt cx="0" cy="0"/>
-        </a:xfrm>
-      </p:grpSpPr>
-      <p:sp>
-        <p:nvSpPr>
-          <p:cNvPr id="2" name="Freeform 2"/>
-          <p:cNvSpPr/>
-          <p:nvPr/>
-        </p:nvSpPr>
-        <p:spPr>
-          <a:xfrm>
-            <a:off x="25705" y="5817885"/>
-            <a:ext cx="3315198" cy="4370993"/>
-          </a:xfrm>
-          <a:custGeom>
-            <a:avLst/>
-            <a:gdLst/>
-            <a:ahLst/>
-            <a:cxnLst/>
-            <a:rect l="l" t="t" r="r" b="b"/>
-            <a:pathLst>
-              <a:path w="3315198" h="4370993">
-                <a:moveTo>
-                  <a:pt x="0" y="0"/>
-                </a:moveTo>
-                <a:lnTo>
-                  <a:pt x="3315198" y="0"/>
-                </a:lnTo>
-                <a:lnTo>
-                  <a:pt x="3315198" y="4370993"/>
-                </a:lnTo>
-                <a:lnTo>
-                  <a:pt x="0" y="4370993"/>
-                </a:lnTo>
-                <a:lnTo>
-                  <a:pt x="0" y="0"/>
-                </a:lnTo>
-                <a:close/>
-              </a:path>
-            </a:pathLst>
-          </a:custGeom>
-          <a:blipFill>
-            <a:blip>
-              <a:extLst>
-                <a:ext uri="{96DAC541-7B7A-43D3-8B79-37D633B846F1}">
-                  <asvg:svgBlip xmlns:asvg="http://schemas.microsoft.com/office/drawing/2016/SVG/main" r:embed="rId2"/>
-                </a:ext>
-              </a:extLst>
-            </a:blip>
-            <a:stretch>
-              <a:fillRect/>
-            </a:stretch>
-          </a:blipFill>
-        </p:spPr>
-        <p:txBody>
-          <a:bodyPr/>
-          <a:lstStyle/>
-          <a:p>
-            <a:endParaRPr lang="en-US"/>
-          </a:p>
-        </p:txBody>
-      </p:sp>
-      <p:sp>
-        <p:nvSpPr>
-          <p:cNvPr id="3" name="Freeform 3"/>
-          <p:cNvSpPr/>
-          <p:nvPr/>
-        </p:nvSpPr>
-        <p:spPr>
-          <a:xfrm flipH="1" flipV="1">
-            <a:off x="14972802" y="0"/>
-            <a:ext cx="3315198" cy="4370993"/>
-          </a:xfrm>
-          <a:custGeom>
-            <a:avLst/>
-            <a:gdLst/>
-            <a:ahLst/>
-            <a:cxnLst/>
-            <a:rect l="l" t="t" r="r" b="b"/>
-            <a:pathLst>
-              <a:path w="3315198" h="4370993">
-                <a:moveTo>
-                  <a:pt x="3315198" y="4370993"/>
-                </a:moveTo>
-                <a:lnTo>
-                  <a:pt x="0" y="4370993"/>
-                </a:lnTo>
-                <a:lnTo>
-                  <a:pt x="0" y="0"/>
-                </a:lnTo>
-                <a:lnTo>
-                  <a:pt x="3315198" y="0"/>
-                </a:lnTo>
-                <a:lnTo>
-                  <a:pt x="3315198" y="4370993"/>
-                </a:lnTo>
-                <a:close/>
-              </a:path>
-            </a:pathLst>
-          </a:custGeom>
-          <a:blipFill>
-            <a:blip>
-              <a:extLst>
-                <a:ext uri="{96DAC541-7B7A-43D3-8B79-37D633B846F1}">
-                  <asvg:svgBlip xmlns:asvg="http://schemas.microsoft.com/office/drawing/2016/SVG/main" r:embed="rId2"/>
-                </a:ext>
-              </a:extLst>
-            </a:blip>
-            <a:stretch>
-              <a:fillRect/>
-            </a:stretch>
-          </a:blipFill>
-        </p:spPr>
-        <p:txBody>
-          <a:bodyPr/>
-          <a:lstStyle/>
-          <a:p>
-            <a:endParaRPr lang="en-US"/>
-          </a:p>
-        </p:txBody>
-      </p:sp>
-      <p:sp>
-        <p:nvSpPr>
-          <p:cNvPr id="4" name="TextBox 4"/>
-          <p:cNvSpPr txBox="1"/>
-          <p:nvPr/>
-        </p:nvSpPr>
-        <p:spPr>
-          <a:xfrm>
-            <a:off x="2946264" y="933450"/>
-            <a:ext cx="12395472" cy="880888"/>
-          </a:xfrm>
-          <a:prstGeom prst="rect">
-            <a:avLst/>
-          </a:prstGeom>
-        </p:spPr>
-        <p:txBody>
-          <a:bodyPr lIns="0" tIns="0" rIns="0" bIns="0" rtlCol="0" anchor="t">
-            <a:spAutoFit/>
-          </a:bodyPr>
-          <a:lstStyle/>
-          <a:p>
-            <a:pPr algn="ctr">
-              <a:lnSpc>
-                <a:spcPts val="7224"/>
-              </a:lnSpc>
-            </a:pPr>
-            <a:r>
-              <a:rPr lang="en-US" sz="5160">
-                <a:solidFill>
-                  <a:srgbClr val="071947"/>
-                </a:solidFill>
-                <a:latin typeface="Hammersmith One"/>
-                <a:ea typeface="Hammersmith One"/>
-                <a:cs typeface="Hammersmith One"/>
-                <a:sym typeface="Hammersmith One"/>
-              </a:rPr>
-              <a:t>Database Implementation (PostgreSQL)</a:t>
-            </a:r>
-          </a:p>
-        </p:txBody>
-      </p:sp>
-      <p:sp>
-        <p:nvSpPr>
-          <p:cNvPr id="5" name="TextBox 5"/>
-          <p:cNvSpPr txBox="1"/>
-          <p:nvPr/>
-        </p:nvSpPr>
-        <p:spPr>
-          <a:xfrm>
-            <a:off x="1518198" y="2203820"/>
-            <a:ext cx="15251605" cy="7170980"/>
-          </a:xfrm>
-          <a:prstGeom prst="rect">
-            <a:avLst/>
-          </a:prstGeom>
-        </p:spPr>
-        <p:txBody>
-          <a:bodyPr lIns="0" tIns="0" rIns="0" bIns="0" rtlCol="0" anchor="t">
-            <a:spAutoFit/>
-          </a:bodyPr>
-          <a:lstStyle/>
-          <a:p>
-            <a:pPr algn="l">
-              <a:lnSpc>
-                <a:spcPts val="4781"/>
-              </a:lnSpc>
-            </a:pPr>
-            <a:r>
-              <a:rPr lang="en-US" sz="3415">
-                <a:solidFill>
-                  <a:srgbClr val="071947"/>
-                </a:solidFill>
-                <a:latin typeface="Open Sans"/>
-                <a:ea typeface="Open Sans"/>
-                <a:cs typeface="Open Sans"/>
-                <a:sym typeface="Open Sans"/>
-              </a:rPr>
-              <a:t>We converted our ER model into a Relational Schema, applying the 3rd Normal Form (3NF). This ensures that every piece of information is stored in exactly one place, eliminating data redundancy.</a:t>
-            </a:r>
-          </a:p>
-          <a:p>
-            <a:pPr algn="l">
-              <a:lnSpc>
-                <a:spcPts val="4781"/>
-              </a:lnSpc>
-            </a:pPr>
-            <a:endParaRPr lang="en-US" sz="3415">
-              <a:solidFill>
-                <a:srgbClr val="071947"/>
-              </a:solidFill>
-              <a:latin typeface="Open Sans"/>
-              <a:ea typeface="Open Sans"/>
-              <a:cs typeface="Open Sans"/>
-              <a:sym typeface="Open Sans"/>
-            </a:endParaRPr>
-          </a:p>
-          <a:p>
-            <a:pPr algn="l">
-              <a:lnSpc>
-                <a:spcPts val="4781"/>
-              </a:lnSpc>
-            </a:pPr>
-            <a:r>
-              <a:rPr lang="en-US" sz="3415" b="1">
-                <a:solidFill>
-                  <a:srgbClr val="071947"/>
-                </a:solidFill>
-                <a:latin typeface="Open Sans Bold"/>
-                <a:ea typeface="Open Sans Bold"/>
-                <a:cs typeface="Open Sans Bold"/>
-                <a:sym typeface="Open Sans Bold"/>
-              </a:rPr>
-              <a:t>Technical Features:</a:t>
-            </a:r>
-          </a:p>
-          <a:p>
-            <a:pPr marL="737335" lvl="1" indent="-368668" algn="l">
-              <a:lnSpc>
-                <a:spcPts val="4781"/>
-              </a:lnSpc>
-              <a:buFont typeface="Arial"/>
-              <a:buChar char="•"/>
-            </a:pPr>
-            <a:r>
-              <a:rPr lang="en-US" sz="3415">
-                <a:solidFill>
-                  <a:srgbClr val="071947"/>
-                </a:solidFill>
-                <a:latin typeface="Open Sans"/>
-                <a:ea typeface="Open Sans"/>
-                <a:cs typeface="Open Sans"/>
-                <a:sym typeface="Open Sans"/>
-              </a:rPr>
-              <a:t>Implemented </a:t>
-            </a:r>
-            <a:r>
-              <a:rPr lang="en-US" sz="3415" b="1">
-                <a:solidFill>
-                  <a:srgbClr val="071947"/>
-                </a:solidFill>
-                <a:latin typeface="Open Sans Bold"/>
-                <a:ea typeface="Open Sans Bold"/>
-                <a:cs typeface="Open Sans Bold"/>
-                <a:sym typeface="Open Sans Bold"/>
-              </a:rPr>
-              <a:t>11 interconnected tables</a:t>
-            </a:r>
-            <a:r>
-              <a:rPr lang="en-US" sz="3415">
-                <a:solidFill>
-                  <a:srgbClr val="071947"/>
-                </a:solidFill>
-                <a:latin typeface="Open Sans"/>
-                <a:ea typeface="Open Sans"/>
-                <a:cs typeface="Open Sans"/>
-                <a:sym typeface="Open Sans"/>
-              </a:rPr>
-              <a:t> in pgAdmin.</a:t>
-            </a:r>
-          </a:p>
-          <a:p>
-            <a:pPr marL="737335" lvl="1" indent="-368668" algn="l">
-              <a:lnSpc>
-                <a:spcPts val="4781"/>
-              </a:lnSpc>
-              <a:buFont typeface="Arial"/>
-              <a:buChar char="•"/>
-            </a:pPr>
-            <a:r>
-              <a:rPr lang="en-US" sz="3415">
-                <a:solidFill>
-                  <a:srgbClr val="071947"/>
-                </a:solidFill>
-                <a:latin typeface="Open Sans"/>
-                <a:ea typeface="Open Sans"/>
-                <a:cs typeface="Open Sans"/>
-                <a:sym typeface="Open Sans"/>
-              </a:rPr>
-              <a:t>Primary Keys: Ensured unique identification for every record.</a:t>
-            </a:r>
-          </a:p>
-          <a:p>
-            <a:pPr marL="737335" lvl="1" indent="-368668" algn="l">
-              <a:lnSpc>
-                <a:spcPts val="4781"/>
-              </a:lnSpc>
-              <a:buFont typeface="Arial"/>
-              <a:buChar char="•"/>
-            </a:pPr>
-            <a:r>
-              <a:rPr lang="en-US" sz="3415">
-                <a:solidFill>
-                  <a:srgbClr val="071947"/>
-                </a:solidFill>
-                <a:latin typeface="Open Sans"/>
-                <a:ea typeface="Open Sans"/>
-                <a:cs typeface="Open Sans"/>
-                <a:sym typeface="Open Sans"/>
-              </a:rPr>
-              <a:t>Foreign Keys: Established rigid links between tables (e.g., linking a Surgery record to a specific Patient).</a:t>
-            </a:r>
-          </a:p>
-          <a:p>
-            <a:pPr marL="737335" lvl="1" indent="-368668" algn="l">
-              <a:lnSpc>
-                <a:spcPts val="4781"/>
-              </a:lnSpc>
-              <a:buFont typeface="Arial"/>
-              <a:buChar char="•"/>
-            </a:pPr>
-            <a:r>
-              <a:rPr lang="en-US" sz="3415">
-                <a:solidFill>
-                  <a:srgbClr val="071947"/>
-                </a:solidFill>
-                <a:latin typeface="Open Sans"/>
-                <a:ea typeface="Open Sans"/>
-                <a:cs typeface="Open Sans"/>
-                <a:sym typeface="Open Sans"/>
-              </a:rPr>
-              <a:t>Constraints: Used NOT NULL and UNIQUE constraints to maintain high data quality and prevent "garbage" data.</a:t>
-            </a:r>
-          </a:p>
-          <a:p>
-            <a:pPr algn="l">
-              <a:lnSpc>
-                <a:spcPts val="4781"/>
-              </a:lnSpc>
-              <a:spcBef>
-                <a:spcPct val="0"/>
-              </a:spcBef>
-            </a:pPr>
-            <a:endParaRPr lang="en-US" sz="3415">
-              <a:solidFill>
-                <a:srgbClr val="071947"/>
-              </a:solidFill>
-              <a:latin typeface="Open Sans"/>
-              <a:ea typeface="Open Sans"/>
-              <a:cs typeface="Open Sans"/>
-              <a:sym typeface="Open Sans"/>
-            </a:endParaRPr>
-          </a:p>
-        </p:txBody>
-      </p:sp>
-    </p:spTree>
-  </p:cSld>
-  <p:clrMapOvr>
-    <a:masterClrMapping/>
-  </p:clrMapOvr>
-  <p:transition>
-    <p:fade/>
-  </p:transition>
-</p:sld>
-</file>
-
-<file path=ppt/slides/slide6.xml><?xml version="1.0" encoding="utf-8"?>
-<p:sld xmlns:a="http://schemas.openxmlformats.org/drawingml/2006/main" xmlns:r="http://schemas.openxmlformats.org/officeDocument/2006/relationships" xmlns:p="http://schemas.openxmlformats.org/presentationml/2006/main">
-  <p:cSld>
-    <p:bg>
-      <p:bgPr>
-        <a:solidFill>
-          <a:srgbClr val="E3F4FF"/>
-        </a:solidFill>
-        <a:effectLst/>
-      </p:bgPr>
-    </p:bg>
-    <p:spTree>
-      <p:nvGrpSpPr>
-        <p:cNvPr id="1" name=""/>
-        <p:cNvGrpSpPr/>
-        <p:nvPr/>
-      </p:nvGrpSpPr>
-      <p:grpSpPr>
-        <a:xfrm>
-          <a:off x="0" y="0"/>
-          <a:ext cx="0" cy="0"/>
-          <a:chOff x="0" y="0"/>
-          <a:chExt cx="0" cy="0"/>
-        </a:xfrm>
-      </p:grpSpPr>
-      <p:sp>
-        <p:nvSpPr>
-          <p:cNvPr id="2" name="Freeform 2"/>
-          <p:cNvSpPr/>
-          <p:nvPr/>
-        </p:nvSpPr>
-        <p:spPr>
-          <a:xfrm flipV="1">
-            <a:off x="0" y="0"/>
-            <a:ext cx="4366036" cy="3715100"/>
-          </a:xfrm>
-          <a:custGeom>
-            <a:avLst/>
-            <a:gdLst/>
-            <a:ahLst/>
-            <a:cxnLst/>
-            <a:rect l="l" t="t" r="r" b="b"/>
-            <a:pathLst>
-              <a:path w="4366036" h="3715100">
-                <a:moveTo>
-                  <a:pt x="0" y="3715100"/>
-                </a:moveTo>
-                <a:lnTo>
-                  <a:pt x="4366036" y="3715100"/>
-                </a:lnTo>
-                <a:lnTo>
-                  <a:pt x="4366036" y="0"/>
-                </a:lnTo>
-                <a:lnTo>
-                  <a:pt x="0" y="0"/>
-                </a:lnTo>
-                <a:lnTo>
-                  <a:pt x="0" y="3715100"/>
-                </a:lnTo>
-                <a:close/>
-              </a:path>
-            </a:pathLst>
-          </a:custGeom>
-          <a:blipFill>
-            <a:blip>
-              <a:extLst>
-                <a:ext uri="{96DAC541-7B7A-43D3-8B79-37D633B846F1}">
-                  <asvg:svgBlip xmlns:asvg="http://schemas.microsoft.com/office/drawing/2016/SVG/main" r:embed="rId2"/>
-                </a:ext>
-              </a:extLst>
-            </a:blip>
-            <a:stretch>
-              <a:fillRect/>
-            </a:stretch>
-          </a:blipFill>
-        </p:spPr>
-        <p:txBody>
-          <a:bodyPr/>
-          <a:lstStyle/>
-          <a:p>
-            <a:endParaRPr lang="en-US"/>
-          </a:p>
-        </p:txBody>
-      </p:sp>
-      <p:sp>
-        <p:nvSpPr>
-          <p:cNvPr id="3" name="Freeform 3"/>
-          <p:cNvSpPr/>
-          <p:nvPr/>
-        </p:nvSpPr>
-        <p:spPr>
-          <a:xfrm flipH="1">
-            <a:off x="13921964" y="6571900"/>
-            <a:ext cx="4366036" cy="3715100"/>
-          </a:xfrm>
-          <a:custGeom>
-            <a:avLst/>
-            <a:gdLst/>
-            <a:ahLst/>
-            <a:cxnLst/>
-            <a:rect l="l" t="t" r="r" b="b"/>
-            <a:pathLst>
-              <a:path w="4366036" h="3715100">
-                <a:moveTo>
-                  <a:pt x="4366036" y="0"/>
-                </a:moveTo>
-                <a:lnTo>
-                  <a:pt x="0" y="0"/>
-                </a:lnTo>
-                <a:lnTo>
-                  <a:pt x="0" y="3715100"/>
-                </a:lnTo>
-                <a:lnTo>
-                  <a:pt x="4366036" y="3715100"/>
-                </a:lnTo>
-                <a:lnTo>
-                  <a:pt x="4366036" y="0"/>
-                </a:lnTo>
-                <a:close/>
-              </a:path>
-            </a:pathLst>
-          </a:custGeom>
-          <a:blipFill>
-            <a:blip>
-              <a:extLst>
-                <a:ext uri="{96DAC541-7B7A-43D3-8B79-37D633B846F1}">
-                  <asvg:svgBlip xmlns:asvg="http://schemas.microsoft.com/office/drawing/2016/SVG/main" r:embed="rId2"/>
-                </a:ext>
-              </a:extLst>
-            </a:blip>
-            <a:stretch>
-              <a:fillRect/>
-            </a:stretch>
-          </a:blipFill>
-        </p:spPr>
-        <p:txBody>
-          <a:bodyPr/>
-          <a:lstStyle/>
-          <a:p>
-            <a:endParaRPr lang="en-US"/>
-          </a:p>
-        </p:txBody>
-      </p:sp>
-      <p:sp>
-        <p:nvSpPr>
-          <p:cNvPr id="4" name="TextBox 4"/>
-          <p:cNvSpPr txBox="1"/>
-          <p:nvPr/>
-        </p:nvSpPr>
-        <p:spPr>
-          <a:xfrm>
-            <a:off x="3006629" y="923925"/>
-            <a:ext cx="12274742" cy="922410"/>
-          </a:xfrm>
-          <a:prstGeom prst="rect">
-            <a:avLst/>
-          </a:prstGeom>
-        </p:spPr>
-        <p:txBody>
-          <a:bodyPr lIns="0" tIns="0" rIns="0" bIns="0" rtlCol="0" anchor="t">
-            <a:spAutoFit/>
-          </a:bodyPr>
-          <a:lstStyle/>
-          <a:p>
-            <a:pPr algn="ctr">
-              <a:lnSpc>
-                <a:spcPts val="7518"/>
-              </a:lnSpc>
-            </a:pPr>
-            <a:r>
-              <a:rPr lang="en-US" sz="5370">
-                <a:solidFill>
-                  <a:srgbClr val="071947"/>
-                </a:solidFill>
-                <a:latin typeface="Hammersmith One"/>
-                <a:ea typeface="Hammersmith One"/>
-                <a:cs typeface="Hammersmith One"/>
-                <a:sym typeface="Hammersmith One"/>
-              </a:rPr>
-              <a:t>Database Implementation (MongoDB)</a:t>
-            </a:r>
-          </a:p>
-        </p:txBody>
-      </p:sp>
-      <p:sp>
-        <p:nvSpPr>
-          <p:cNvPr id="5" name="TextBox 5"/>
-          <p:cNvSpPr txBox="1"/>
-          <p:nvPr/>
-        </p:nvSpPr>
-        <p:spPr>
-          <a:xfrm>
-            <a:off x="1964733" y="2305890"/>
-            <a:ext cx="14358533" cy="6570932"/>
-          </a:xfrm>
-          <a:prstGeom prst="rect">
-            <a:avLst/>
-          </a:prstGeom>
-        </p:spPr>
-        <p:txBody>
-          <a:bodyPr lIns="0" tIns="0" rIns="0" bIns="0" rtlCol="0" anchor="t">
-            <a:spAutoFit/>
-          </a:bodyPr>
-          <a:lstStyle/>
-          <a:p>
-            <a:pPr algn="l">
-              <a:lnSpc>
-                <a:spcPts val="4781"/>
-              </a:lnSpc>
-            </a:pPr>
-            <a:r>
-              <a:rPr lang="en-US" sz="3415" dirty="0">
-                <a:solidFill>
-                  <a:srgbClr val="071947"/>
-                </a:solidFill>
-                <a:latin typeface="Open Sans"/>
-                <a:ea typeface="Open Sans"/>
-                <a:cs typeface="Open Sans"/>
-                <a:sym typeface="Open Sans"/>
-              </a:rPr>
-              <a:t>For the medical history part of our project, we chose MongoDB to handle non-relational data.</a:t>
-            </a:r>
-          </a:p>
-          <a:p>
-            <a:pPr marL="737335" lvl="1" indent="-368668" algn="l">
-              <a:lnSpc>
-                <a:spcPts val="4781"/>
-              </a:lnSpc>
-              <a:buFont typeface="Arial"/>
-              <a:buChar char="•"/>
-            </a:pPr>
-            <a:r>
-              <a:rPr lang="en-US" sz="3415" b="1" dirty="0">
-                <a:solidFill>
-                  <a:srgbClr val="071947"/>
-                </a:solidFill>
-                <a:latin typeface="Open Sans Bold"/>
-                <a:ea typeface="Open Sans Bold"/>
-                <a:cs typeface="Open Sans Bold"/>
-                <a:sym typeface="Open Sans Bold"/>
-              </a:rPr>
-              <a:t>Embedding Strategy:</a:t>
-            </a:r>
-            <a:r>
-              <a:rPr lang="en-US" sz="3415" dirty="0">
-                <a:solidFill>
-                  <a:srgbClr val="071947"/>
-                </a:solidFill>
-                <a:latin typeface="Open Sans"/>
-                <a:ea typeface="Open Sans"/>
-                <a:cs typeface="Open Sans"/>
-                <a:sym typeface="Open Sans"/>
-              </a:rPr>
-              <a:t> Instead of splitting data into many tables, we store surgery records and bills directly inside the Patient document.</a:t>
-            </a:r>
-          </a:p>
-          <a:p>
-            <a:pPr marL="737335" lvl="1" indent="-368668" algn="l">
-              <a:lnSpc>
-                <a:spcPts val="4781"/>
-              </a:lnSpc>
-              <a:buFont typeface="Arial"/>
-              <a:buChar char="•"/>
-            </a:pPr>
-            <a:r>
-              <a:rPr lang="en-US" sz="3415" b="1" dirty="0">
-                <a:solidFill>
-                  <a:srgbClr val="071947"/>
-                </a:solidFill>
-                <a:latin typeface="Open Sans Bold"/>
-                <a:ea typeface="Open Sans Bold"/>
-                <a:cs typeface="Open Sans Bold"/>
-                <a:sym typeface="Open Sans Bold"/>
-              </a:rPr>
-              <a:t>Performance Optimization:</a:t>
-            </a:r>
-            <a:r>
-              <a:rPr lang="en-US" sz="3415" dirty="0">
-                <a:solidFill>
-                  <a:srgbClr val="071947"/>
-                </a:solidFill>
-                <a:latin typeface="Open Sans"/>
-                <a:ea typeface="Open Sans"/>
-                <a:cs typeface="Open Sans"/>
-                <a:sym typeface="Open Sans"/>
-              </a:rPr>
-              <a:t> This design is optimized for "Read-Heavy" operations. A doctor can retrieve a patient’s entire history in a single query without using slow "Join" operations.</a:t>
-            </a:r>
-          </a:p>
-          <a:p>
-            <a:pPr marL="737335" lvl="1" indent="-368668" algn="l">
-              <a:lnSpc>
-                <a:spcPts val="4781"/>
-              </a:lnSpc>
-              <a:buFont typeface="Arial"/>
-              <a:buChar char="•"/>
-            </a:pPr>
-            <a:r>
-              <a:rPr lang="en-US" sz="3415" b="1" dirty="0">
-                <a:solidFill>
-                  <a:srgbClr val="071947"/>
-                </a:solidFill>
-                <a:latin typeface="Open Sans Bold"/>
-                <a:ea typeface="Open Sans Bold"/>
-                <a:cs typeface="Open Sans Bold"/>
-                <a:sym typeface="Open Sans Bold"/>
-              </a:rPr>
-              <a:t>Validation:</a:t>
-            </a:r>
-            <a:r>
-              <a:rPr lang="en-US" sz="3415" dirty="0">
-                <a:solidFill>
-                  <a:srgbClr val="071947"/>
-                </a:solidFill>
-                <a:latin typeface="Open Sans"/>
-                <a:ea typeface="Open Sans"/>
-                <a:cs typeface="Open Sans"/>
-                <a:sym typeface="Open Sans"/>
-              </a:rPr>
-              <a:t> We implemented </a:t>
-            </a:r>
-            <a:r>
-              <a:rPr lang="en-US" sz="3415" b="1" dirty="0">
-                <a:solidFill>
-                  <a:srgbClr val="071947"/>
-                </a:solidFill>
-                <a:latin typeface="Open Sans Bold"/>
-                <a:ea typeface="Open Sans Bold"/>
-                <a:cs typeface="Open Sans Bold"/>
-                <a:sym typeface="Open Sans Bold"/>
-              </a:rPr>
-              <a:t>JSON Schema Validation</a:t>
-            </a:r>
-            <a:r>
-              <a:rPr lang="en-US" sz="3415" dirty="0">
-                <a:solidFill>
-                  <a:srgbClr val="071947"/>
-                </a:solidFill>
-                <a:latin typeface="Open Sans"/>
-                <a:ea typeface="Open Sans"/>
-                <a:cs typeface="Open Sans"/>
-                <a:sym typeface="Open Sans"/>
-              </a:rPr>
-              <a:t> to enforce data types, making our NoSQL collections as reliable as SQL tables.</a:t>
-            </a:r>
-          </a:p>
-          <a:p>
-            <a:pPr algn="l">
-              <a:lnSpc>
-                <a:spcPts val="4781"/>
-              </a:lnSpc>
-              <a:spcBef>
-                <a:spcPct val="0"/>
-              </a:spcBef>
-            </a:pPr>
-            <a:endParaRPr lang="en-US" sz="3415" dirty="0">
-              <a:solidFill>
-                <a:srgbClr val="071947"/>
-              </a:solidFill>
-              <a:latin typeface="Open Sans"/>
-              <a:ea typeface="Open Sans"/>
-              <a:cs typeface="Open Sans"/>
-              <a:sym typeface="Open Sans"/>
-            </a:endParaRPr>
-          </a:p>
-        </p:txBody>
-      </p:sp>
-    </p:spTree>
-  </p:cSld>
-  <p:clrMapOvr>
-    <a:masterClrMapping/>
-  </p:clrMapOvr>
-  <p:transition>
-    <p:fade/>
-  </p:transition>
-</p:sld>
-</file>
-
-<file path=ppt/slides/slide7.xml><?xml version="1.0" encoding="utf-8"?>
-<p:sld xmlns:a="http://schemas.openxmlformats.org/drawingml/2006/main" xmlns:r="http://schemas.openxmlformats.org/officeDocument/2006/relationships" xmlns:p="http://schemas.openxmlformats.org/presentationml/2006/main">
-  <p:cSld>
-    <p:bg>
-      <p:bgPr>
-        <a:solidFill>
-          <a:srgbClr val="E3F4FF"/>
-        </a:solidFill>
-        <a:effectLst/>
-      </p:bgPr>
-    </p:bg>
-    <p:spTree>
-      <p:nvGrpSpPr>
-        <p:cNvPr id="1" name=""/>
-        <p:cNvGrpSpPr/>
-        <p:nvPr/>
-      </p:nvGrpSpPr>
-      <p:grpSpPr>
-        <a:xfrm>
-          <a:off x="0" y="0"/>
-          <a:ext cx="0" cy="0"/>
-          <a:chOff x="0" y="0"/>
-          <a:chExt cx="0" cy="0"/>
-        </a:xfrm>
-      </p:grpSpPr>
-      <p:sp>
-        <p:nvSpPr>
-          <p:cNvPr id="2" name="Freeform 2"/>
-          <p:cNvSpPr/>
-          <p:nvPr/>
-        </p:nvSpPr>
-        <p:spPr>
-          <a:xfrm flipH="1" flipV="1">
-            <a:off x="14972802" y="0"/>
-            <a:ext cx="3315198" cy="4370993"/>
-          </a:xfrm>
-          <a:custGeom>
-            <a:avLst/>
-            <a:gdLst/>
-            <a:ahLst/>
-            <a:cxnLst/>
-            <a:rect l="l" t="t" r="r" b="b"/>
-            <a:pathLst>
-              <a:path w="3315198" h="4370993">
-                <a:moveTo>
-                  <a:pt x="3315198" y="4370993"/>
-                </a:moveTo>
-                <a:lnTo>
-                  <a:pt x="0" y="4370993"/>
-                </a:lnTo>
-                <a:lnTo>
-                  <a:pt x="0" y="0"/>
-                </a:lnTo>
-                <a:lnTo>
-                  <a:pt x="3315198" y="0"/>
-                </a:lnTo>
-                <a:lnTo>
-                  <a:pt x="3315198" y="4370993"/>
-                </a:lnTo>
-                <a:close/>
-              </a:path>
-            </a:pathLst>
-          </a:custGeom>
-          <a:blipFill>
-            <a:blip>
-              <a:extLst>
-                <a:ext uri="{96DAC541-7B7A-43D3-8B79-37D633B846F1}">
-                  <asvg:svgBlip xmlns:asvg="http://schemas.microsoft.com/office/drawing/2016/SVG/main" r:embed="rId2"/>
-                </a:ext>
-              </a:extLst>
-            </a:blip>
-            <a:stretch>
-              <a:fillRect/>
-            </a:stretch>
-          </a:blipFill>
-        </p:spPr>
-        <p:txBody>
-          <a:bodyPr/>
-          <a:lstStyle/>
-          <a:p>
-            <a:endParaRPr lang="en-US"/>
-          </a:p>
-        </p:txBody>
-      </p:sp>
-      <p:sp>
-        <p:nvSpPr>
-          <p:cNvPr id="3" name="Freeform 3"/>
-          <p:cNvSpPr/>
-          <p:nvPr/>
-        </p:nvSpPr>
-        <p:spPr>
-          <a:xfrm rot="-10800000" flipH="1" flipV="1">
-            <a:off x="0" y="5916007"/>
-            <a:ext cx="3315198" cy="4370993"/>
-          </a:xfrm>
-          <a:custGeom>
-            <a:avLst/>
-            <a:gdLst/>
-            <a:ahLst/>
-            <a:cxnLst/>
-            <a:rect l="l" t="t" r="r" b="b"/>
-            <a:pathLst>
-              <a:path w="3315198" h="4370993">
-                <a:moveTo>
-                  <a:pt x="3315198" y="4370993"/>
-                </a:moveTo>
-                <a:lnTo>
-                  <a:pt x="0" y="4370993"/>
-                </a:lnTo>
-                <a:lnTo>
-                  <a:pt x="0" y="0"/>
-                </a:lnTo>
-                <a:lnTo>
-                  <a:pt x="3315198" y="0"/>
-                </a:lnTo>
-                <a:lnTo>
-                  <a:pt x="3315198" y="4370993"/>
-                </a:lnTo>
-                <a:close/>
-              </a:path>
-            </a:pathLst>
-          </a:custGeom>
-          <a:blipFill>
-            <a:blip>
-              <a:extLst>
-                <a:ext uri="{96DAC541-7B7A-43D3-8B79-37D633B846F1}">
-                  <asvg:svgBlip xmlns:asvg="http://schemas.microsoft.com/office/drawing/2016/SVG/main" r:embed="rId2"/>
-                </a:ext>
-              </a:extLst>
-            </a:blip>
-            <a:stretch>
-              <a:fillRect/>
-            </a:stretch>
-          </a:blipFill>
-        </p:spPr>
-        <p:txBody>
-          <a:bodyPr/>
-          <a:lstStyle/>
-          <a:p>
-            <a:endParaRPr lang="en-US"/>
-          </a:p>
-        </p:txBody>
-      </p:sp>
-      <p:pic>
-        <p:nvPicPr>
-          <p:cNvPr id="5" name="Picture 4">
-            <a:extLst>
-              <a:ext uri="{FF2B5EF4-FFF2-40B4-BE49-F238E27FC236}">
-                <a16:creationId xmlns:a16="http://schemas.microsoft.com/office/drawing/2014/main" id="{0F09309B-471C-7C43-EF9C-A8D34F8518F9}"/>
-              </a:ext>
-            </a:extLst>
-          </p:cNvPr>
-          <p:cNvPicPr>
-            <a:picLocks noChangeAspect="1"/>
-          </p:cNvPicPr>
-          <p:nvPr/>
-        </p:nvPicPr>
-        <p:blipFill>
-          <a:blip r:embed="rId3"/>
-          <a:stretch>
-            <a:fillRect/>
-          </a:stretch>
-        </p:blipFill>
-        <p:spPr>
-          <a:xfrm>
-            <a:off x="0" y="647700"/>
-            <a:ext cx="18252409" cy="8991600"/>
-          </a:xfrm>
-          <a:prstGeom prst="rect">
-            <a:avLst/>
-          </a:prstGeom>
-        </p:spPr>
-      </p:pic>
-    </p:spTree>
-  </p:cSld>
-  <p:clrMapOvr>
-    <a:masterClrMapping/>
-  </p:clrMapOvr>
-  <p:transition>
-    <p:fade/>
-  </p:transition>
-</p:sld>
-</file>
-
-<file path=ppt/slides/slide8.xml><?xml version="1.0" encoding="utf-8"?>
-<p:sld xmlns:a="http://schemas.openxmlformats.org/drawingml/2006/main" xmlns:r="http://schemas.openxmlformats.org/officeDocument/2006/relationships" xmlns:p="http://schemas.openxmlformats.org/presentationml/2006/main">
-  <p:cSld>
-    <p:bg>
-      <p:bgPr>
-        <a:solidFill>
-          <a:srgbClr val="E3F4FF"/>
-        </a:solidFill>
-        <a:effectLst/>
-      </p:bgPr>
-    </p:bg>
-    <p:spTree>
-      <p:nvGrpSpPr>
-        <p:cNvPr id="1" name=""/>
-        <p:cNvGrpSpPr/>
-        <p:nvPr/>
-      </p:nvGrpSpPr>
-      <p:grpSpPr>
-        <a:xfrm>
-          <a:off x="0" y="0"/>
-          <a:ext cx="0" cy="0"/>
-          <a:chOff x="0" y="0"/>
-          <a:chExt cx="0" cy="0"/>
-        </a:xfrm>
-      </p:grpSpPr>
-      <p:sp>
-        <p:nvSpPr>
-          <p:cNvPr id="2" name="Freeform 2"/>
-          <p:cNvSpPr/>
-          <p:nvPr/>
-        </p:nvSpPr>
-        <p:spPr>
-          <a:xfrm flipV="1">
-            <a:off x="0" y="7112454"/>
-            <a:ext cx="5727460" cy="3174546"/>
-          </a:xfrm>
-          <a:custGeom>
-            <a:avLst/>
-            <a:gdLst/>
-            <a:ahLst/>
-            <a:cxnLst/>
-            <a:rect l="l" t="t" r="r" b="b"/>
-            <a:pathLst>
-              <a:path w="5727460" h="3174546">
-                <a:moveTo>
-                  <a:pt x="0" y="3174546"/>
-                </a:moveTo>
-                <a:lnTo>
-                  <a:pt x="5727460" y="3174546"/>
-                </a:lnTo>
-                <a:lnTo>
-                  <a:pt x="5727460" y="0"/>
-                </a:lnTo>
-                <a:lnTo>
-                  <a:pt x="0" y="0"/>
-                </a:lnTo>
-                <a:lnTo>
-                  <a:pt x="0" y="3174546"/>
-                </a:lnTo>
-                <a:close/>
-              </a:path>
-            </a:pathLst>
-          </a:custGeom>
-          <a:blipFill>
-            <a:blip>
-              <a:extLst>
-                <a:ext uri="{96DAC541-7B7A-43D3-8B79-37D633B846F1}">
-                  <asvg:svgBlip xmlns:asvg="http://schemas.microsoft.com/office/drawing/2016/SVG/main" r:embed="rId2"/>
-                </a:ext>
-              </a:extLst>
-            </a:blip>
-            <a:stretch>
-              <a:fillRect/>
-            </a:stretch>
-          </a:blipFill>
-        </p:spPr>
-        <p:txBody>
-          <a:bodyPr/>
-          <a:lstStyle/>
-          <a:p>
-            <a:endParaRPr lang="en-US"/>
-          </a:p>
-        </p:txBody>
-      </p:sp>
-      <p:sp>
-        <p:nvSpPr>
-          <p:cNvPr id="3" name="TextBox 3"/>
-          <p:cNvSpPr txBox="1"/>
-          <p:nvPr/>
-        </p:nvSpPr>
-        <p:spPr>
-          <a:xfrm>
-            <a:off x="2346275" y="1191618"/>
-            <a:ext cx="13621079" cy="1004280"/>
-          </a:xfrm>
-          <a:prstGeom prst="rect">
-            <a:avLst/>
-          </a:prstGeom>
-        </p:spPr>
-        <p:txBody>
-          <a:bodyPr lIns="0" tIns="0" rIns="0" bIns="0" rtlCol="0" anchor="t">
-            <a:spAutoFit/>
-          </a:bodyPr>
-          <a:lstStyle/>
-          <a:p>
-            <a:pPr algn="ctr">
-              <a:lnSpc>
-                <a:spcPts val="8271"/>
-              </a:lnSpc>
-            </a:pPr>
-            <a:r>
-              <a:rPr lang="en-US" sz="5908">
-                <a:solidFill>
-                  <a:srgbClr val="071947"/>
-                </a:solidFill>
-                <a:latin typeface="Hammersmith One"/>
-                <a:ea typeface="Hammersmith One"/>
-                <a:cs typeface="Hammersmith One"/>
-                <a:sym typeface="Hammersmith One"/>
-              </a:rPr>
-              <a:t>Bridging the Gap: The Java Application</a:t>
-            </a:r>
-          </a:p>
-        </p:txBody>
-      </p:sp>
-      <p:sp>
-        <p:nvSpPr>
-          <p:cNvPr id="4" name="TextBox 4"/>
-          <p:cNvSpPr txBox="1"/>
-          <p:nvPr/>
-        </p:nvSpPr>
-        <p:spPr>
-          <a:xfrm>
-            <a:off x="2305935" y="2628548"/>
-            <a:ext cx="13661419" cy="6114687"/>
-          </a:xfrm>
-          <a:prstGeom prst="rect">
-            <a:avLst/>
-          </a:prstGeom>
-        </p:spPr>
-        <p:txBody>
-          <a:bodyPr lIns="0" tIns="0" rIns="0" bIns="0" rtlCol="0" anchor="t">
-            <a:spAutoFit/>
-          </a:bodyPr>
-          <a:lstStyle/>
-          <a:p>
-            <a:pPr marL="737335" lvl="1" indent="-368668" algn="l">
-              <a:lnSpc>
-                <a:spcPts val="4781"/>
-              </a:lnSpc>
-              <a:spcBef>
-                <a:spcPct val="0"/>
-              </a:spcBef>
-              <a:buFont typeface="Arial"/>
-              <a:buChar char="•"/>
-            </a:pPr>
-            <a:r>
-              <a:rPr lang="en-US" sz="3415" dirty="0">
-                <a:solidFill>
-                  <a:srgbClr val="071947"/>
-                </a:solidFill>
-                <a:latin typeface="Open Sans"/>
-                <a:ea typeface="Open Sans"/>
-                <a:cs typeface="Open Sans"/>
-                <a:sym typeface="Open Sans"/>
-              </a:rPr>
-              <a:t>We devel</a:t>
-            </a:r>
-            <a:r>
-              <a:rPr lang="en-US" sz="3415" u="none" strike="noStrike" dirty="0">
-                <a:solidFill>
-                  <a:srgbClr val="071947"/>
-                </a:solidFill>
-                <a:latin typeface="Open Sans"/>
-                <a:ea typeface="Open Sans"/>
-                <a:cs typeface="Open Sans"/>
-                <a:sym typeface="Open Sans"/>
-              </a:rPr>
-              <a:t>oped a functional application using Java and IntelliJ IDEA to interact with the PostgreSQL database.</a:t>
-            </a:r>
-          </a:p>
-          <a:p>
-            <a:pPr marL="737335" lvl="1" indent="-368668" algn="l">
-              <a:lnSpc>
-                <a:spcPts val="4781"/>
-              </a:lnSpc>
-              <a:spcBef>
-                <a:spcPct val="0"/>
-              </a:spcBef>
-              <a:buFont typeface="Arial"/>
-              <a:buChar char="•"/>
-            </a:pPr>
-            <a:r>
-              <a:rPr lang="en-US" sz="3415" u="none" strike="noStrike" dirty="0">
-                <a:solidFill>
-                  <a:srgbClr val="071947"/>
-                </a:solidFill>
-                <a:latin typeface="Open Sans"/>
-                <a:ea typeface="Open Sans"/>
-                <a:cs typeface="Open Sans"/>
-                <a:sym typeface="Open Sans"/>
-              </a:rPr>
-              <a:t>Connectivity: We used JDBC (Java Database Connectivity) as a translator between our code and the SQL server.</a:t>
-            </a:r>
-          </a:p>
-          <a:p>
-            <a:pPr marL="737335" lvl="1" indent="-368668" algn="l">
-              <a:lnSpc>
-                <a:spcPts val="4781"/>
-              </a:lnSpc>
-              <a:spcBef>
-                <a:spcPct val="0"/>
-              </a:spcBef>
-              <a:buFont typeface="Arial"/>
-              <a:buChar char="•"/>
-            </a:pPr>
-            <a:r>
-              <a:rPr lang="en-US" sz="3415" u="none" strike="noStrike" dirty="0">
-                <a:solidFill>
-                  <a:srgbClr val="071947"/>
-                </a:solidFill>
-                <a:latin typeface="Open Sans"/>
-                <a:ea typeface="Open Sans"/>
-                <a:cs typeface="Open Sans"/>
-                <a:sym typeface="Open Sans"/>
-              </a:rPr>
-              <a:t>Full CRUD Support: The application allows users to:</a:t>
-            </a:r>
-          </a:p>
-          <a:p>
-            <a:pPr marL="737335" lvl="1" indent="-368668" algn="l">
-              <a:lnSpc>
-                <a:spcPts val="4781"/>
-              </a:lnSpc>
-              <a:spcBef>
-                <a:spcPct val="0"/>
-              </a:spcBef>
-              <a:buFont typeface="Arial"/>
-              <a:buChar char="•"/>
-            </a:pPr>
-            <a:r>
-              <a:rPr lang="en-US" sz="3415" u="none" strike="noStrike" dirty="0">
-                <a:solidFill>
-                  <a:srgbClr val="071947"/>
-                </a:solidFill>
-                <a:latin typeface="Open Sans"/>
-                <a:ea typeface="Open Sans"/>
-                <a:cs typeface="Open Sans"/>
-                <a:sym typeface="Open Sans"/>
-              </a:rPr>
-              <a:t>Create: Register new patients.</a:t>
-            </a:r>
-          </a:p>
-          <a:p>
-            <a:pPr marL="737335" lvl="1" indent="-368668">
-              <a:lnSpc>
-                <a:spcPts val="4781"/>
-              </a:lnSpc>
-              <a:spcBef>
-                <a:spcPct val="0"/>
-              </a:spcBef>
-              <a:buFont typeface="Arial"/>
-              <a:buChar char="•"/>
-            </a:pPr>
-            <a:r>
-              <a:rPr lang="en-US" sz="3415" u="none" strike="noStrike" dirty="0">
-                <a:solidFill>
-                  <a:srgbClr val="071947"/>
-                </a:solidFill>
-                <a:latin typeface="Open Sans"/>
-                <a:ea typeface="Open Sans"/>
-                <a:cs typeface="Open Sans"/>
-                <a:sym typeface="Open Sans"/>
-              </a:rPr>
-              <a:t>Read: Search and view </a:t>
-            </a:r>
-            <a:r>
-              <a:rPr lang="en-US" sz="3415" dirty="0">
-                <a:solidFill>
-                  <a:srgbClr val="071947"/>
-                </a:solidFill>
-                <a:latin typeface="Open Sans"/>
-                <a:ea typeface="Open Sans"/>
-                <a:cs typeface="Open Sans"/>
-                <a:sym typeface="Open Sans"/>
-              </a:rPr>
-              <a:t>patients</a:t>
-            </a:r>
-            <a:r>
-              <a:rPr lang="en-US" sz="3415" u="none" strike="noStrike" dirty="0">
-                <a:solidFill>
-                  <a:srgbClr val="071947"/>
-                </a:solidFill>
-                <a:latin typeface="Open Sans"/>
-                <a:ea typeface="Open Sans"/>
-                <a:cs typeface="Open Sans"/>
-                <a:sym typeface="Open Sans"/>
-              </a:rPr>
-              <a:t>.</a:t>
-            </a:r>
-          </a:p>
-          <a:p>
-            <a:pPr marL="737335" lvl="1" indent="-368668" algn="l">
-              <a:lnSpc>
-                <a:spcPts val="4781"/>
-              </a:lnSpc>
-              <a:spcBef>
-                <a:spcPct val="0"/>
-              </a:spcBef>
-              <a:buFont typeface="Arial"/>
-              <a:buChar char="•"/>
-            </a:pPr>
-            <a:r>
-              <a:rPr lang="en-US" sz="3415" u="none" strike="noStrike" dirty="0">
-                <a:solidFill>
-                  <a:srgbClr val="071947"/>
-                </a:solidFill>
-                <a:latin typeface="Open Sans"/>
-                <a:ea typeface="Open Sans"/>
-                <a:cs typeface="Open Sans"/>
-                <a:sym typeface="Open Sans"/>
-              </a:rPr>
-              <a:t>Update: Modify patient details.</a:t>
-            </a:r>
-          </a:p>
-          <a:p>
-            <a:pPr marL="737335" lvl="1" indent="-368668" algn="l">
-              <a:lnSpc>
-                <a:spcPts val="4781"/>
-              </a:lnSpc>
-              <a:spcBef>
-                <a:spcPct val="0"/>
-              </a:spcBef>
-              <a:buFont typeface="Arial"/>
-              <a:buChar char="•"/>
-            </a:pPr>
-            <a:r>
-              <a:rPr lang="en-US" sz="3415" u="none" strike="noStrike" dirty="0">
-                <a:solidFill>
-                  <a:srgbClr val="071947"/>
-                </a:solidFill>
-                <a:latin typeface="Open Sans"/>
-                <a:ea typeface="Open Sans"/>
-                <a:cs typeface="Open Sans"/>
-                <a:sym typeface="Open Sans"/>
-              </a:rPr>
-              <a:t>Delete: Remove records when necessary. This demonstrates the real-world usability of our database design.</a:t>
-            </a:r>
-          </a:p>
-        </p:txBody>
-      </p:sp>
-      <p:sp>
-        <p:nvSpPr>
-          <p:cNvPr id="5" name="Freeform 5"/>
-          <p:cNvSpPr/>
-          <p:nvPr/>
-        </p:nvSpPr>
-        <p:spPr>
-          <a:xfrm flipH="1">
-            <a:off x="12560540" y="-68755"/>
-            <a:ext cx="5727460" cy="3174546"/>
-          </a:xfrm>
-          <a:custGeom>
-            <a:avLst/>
-            <a:gdLst/>
-            <a:ahLst/>
-            <a:cxnLst/>
-            <a:rect l="l" t="t" r="r" b="b"/>
-            <a:pathLst>
-              <a:path w="5727460" h="3174546">
-                <a:moveTo>
-                  <a:pt x="5727460" y="0"/>
-                </a:moveTo>
-                <a:lnTo>
-                  <a:pt x="0" y="0"/>
-                </a:lnTo>
-                <a:lnTo>
-                  <a:pt x="0" y="3174546"/>
-                </a:lnTo>
-                <a:lnTo>
-                  <a:pt x="5727460" y="3174546"/>
-                </a:lnTo>
-                <a:lnTo>
-                  <a:pt x="5727460" y="0"/>
-                </a:lnTo>
-                <a:close/>
-              </a:path>
-            </a:pathLst>
-          </a:custGeom>
-          <a:blipFill>
-            <a:blip>
-              <a:extLst>
-                <a:ext uri="{96DAC541-7B7A-43D3-8B79-37D633B846F1}">
-                  <asvg:svgBlip xmlns:asvg="http://schemas.microsoft.com/office/drawing/2016/SVG/main" r:embed="rId2"/>
-                </a:ext>
-              </a:extLst>
-            </a:blip>
-            <a:stretch>
-              <a:fillRect/>
-            </a:stretch>
-          </a:blipFill>
-        </p:spPr>
-        <p:txBody>
-          <a:bodyPr/>
-          <a:lstStyle/>
-          <a:p>
-            <a:endParaRPr lang="en-US"/>
-          </a:p>
-        </p:txBody>
-      </p:sp>
-    </p:spTree>
-  </p:cSld>
-  <p:clrMapOvr>
-    <a:masterClrMapping/>
-  </p:clrMapOvr>
-</p:sld>
-</file>
-
-<file path=ppt/slides/slide9.xml><?xml version="1.0" encoding="utf-8"?>
+<file path=ppt/slides/slide10.xml><?xml version="1.0" encoding="utf-8"?>
 <p:sld xmlns:a="http://schemas.openxmlformats.org/drawingml/2006/main" xmlns:r="http://schemas.openxmlformats.org/officeDocument/2006/relationships" xmlns:p="http://schemas.openxmlformats.org/presentationml/2006/main">
   <p:cSld>
     <p:bg>
@@ -6184,6 +3878,2445 @@
   <p:transition>
     <p:fade/>
   </p:transition>
+</p:sld>
+</file>
+
+<file path=ppt/slides/slide2.xml><?xml version="1.0" encoding="utf-8"?>
+<p:sld xmlns:a="http://schemas.openxmlformats.org/drawingml/2006/main" xmlns:r="http://schemas.openxmlformats.org/officeDocument/2006/relationships" xmlns:p="http://schemas.openxmlformats.org/presentationml/2006/main">
+  <p:cSld>
+    <p:bg>
+      <p:bgPr>
+        <a:solidFill>
+          <a:srgbClr val="E3F4FF"/>
+        </a:solidFill>
+        <a:effectLst/>
+      </p:bgPr>
+    </p:bg>
+    <p:spTree>
+      <p:nvGrpSpPr>
+        <p:cNvPr id="1" name=""/>
+        <p:cNvGrpSpPr/>
+        <p:nvPr/>
+      </p:nvGrpSpPr>
+      <p:grpSpPr>
+        <a:xfrm>
+          <a:off x="0" y="0"/>
+          <a:ext cx="0" cy="0"/>
+          <a:chOff x="0" y="0"/>
+          <a:chExt cx="0" cy="0"/>
+        </a:xfrm>
+      </p:grpSpPr>
+      <p:sp>
+        <p:nvSpPr>
+          <p:cNvPr id="2" name="Freeform 2"/>
+          <p:cNvSpPr/>
+          <p:nvPr/>
+        </p:nvSpPr>
+        <p:spPr>
+          <a:xfrm>
+            <a:off x="0" y="6889242"/>
+            <a:ext cx="18288000" cy="4559808"/>
+          </a:xfrm>
+          <a:custGeom>
+            <a:avLst/>
+            <a:gdLst/>
+            <a:ahLst/>
+            <a:cxnLst/>
+            <a:rect l="l" t="t" r="r" b="b"/>
+            <a:pathLst>
+              <a:path w="18288000" h="4559808">
+                <a:moveTo>
+                  <a:pt x="0" y="0"/>
+                </a:moveTo>
+                <a:lnTo>
+                  <a:pt x="18288000" y="0"/>
+                </a:lnTo>
+                <a:lnTo>
+                  <a:pt x="18288000" y="4559808"/>
+                </a:lnTo>
+                <a:lnTo>
+                  <a:pt x="0" y="4559808"/>
+                </a:lnTo>
+                <a:lnTo>
+                  <a:pt x="0" y="0"/>
+                </a:lnTo>
+                <a:close/>
+              </a:path>
+            </a:pathLst>
+          </a:custGeom>
+          <a:blipFill>
+            <a:blip>
+              <a:extLst>
+                <a:ext uri="{96DAC541-7B7A-43D3-8B79-37D633B846F1}">
+                  <asvg:svgBlip xmlns:asvg="http://schemas.microsoft.com/office/drawing/2016/SVG/main" r:embed="rId2"/>
+                </a:ext>
+              </a:extLst>
+            </a:blip>
+            <a:stretch>
+              <a:fillRect/>
+            </a:stretch>
+          </a:blipFill>
+        </p:spPr>
+        <p:txBody>
+          <a:bodyPr/>
+          <a:lstStyle/>
+          <a:p>
+            <a:endParaRPr lang="en-US"/>
+          </a:p>
+        </p:txBody>
+      </p:sp>
+      <p:sp>
+        <p:nvSpPr>
+          <p:cNvPr id="3" name="TextBox 3"/>
+          <p:cNvSpPr txBox="1"/>
+          <p:nvPr/>
+        </p:nvSpPr>
+        <p:spPr>
+          <a:xfrm>
+            <a:off x="4125961" y="838200"/>
+            <a:ext cx="10036077" cy="1734535"/>
+          </a:xfrm>
+          <a:prstGeom prst="rect">
+            <a:avLst/>
+          </a:prstGeom>
+        </p:spPr>
+        <p:txBody>
+          <a:bodyPr lIns="0" tIns="0" rIns="0" bIns="0" rtlCol="0" anchor="t">
+            <a:spAutoFit/>
+          </a:bodyPr>
+          <a:lstStyle/>
+          <a:p>
+            <a:pPr algn="ctr">
+              <a:lnSpc>
+                <a:spcPts val="14198"/>
+              </a:lnSpc>
+            </a:pPr>
+            <a:r>
+              <a:rPr lang="en-US" sz="10141">
+                <a:solidFill>
+                  <a:srgbClr val="071947"/>
+                </a:solidFill>
+                <a:latin typeface="Hammersmith One"/>
+                <a:ea typeface="Hammersmith One"/>
+                <a:cs typeface="Hammersmith One"/>
+                <a:sym typeface="Hammersmith One"/>
+              </a:rPr>
+              <a:t>Introduction</a:t>
+            </a:r>
+          </a:p>
+        </p:txBody>
+      </p:sp>
+      <p:sp>
+        <p:nvSpPr>
+          <p:cNvPr id="4" name="TextBox 4"/>
+          <p:cNvSpPr txBox="1"/>
+          <p:nvPr/>
+        </p:nvSpPr>
+        <p:spPr>
+          <a:xfrm>
+            <a:off x="1892114" y="2981902"/>
+            <a:ext cx="14503773" cy="4461250"/>
+          </a:xfrm>
+          <a:prstGeom prst="rect">
+            <a:avLst/>
+          </a:prstGeom>
+        </p:spPr>
+        <p:txBody>
+          <a:bodyPr lIns="0" tIns="0" rIns="0" bIns="0" rtlCol="0" anchor="t">
+            <a:spAutoFit/>
+          </a:bodyPr>
+          <a:lstStyle/>
+          <a:p>
+            <a:pPr algn="just">
+              <a:lnSpc>
+                <a:spcPts val="5064"/>
+              </a:lnSpc>
+            </a:pPr>
+            <a:r>
+              <a:rPr lang="en-US" sz="3617">
+                <a:solidFill>
+                  <a:srgbClr val="071947"/>
+                </a:solidFill>
+                <a:latin typeface="Forum"/>
+                <a:ea typeface="Forum"/>
+                <a:cs typeface="Forum"/>
+                <a:sym typeface="Forum"/>
+              </a:rPr>
+              <a:t>The primary goal of this study is to design and implement a robust "Hospital Management System" that automates healthcare workflows such as patient registration, doctor scheduling, surgical history tracking, and financial billing. The project demonstrates the practical application of a hybrid database approach: using a Relational Database (PostgreSQL) for transactional integrity and a NoSQL Database (MongoDB) for flexible, high-performance data retrieval.</a:t>
+            </a:r>
+          </a:p>
+        </p:txBody>
+      </p:sp>
+    </p:spTree>
+  </p:cSld>
+  <p:clrMapOvr>
+    <a:masterClrMapping/>
+  </p:clrMapOvr>
+  <p:transition>
+    <p:fade/>
+  </p:transition>
+</p:sld>
+</file>
+
+<file path=ppt/slides/slide3.xml><?xml version="1.0" encoding="utf-8"?>
+<p:sld xmlns:a="http://schemas.openxmlformats.org/drawingml/2006/main" xmlns:r="http://schemas.openxmlformats.org/officeDocument/2006/relationships" xmlns:p="http://schemas.openxmlformats.org/presentationml/2006/main">
+  <p:cSld>
+    <p:bg>
+      <p:bgPr>
+        <a:solidFill>
+          <a:srgbClr val="E3F4FF"/>
+        </a:solidFill>
+        <a:effectLst/>
+      </p:bgPr>
+    </p:bg>
+    <p:spTree>
+      <p:nvGrpSpPr>
+        <p:cNvPr id="1" name=""/>
+        <p:cNvGrpSpPr/>
+        <p:nvPr/>
+      </p:nvGrpSpPr>
+      <p:grpSpPr>
+        <a:xfrm>
+          <a:off x="0" y="0"/>
+          <a:ext cx="0" cy="0"/>
+          <a:chOff x="0" y="0"/>
+          <a:chExt cx="0" cy="0"/>
+        </a:xfrm>
+      </p:grpSpPr>
+      <p:sp>
+        <p:nvSpPr>
+          <p:cNvPr id="2" name="Freeform 2"/>
+          <p:cNvSpPr/>
+          <p:nvPr/>
+        </p:nvSpPr>
+        <p:spPr>
+          <a:xfrm flipH="1" flipV="1">
+            <a:off x="0" y="39349"/>
+            <a:ext cx="6491574" cy="3434365"/>
+          </a:xfrm>
+          <a:custGeom>
+            <a:avLst/>
+            <a:gdLst/>
+            <a:ahLst/>
+            <a:cxnLst/>
+            <a:rect l="l" t="t" r="r" b="b"/>
+            <a:pathLst>
+              <a:path w="6491574" h="3434365">
+                <a:moveTo>
+                  <a:pt x="6491574" y="3434364"/>
+                </a:moveTo>
+                <a:lnTo>
+                  <a:pt x="0" y="3434364"/>
+                </a:lnTo>
+                <a:lnTo>
+                  <a:pt x="0" y="0"/>
+                </a:lnTo>
+                <a:lnTo>
+                  <a:pt x="6491574" y="0"/>
+                </a:lnTo>
+                <a:lnTo>
+                  <a:pt x="6491574" y="3434364"/>
+                </a:lnTo>
+                <a:close/>
+              </a:path>
+            </a:pathLst>
+          </a:custGeom>
+          <a:blipFill>
+            <a:blip>
+              <a:extLst>
+                <a:ext uri="{96DAC541-7B7A-43D3-8B79-37D633B846F1}">
+                  <asvg:svgBlip xmlns:asvg="http://schemas.microsoft.com/office/drawing/2016/SVG/main" r:embed="rId2"/>
+                </a:ext>
+              </a:extLst>
+            </a:blip>
+            <a:stretch>
+              <a:fillRect/>
+            </a:stretch>
+          </a:blipFill>
+        </p:spPr>
+        <p:txBody>
+          <a:bodyPr/>
+          <a:lstStyle/>
+          <a:p>
+            <a:endParaRPr lang="en-US"/>
+          </a:p>
+        </p:txBody>
+      </p:sp>
+      <p:sp>
+        <p:nvSpPr>
+          <p:cNvPr id="3" name="Freeform 3"/>
+          <p:cNvSpPr/>
+          <p:nvPr/>
+        </p:nvSpPr>
+        <p:spPr>
+          <a:xfrm>
+            <a:off x="11796426" y="6852635"/>
+            <a:ext cx="6491574" cy="3434365"/>
+          </a:xfrm>
+          <a:custGeom>
+            <a:avLst/>
+            <a:gdLst/>
+            <a:ahLst/>
+            <a:cxnLst/>
+            <a:rect l="l" t="t" r="r" b="b"/>
+            <a:pathLst>
+              <a:path w="6491574" h="3434365">
+                <a:moveTo>
+                  <a:pt x="0" y="0"/>
+                </a:moveTo>
+                <a:lnTo>
+                  <a:pt x="6491574" y="0"/>
+                </a:lnTo>
+                <a:lnTo>
+                  <a:pt x="6491574" y="3434365"/>
+                </a:lnTo>
+                <a:lnTo>
+                  <a:pt x="0" y="3434365"/>
+                </a:lnTo>
+                <a:lnTo>
+                  <a:pt x="0" y="0"/>
+                </a:lnTo>
+                <a:close/>
+              </a:path>
+            </a:pathLst>
+          </a:custGeom>
+          <a:blipFill>
+            <a:blip>
+              <a:extLst>
+                <a:ext uri="{96DAC541-7B7A-43D3-8B79-37D633B846F1}">
+                  <asvg:svgBlip xmlns:asvg="http://schemas.microsoft.com/office/drawing/2016/SVG/main" r:embed="rId2"/>
+                </a:ext>
+              </a:extLst>
+            </a:blip>
+            <a:stretch>
+              <a:fillRect/>
+            </a:stretch>
+          </a:blipFill>
+        </p:spPr>
+        <p:txBody>
+          <a:bodyPr/>
+          <a:lstStyle/>
+          <a:p>
+            <a:endParaRPr lang="en-US"/>
+          </a:p>
+        </p:txBody>
+      </p:sp>
+      <p:sp>
+        <p:nvSpPr>
+          <p:cNvPr id="4" name="TextBox 4"/>
+          <p:cNvSpPr txBox="1"/>
+          <p:nvPr/>
+        </p:nvSpPr>
+        <p:spPr>
+          <a:xfrm>
+            <a:off x="1209856" y="2715221"/>
+            <a:ext cx="15868288" cy="7345793"/>
+          </a:xfrm>
+          <a:prstGeom prst="rect">
+            <a:avLst/>
+          </a:prstGeom>
+        </p:spPr>
+        <p:txBody>
+          <a:bodyPr lIns="0" tIns="0" rIns="0" bIns="0" rtlCol="0" anchor="t">
+            <a:spAutoFit/>
+          </a:bodyPr>
+          <a:lstStyle/>
+          <a:p>
+            <a:pPr algn="l">
+              <a:lnSpc>
+                <a:spcPts val="4781"/>
+              </a:lnSpc>
+            </a:pPr>
+            <a:r>
+              <a:rPr lang="en-US" sz="3415" dirty="0">
+                <a:solidFill>
+                  <a:srgbClr val="071947"/>
+                </a:solidFill>
+                <a:latin typeface="Open Sans"/>
+                <a:ea typeface="Open Sans"/>
+                <a:cs typeface="Open Sans"/>
+                <a:sym typeface="Open Sans"/>
+              </a:rPr>
+              <a:t>Before technical implementation, we established the "Hospital Policy" to define how data moves through the system. We identified key business rules such as:</a:t>
+            </a:r>
+          </a:p>
+          <a:p>
+            <a:pPr algn="l">
+              <a:lnSpc>
+                <a:spcPts val="4781"/>
+              </a:lnSpc>
+            </a:pPr>
+            <a:endParaRPr lang="en-US" sz="3415" dirty="0">
+              <a:solidFill>
+                <a:srgbClr val="071947"/>
+              </a:solidFill>
+              <a:latin typeface="Open Sans"/>
+              <a:ea typeface="Open Sans"/>
+              <a:cs typeface="Open Sans"/>
+              <a:sym typeface="Open Sans"/>
+            </a:endParaRPr>
+          </a:p>
+          <a:p>
+            <a:pPr marL="737335" lvl="1" indent="-368668" algn="l">
+              <a:lnSpc>
+                <a:spcPts val="4781"/>
+              </a:lnSpc>
+              <a:buFont typeface="Arial"/>
+              <a:buChar char="•"/>
+            </a:pPr>
+            <a:r>
+              <a:rPr lang="en-US" sz="3415" dirty="0">
+                <a:solidFill>
+                  <a:srgbClr val="071947"/>
+                </a:solidFill>
+                <a:latin typeface="Open Sans"/>
+                <a:ea typeface="Open Sans"/>
+                <a:cs typeface="Open Sans"/>
+                <a:sym typeface="Open Sans"/>
+              </a:rPr>
+              <a:t>A patient cannot be hospitalized without a direct assignment from a doctor.</a:t>
+            </a:r>
+          </a:p>
+          <a:p>
+            <a:pPr marL="737335" lvl="1" indent="-368668" algn="l">
+              <a:lnSpc>
+                <a:spcPts val="4781"/>
+              </a:lnSpc>
+              <a:buFont typeface="Arial"/>
+              <a:buChar char="•"/>
+            </a:pPr>
+            <a:r>
+              <a:rPr lang="en-US" sz="3415" dirty="0">
+                <a:solidFill>
+                  <a:srgbClr val="071947"/>
+                </a:solidFill>
+                <a:latin typeface="Open Sans"/>
+                <a:ea typeface="Open Sans"/>
+                <a:cs typeface="Open Sans"/>
+                <a:sym typeface="Open Sans"/>
+              </a:rPr>
+              <a:t>Every financial transaction and bill must have a strictly tracked payment status.</a:t>
+            </a:r>
+          </a:p>
+          <a:p>
+            <a:pPr marL="737335" lvl="1" indent="-368668" algn="l">
+              <a:lnSpc>
+                <a:spcPts val="4781"/>
+              </a:lnSpc>
+              <a:buFont typeface="Arial"/>
+              <a:buChar char="•"/>
+            </a:pPr>
+            <a:r>
+              <a:rPr lang="en-US" sz="3415" dirty="0">
+                <a:solidFill>
+                  <a:srgbClr val="071947"/>
+                </a:solidFill>
+                <a:latin typeface="Open Sans"/>
+                <a:ea typeface="Open Sans"/>
+                <a:cs typeface="Open Sans"/>
+                <a:sym typeface="Open Sans"/>
+              </a:rPr>
+              <a:t>The system manages </a:t>
+            </a:r>
+            <a:r>
+              <a:rPr lang="en-US" sz="3415" b="1" dirty="0">
+                <a:solidFill>
+                  <a:srgbClr val="071947"/>
+                </a:solidFill>
+                <a:latin typeface="Open Sans Bold"/>
+                <a:ea typeface="Open Sans Bold"/>
+                <a:cs typeface="Open Sans Bold"/>
+                <a:sym typeface="Open Sans Bold"/>
+              </a:rPr>
+              <a:t>11 critical entities</a:t>
+            </a:r>
+            <a:r>
+              <a:rPr lang="en-US" sz="3415" dirty="0">
+                <a:solidFill>
+                  <a:srgbClr val="071947"/>
+                </a:solidFill>
+                <a:latin typeface="Open Sans"/>
+                <a:ea typeface="Open Sans"/>
+                <a:cs typeface="Open Sans"/>
+                <a:sym typeface="Open Sans"/>
+              </a:rPr>
+              <a:t>, including Doctors, Patients, Wards, and Surgeries. This phase allowed us to map complex healthcare processes into a structured data format.</a:t>
+            </a:r>
+          </a:p>
+          <a:p>
+            <a:pPr algn="l">
+              <a:lnSpc>
+                <a:spcPts val="4781"/>
+              </a:lnSpc>
+            </a:pPr>
+            <a:endParaRPr lang="en-US" sz="3415" dirty="0">
+              <a:solidFill>
+                <a:srgbClr val="071947"/>
+              </a:solidFill>
+              <a:latin typeface="Open Sans"/>
+              <a:ea typeface="Open Sans"/>
+              <a:cs typeface="Open Sans"/>
+              <a:sym typeface="Open Sans"/>
+            </a:endParaRPr>
+          </a:p>
+        </p:txBody>
+      </p:sp>
+      <p:sp>
+        <p:nvSpPr>
+          <p:cNvPr id="5" name="TextBox 5"/>
+          <p:cNvSpPr txBox="1"/>
+          <p:nvPr/>
+        </p:nvSpPr>
+        <p:spPr>
+          <a:xfrm>
+            <a:off x="2962987" y="616866"/>
+            <a:ext cx="12362027" cy="2155505"/>
+          </a:xfrm>
+          <a:prstGeom prst="rect">
+            <a:avLst/>
+          </a:prstGeom>
+        </p:spPr>
+        <p:txBody>
+          <a:bodyPr lIns="0" tIns="0" rIns="0" bIns="0" rtlCol="0" anchor="t">
+            <a:spAutoFit/>
+          </a:bodyPr>
+          <a:lstStyle/>
+          <a:p>
+            <a:pPr algn="ctr">
+              <a:lnSpc>
+                <a:spcPts val="8621"/>
+              </a:lnSpc>
+            </a:pPr>
+            <a:r>
+              <a:rPr lang="en-US" sz="6158">
+                <a:solidFill>
+                  <a:srgbClr val="071947"/>
+                </a:solidFill>
+                <a:latin typeface="Hammersmith One"/>
+                <a:ea typeface="Hammersmith One"/>
+                <a:cs typeface="Hammersmith One"/>
+                <a:sym typeface="Hammersmith One"/>
+              </a:rPr>
+              <a:t>The Foundation: Business Rules &amp; Domain Definition</a:t>
+            </a:r>
+          </a:p>
+        </p:txBody>
+      </p:sp>
+      <p:sp>
+        <p:nvSpPr>
+          <p:cNvPr id="6" name="Rectangle 1">
+            <a:extLst>
+              <a:ext uri="{FF2B5EF4-FFF2-40B4-BE49-F238E27FC236}">
+                <a16:creationId xmlns:a16="http://schemas.microsoft.com/office/drawing/2014/main" id="{D3BE912C-3B00-E94A-1EE8-2255D44634C6}"/>
+              </a:ext>
+            </a:extLst>
+          </p:cNvPr>
+          <p:cNvSpPr>
+            <a:spLocks noChangeArrowheads="1"/>
+          </p:cNvSpPr>
+          <p:nvPr/>
+        </p:nvSpPr>
+        <p:spPr bwMode="auto">
+          <a:xfrm>
+            <a:off x="0" y="0"/>
+            <a:ext cx="18288000" cy="0"/>
+          </a:xfrm>
+          <a:prstGeom prst="rect">
+            <a:avLst/>
+          </a:prstGeom>
+          <a:noFill/>
+          <a:ln>
+            <a:noFill/>
+          </a:ln>
+          <a:effectLst/>
+          <a:extLst>
+            <a:ext uri="{909E8E84-426E-40DD-AFC4-6F175D3DCCD1}">
+              <a14:hiddenFill xmlns:a14="http://schemas.microsoft.com/office/drawing/2010/main">
+                <a:solidFill>
+                  <a:schemeClr val="accent1"/>
+                </a:solidFill>
+              </a14:hiddenFill>
+            </a:ext>
+            <a:ext uri="{91240B29-F687-4F45-9708-019B960494DF}">
+              <a14:hiddenLine xmlns:a14="http://schemas.microsoft.com/office/drawing/2010/main" w="9525">
+                <a:solidFill>
+                  <a:schemeClr val="tx1"/>
+                </a:solidFill>
+                <a:miter lim="800000"/>
+                <a:headEnd/>
+                <a:tailEnd/>
+              </a14:hiddenLine>
+            </a:ext>
+            <a:ext uri="{AF507438-7753-43E0-B8FC-AC1667EBCBE1}">
+              <a14:hiddenEffects xmlns:a14="http://schemas.microsoft.com/office/drawing/2010/main">
+                <a:effectLst>
+                  <a:outerShdw dist="35921" dir="2700000" algn="ctr" rotWithShape="0">
+                    <a:schemeClr val="bg2"/>
+                  </a:outerShdw>
+                </a:effectLst>
+              </a14:hiddenEffects>
+            </a:ext>
+          </a:extLst>
+        </p:spPr>
+        <p:txBody>
+          <a:bodyPr vert="horz" wrap="none" lIns="91440" tIns="45720" rIns="91440" bIns="45720" numCol="1" anchor="ctr" anchorCtr="0" compatLnSpc="1">
+            <a:prstTxWarp prst="textNoShape">
+              <a:avLst/>
+            </a:prstTxWarp>
+            <a:spAutoFit/>
+          </a:bodyPr>
+          <a:lstStyle/>
+          <a:p>
+            <a:pPr marL="0" marR="0" lvl="0" indent="0" algn="l" defTabSz="914400" rtl="0" eaLnBrk="0" fontAlgn="base" latinLnBrk="0" hangingPunct="0">
+              <a:lnSpc>
+                <a:spcPct val="100000"/>
+              </a:lnSpc>
+              <a:spcBef>
+                <a:spcPct val="0"/>
+              </a:spcBef>
+              <a:spcAft>
+                <a:spcPct val="0"/>
+              </a:spcAft>
+              <a:buClrTx/>
+              <a:buSzTx/>
+              <a:buFontTx/>
+              <a:buChar char="•"/>
+              <a:tabLst/>
+            </a:pPr>
+            <a:r>
+              <a:rPr kumimoji="0" lang="en-US" altLang="en-US" sz="1800" b="1" i="0" u="none" strike="noStrike" cap="none" normalizeH="0" baseline="0">
+                <a:ln>
+                  <a:noFill/>
+                </a:ln>
+                <a:solidFill>
+                  <a:schemeClr val="tx1"/>
+                </a:solidFill>
+                <a:effectLst/>
+                <a:latin typeface="Arial" panose="020B0604020202020204" pitchFamily="34" charset="0"/>
+              </a:rPr>
+              <a:t>Hospitalization Requirement</a:t>
+            </a:r>
+            <a:r>
+              <a:rPr kumimoji="0" lang="en-US" altLang="en-US" sz="1800" b="0" i="0" u="none" strike="noStrike" cap="none" normalizeH="0" baseline="0">
+                <a:ln>
+                  <a:noFill/>
+                </a:ln>
+                <a:solidFill>
+                  <a:schemeClr val="tx1"/>
+                </a:solidFill>
+                <a:effectLst/>
+                <a:latin typeface="Arial" panose="020B0604020202020204" pitchFamily="34" charset="0"/>
+              </a:rPr>
+              <a:t>: A patient cannot be hospitalized without being assigned to a specific </a:t>
+            </a:r>
+            <a:r>
+              <a:rPr kumimoji="0" lang="en-US" altLang="en-US" sz="1800" b="1" i="0" u="none" strike="noStrike" cap="none" normalizeH="0" baseline="0">
+                <a:ln>
+                  <a:noFill/>
+                </a:ln>
+                <a:solidFill>
+                  <a:schemeClr val="tx1"/>
+                </a:solidFill>
+                <a:effectLst/>
+                <a:latin typeface="Arial" panose="020B0604020202020204" pitchFamily="34" charset="0"/>
+              </a:rPr>
+              <a:t>Ward</a:t>
+            </a:r>
+            <a:r>
+              <a:rPr kumimoji="0" lang="en-US" altLang="en-US" sz="1800" b="0" i="0" u="none" strike="noStrike" cap="none" normalizeH="0" baseline="0">
+                <a:ln>
+                  <a:noFill/>
+                </a:ln>
+                <a:solidFill>
+                  <a:schemeClr val="tx1"/>
+                </a:solidFill>
+                <a:effectLst/>
+                <a:latin typeface="Arial" panose="020B0604020202020204" pitchFamily="34" charset="0"/>
+              </a:rPr>
+              <a:t> with available </a:t>
+            </a:r>
+            <a:r>
+              <a:rPr kumimoji="0" lang="en-US" altLang="en-US" sz="1800" b="1" i="0" u="none" strike="noStrike" cap="none" normalizeH="0" baseline="0">
+                <a:ln>
+                  <a:noFill/>
+                </a:ln>
+                <a:solidFill>
+                  <a:schemeClr val="tx1"/>
+                </a:solidFill>
+                <a:effectLst/>
+                <a:latin typeface="Arial" panose="020B0604020202020204" pitchFamily="34" charset="0"/>
+              </a:rPr>
+              <a:t>Capacity</a:t>
+            </a:r>
+            <a:r>
+              <a:rPr kumimoji="0" lang="en-US" altLang="en-US" sz="1800" b="0" i="0" u="none" strike="noStrike" cap="none" normalizeH="0" baseline="0">
+                <a:ln>
+                  <a:noFill/>
+                </a:ln>
+                <a:solidFill>
+                  <a:schemeClr val="tx1"/>
+                </a:solidFill>
+                <a:effectLst/>
+                <a:latin typeface="Arial" panose="020B0604020202020204" pitchFamily="34" charset="0"/>
+              </a:rPr>
+              <a:t>.</a:t>
+            </a:r>
+          </a:p>
+          <a:p>
+            <a:pPr marL="0" marR="0" lvl="0" indent="0" algn="l" defTabSz="914400" rtl="0" eaLnBrk="0" fontAlgn="base" latinLnBrk="0" hangingPunct="0">
+              <a:lnSpc>
+                <a:spcPct val="100000"/>
+              </a:lnSpc>
+              <a:spcBef>
+                <a:spcPct val="0"/>
+              </a:spcBef>
+              <a:spcAft>
+                <a:spcPct val="0"/>
+              </a:spcAft>
+              <a:buClrTx/>
+              <a:buSzTx/>
+              <a:buFontTx/>
+              <a:buChar char="•"/>
+              <a:tabLst/>
+            </a:pPr>
+            <a:endParaRPr kumimoji="0" lang="en-US" altLang="en-US" sz="1800" b="0" i="0" u="none" strike="noStrike" cap="none" normalizeH="0" baseline="0">
+              <a:ln>
+                <a:noFill/>
+              </a:ln>
+              <a:solidFill>
+                <a:schemeClr val="tx1"/>
+              </a:solidFill>
+              <a:effectLst/>
+              <a:latin typeface="Arial" panose="020B0604020202020204" pitchFamily="34" charset="0"/>
+            </a:endParaRPr>
+          </a:p>
+        </p:txBody>
+      </p:sp>
+    </p:spTree>
+  </p:cSld>
+  <p:clrMapOvr>
+    <a:masterClrMapping/>
+  </p:clrMapOvr>
+  <p:transition>
+    <p:fade/>
+  </p:transition>
+</p:sld>
+</file>
+
+<file path=ppt/slides/slide4.xml><?xml version="1.0" encoding="utf-8"?>
+<p:sld xmlns:a="http://schemas.openxmlformats.org/drawingml/2006/main" xmlns:r="http://schemas.openxmlformats.org/officeDocument/2006/relationships" xmlns:p="http://schemas.openxmlformats.org/presentationml/2006/main">
+  <p:cSld>
+    <p:bg>
+      <p:bgPr>
+        <a:solidFill>
+          <a:srgbClr val="E3F4FF"/>
+        </a:solidFill>
+        <a:effectLst/>
+      </p:bgPr>
+    </p:bg>
+    <p:spTree>
+      <p:nvGrpSpPr>
+        <p:cNvPr id="1" name=""/>
+        <p:cNvGrpSpPr/>
+        <p:nvPr/>
+      </p:nvGrpSpPr>
+      <p:grpSpPr>
+        <a:xfrm>
+          <a:off x="0" y="0"/>
+          <a:ext cx="0" cy="0"/>
+          <a:chOff x="0" y="0"/>
+          <a:chExt cx="0" cy="0"/>
+        </a:xfrm>
+      </p:grpSpPr>
+      <p:sp>
+        <p:nvSpPr>
+          <p:cNvPr id="2" name="Freeform 2"/>
+          <p:cNvSpPr/>
+          <p:nvPr/>
+        </p:nvSpPr>
+        <p:spPr>
+          <a:xfrm>
+            <a:off x="0" y="6172200"/>
+            <a:ext cx="4114800" cy="4114800"/>
+          </a:xfrm>
+          <a:custGeom>
+            <a:avLst/>
+            <a:gdLst/>
+            <a:ahLst/>
+            <a:cxnLst/>
+            <a:rect l="l" t="t" r="r" b="b"/>
+            <a:pathLst>
+              <a:path w="4114800" h="4114800">
+                <a:moveTo>
+                  <a:pt x="0" y="0"/>
+                </a:moveTo>
+                <a:lnTo>
+                  <a:pt x="4114800" y="0"/>
+                </a:lnTo>
+                <a:lnTo>
+                  <a:pt x="4114800" y="4114800"/>
+                </a:lnTo>
+                <a:lnTo>
+                  <a:pt x="0" y="4114800"/>
+                </a:lnTo>
+                <a:lnTo>
+                  <a:pt x="0" y="0"/>
+                </a:lnTo>
+                <a:close/>
+              </a:path>
+            </a:pathLst>
+          </a:custGeom>
+          <a:blipFill>
+            <a:blip>
+              <a:extLst>
+                <a:ext uri="{96DAC541-7B7A-43D3-8B79-37D633B846F1}">
+                  <asvg:svgBlip xmlns:asvg="http://schemas.microsoft.com/office/drawing/2016/SVG/main" r:embed="rId2"/>
+                </a:ext>
+              </a:extLst>
+            </a:blip>
+            <a:stretch>
+              <a:fillRect/>
+            </a:stretch>
+          </a:blipFill>
+        </p:spPr>
+        <p:txBody>
+          <a:bodyPr/>
+          <a:lstStyle/>
+          <a:p>
+            <a:endParaRPr lang="en-US"/>
+          </a:p>
+        </p:txBody>
+      </p:sp>
+      <p:sp>
+        <p:nvSpPr>
+          <p:cNvPr id="3" name="Freeform 3"/>
+          <p:cNvSpPr/>
+          <p:nvPr/>
+        </p:nvSpPr>
+        <p:spPr>
+          <a:xfrm flipH="1" flipV="1">
+            <a:off x="14173200" y="0"/>
+            <a:ext cx="4114800" cy="4114800"/>
+          </a:xfrm>
+          <a:custGeom>
+            <a:avLst/>
+            <a:gdLst/>
+            <a:ahLst/>
+            <a:cxnLst/>
+            <a:rect l="l" t="t" r="r" b="b"/>
+            <a:pathLst>
+              <a:path w="4114800" h="4114800">
+                <a:moveTo>
+                  <a:pt x="4114800" y="4114800"/>
+                </a:moveTo>
+                <a:lnTo>
+                  <a:pt x="0" y="4114800"/>
+                </a:lnTo>
+                <a:lnTo>
+                  <a:pt x="0" y="0"/>
+                </a:lnTo>
+                <a:lnTo>
+                  <a:pt x="4114800" y="0"/>
+                </a:lnTo>
+                <a:lnTo>
+                  <a:pt x="4114800" y="4114800"/>
+                </a:lnTo>
+                <a:close/>
+              </a:path>
+            </a:pathLst>
+          </a:custGeom>
+          <a:blipFill>
+            <a:blip>
+              <a:extLst>
+                <a:ext uri="{96DAC541-7B7A-43D3-8B79-37D633B846F1}">
+                  <asvg:svgBlip xmlns:asvg="http://schemas.microsoft.com/office/drawing/2016/SVG/main" r:embed="rId2"/>
+                </a:ext>
+              </a:extLst>
+            </a:blip>
+            <a:stretch>
+              <a:fillRect/>
+            </a:stretch>
+          </a:blipFill>
+        </p:spPr>
+        <p:txBody>
+          <a:bodyPr/>
+          <a:lstStyle/>
+          <a:p>
+            <a:endParaRPr lang="en-US"/>
+          </a:p>
+        </p:txBody>
+      </p:sp>
+      <p:sp>
+        <p:nvSpPr>
+          <p:cNvPr id="4" name="Freeform 4"/>
+          <p:cNvSpPr/>
+          <p:nvPr/>
+        </p:nvSpPr>
+        <p:spPr>
+          <a:xfrm>
+            <a:off x="2426915" y="538487"/>
+            <a:ext cx="13434171" cy="9210025"/>
+          </a:xfrm>
+          <a:custGeom>
+            <a:avLst/>
+            <a:gdLst/>
+            <a:ahLst/>
+            <a:cxnLst/>
+            <a:rect l="l" t="t" r="r" b="b"/>
+            <a:pathLst>
+              <a:path w="13434171" h="9210025">
+                <a:moveTo>
+                  <a:pt x="0" y="0"/>
+                </a:moveTo>
+                <a:lnTo>
+                  <a:pt x="13434170" y="0"/>
+                </a:lnTo>
+                <a:lnTo>
+                  <a:pt x="13434170" y="9210026"/>
+                </a:lnTo>
+                <a:lnTo>
+                  <a:pt x="0" y="9210026"/>
+                </a:lnTo>
+                <a:lnTo>
+                  <a:pt x="0" y="0"/>
+                </a:lnTo>
+                <a:close/>
+              </a:path>
+            </a:pathLst>
+          </a:custGeom>
+          <a:blipFill>
+            <a:blip r:embed="rId3"/>
+            <a:stretch>
+              <a:fillRect l="-1449" r="-1449"/>
+            </a:stretch>
+          </a:blipFill>
+        </p:spPr>
+        <p:txBody>
+          <a:bodyPr/>
+          <a:lstStyle/>
+          <a:p>
+            <a:endParaRPr lang="en-US"/>
+          </a:p>
+        </p:txBody>
+      </p:sp>
+    </p:spTree>
+  </p:cSld>
+  <p:clrMapOvr>
+    <a:masterClrMapping/>
+  </p:clrMapOvr>
+  <p:transition>
+    <p:fade/>
+  </p:transition>
+</p:sld>
+</file>
+
+<file path=ppt/slides/slide5.xml><?xml version="1.0" encoding="utf-8"?>
+<p:sld xmlns:a="http://schemas.openxmlformats.org/drawingml/2006/main" xmlns:r="http://schemas.openxmlformats.org/officeDocument/2006/relationships" xmlns:p="http://schemas.openxmlformats.org/presentationml/2006/main">
+  <p:cSld>
+    <p:bg>
+      <p:bgPr>
+        <a:solidFill>
+          <a:srgbClr val="E3F4FF"/>
+        </a:solidFill>
+        <a:effectLst/>
+      </p:bgPr>
+    </p:bg>
+    <p:spTree>
+      <p:nvGrpSpPr>
+        <p:cNvPr id="1" name=""/>
+        <p:cNvGrpSpPr/>
+        <p:nvPr/>
+      </p:nvGrpSpPr>
+      <p:grpSpPr>
+        <a:xfrm>
+          <a:off x="0" y="0"/>
+          <a:ext cx="0" cy="0"/>
+          <a:chOff x="0" y="0"/>
+          <a:chExt cx="0" cy="0"/>
+        </a:xfrm>
+      </p:grpSpPr>
+      <p:sp>
+        <p:nvSpPr>
+          <p:cNvPr id="2" name="Freeform 2"/>
+          <p:cNvSpPr/>
+          <p:nvPr/>
+        </p:nvSpPr>
+        <p:spPr>
+          <a:xfrm>
+            <a:off x="25705" y="5817885"/>
+            <a:ext cx="3315198" cy="4370993"/>
+          </a:xfrm>
+          <a:custGeom>
+            <a:avLst/>
+            <a:gdLst/>
+            <a:ahLst/>
+            <a:cxnLst/>
+            <a:rect l="l" t="t" r="r" b="b"/>
+            <a:pathLst>
+              <a:path w="3315198" h="4370993">
+                <a:moveTo>
+                  <a:pt x="0" y="0"/>
+                </a:moveTo>
+                <a:lnTo>
+                  <a:pt x="3315198" y="0"/>
+                </a:lnTo>
+                <a:lnTo>
+                  <a:pt x="3315198" y="4370993"/>
+                </a:lnTo>
+                <a:lnTo>
+                  <a:pt x="0" y="4370993"/>
+                </a:lnTo>
+                <a:lnTo>
+                  <a:pt x="0" y="0"/>
+                </a:lnTo>
+                <a:close/>
+              </a:path>
+            </a:pathLst>
+          </a:custGeom>
+          <a:blipFill>
+            <a:blip>
+              <a:extLst>
+                <a:ext uri="{96DAC541-7B7A-43D3-8B79-37D633B846F1}">
+                  <asvg:svgBlip xmlns:asvg="http://schemas.microsoft.com/office/drawing/2016/SVG/main" r:embed="rId2"/>
+                </a:ext>
+              </a:extLst>
+            </a:blip>
+            <a:stretch>
+              <a:fillRect/>
+            </a:stretch>
+          </a:blipFill>
+        </p:spPr>
+        <p:txBody>
+          <a:bodyPr/>
+          <a:lstStyle/>
+          <a:p>
+            <a:endParaRPr lang="en-US"/>
+          </a:p>
+        </p:txBody>
+      </p:sp>
+      <p:sp>
+        <p:nvSpPr>
+          <p:cNvPr id="3" name="Freeform 3"/>
+          <p:cNvSpPr/>
+          <p:nvPr/>
+        </p:nvSpPr>
+        <p:spPr>
+          <a:xfrm flipH="1" flipV="1">
+            <a:off x="14972802" y="0"/>
+            <a:ext cx="3315198" cy="4370993"/>
+          </a:xfrm>
+          <a:custGeom>
+            <a:avLst/>
+            <a:gdLst/>
+            <a:ahLst/>
+            <a:cxnLst/>
+            <a:rect l="l" t="t" r="r" b="b"/>
+            <a:pathLst>
+              <a:path w="3315198" h="4370993">
+                <a:moveTo>
+                  <a:pt x="3315198" y="4370993"/>
+                </a:moveTo>
+                <a:lnTo>
+                  <a:pt x="0" y="4370993"/>
+                </a:lnTo>
+                <a:lnTo>
+                  <a:pt x="0" y="0"/>
+                </a:lnTo>
+                <a:lnTo>
+                  <a:pt x="3315198" y="0"/>
+                </a:lnTo>
+                <a:lnTo>
+                  <a:pt x="3315198" y="4370993"/>
+                </a:lnTo>
+                <a:close/>
+              </a:path>
+            </a:pathLst>
+          </a:custGeom>
+          <a:blipFill>
+            <a:blip>
+              <a:extLst>
+                <a:ext uri="{96DAC541-7B7A-43D3-8B79-37D633B846F1}">
+                  <asvg:svgBlip xmlns:asvg="http://schemas.microsoft.com/office/drawing/2016/SVG/main" r:embed="rId2"/>
+                </a:ext>
+              </a:extLst>
+            </a:blip>
+            <a:stretch>
+              <a:fillRect/>
+            </a:stretch>
+          </a:blipFill>
+        </p:spPr>
+        <p:txBody>
+          <a:bodyPr/>
+          <a:lstStyle/>
+          <a:p>
+            <a:endParaRPr lang="en-US"/>
+          </a:p>
+        </p:txBody>
+      </p:sp>
+      <p:sp>
+        <p:nvSpPr>
+          <p:cNvPr id="4" name="TextBox 4"/>
+          <p:cNvSpPr txBox="1"/>
+          <p:nvPr/>
+        </p:nvSpPr>
+        <p:spPr>
+          <a:xfrm>
+            <a:off x="2946264" y="933450"/>
+            <a:ext cx="12395472" cy="880888"/>
+          </a:xfrm>
+          <a:prstGeom prst="rect">
+            <a:avLst/>
+          </a:prstGeom>
+        </p:spPr>
+        <p:txBody>
+          <a:bodyPr lIns="0" tIns="0" rIns="0" bIns="0" rtlCol="0" anchor="t">
+            <a:spAutoFit/>
+          </a:bodyPr>
+          <a:lstStyle/>
+          <a:p>
+            <a:pPr algn="ctr">
+              <a:lnSpc>
+                <a:spcPts val="7224"/>
+              </a:lnSpc>
+            </a:pPr>
+            <a:r>
+              <a:rPr lang="en-US" sz="5160">
+                <a:solidFill>
+                  <a:srgbClr val="071947"/>
+                </a:solidFill>
+                <a:latin typeface="Hammersmith One"/>
+                <a:ea typeface="Hammersmith One"/>
+                <a:cs typeface="Hammersmith One"/>
+                <a:sym typeface="Hammersmith One"/>
+              </a:rPr>
+              <a:t>Database Implementation (PostgreSQL)</a:t>
+            </a:r>
+          </a:p>
+        </p:txBody>
+      </p:sp>
+      <p:sp>
+        <p:nvSpPr>
+          <p:cNvPr id="5" name="TextBox 5"/>
+          <p:cNvSpPr txBox="1"/>
+          <p:nvPr/>
+        </p:nvSpPr>
+        <p:spPr>
+          <a:xfrm>
+            <a:off x="1518198" y="2203820"/>
+            <a:ext cx="15251605" cy="7170980"/>
+          </a:xfrm>
+          <a:prstGeom prst="rect">
+            <a:avLst/>
+          </a:prstGeom>
+        </p:spPr>
+        <p:txBody>
+          <a:bodyPr lIns="0" tIns="0" rIns="0" bIns="0" rtlCol="0" anchor="t">
+            <a:spAutoFit/>
+          </a:bodyPr>
+          <a:lstStyle/>
+          <a:p>
+            <a:pPr algn="l">
+              <a:lnSpc>
+                <a:spcPts val="4781"/>
+              </a:lnSpc>
+            </a:pPr>
+            <a:r>
+              <a:rPr lang="en-US" sz="3415">
+                <a:solidFill>
+                  <a:srgbClr val="071947"/>
+                </a:solidFill>
+                <a:latin typeface="Open Sans"/>
+                <a:ea typeface="Open Sans"/>
+                <a:cs typeface="Open Sans"/>
+                <a:sym typeface="Open Sans"/>
+              </a:rPr>
+              <a:t>We converted our ER model into a Relational Schema, applying the 3rd Normal Form (3NF). This ensures that every piece of information is stored in exactly one place, eliminating data redundancy.</a:t>
+            </a:r>
+          </a:p>
+          <a:p>
+            <a:pPr algn="l">
+              <a:lnSpc>
+                <a:spcPts val="4781"/>
+              </a:lnSpc>
+            </a:pPr>
+            <a:endParaRPr lang="en-US" sz="3415">
+              <a:solidFill>
+                <a:srgbClr val="071947"/>
+              </a:solidFill>
+              <a:latin typeface="Open Sans"/>
+              <a:ea typeface="Open Sans"/>
+              <a:cs typeface="Open Sans"/>
+              <a:sym typeface="Open Sans"/>
+            </a:endParaRPr>
+          </a:p>
+          <a:p>
+            <a:pPr algn="l">
+              <a:lnSpc>
+                <a:spcPts val="4781"/>
+              </a:lnSpc>
+            </a:pPr>
+            <a:r>
+              <a:rPr lang="en-US" sz="3415" b="1">
+                <a:solidFill>
+                  <a:srgbClr val="071947"/>
+                </a:solidFill>
+                <a:latin typeface="Open Sans Bold"/>
+                <a:ea typeface="Open Sans Bold"/>
+                <a:cs typeface="Open Sans Bold"/>
+                <a:sym typeface="Open Sans Bold"/>
+              </a:rPr>
+              <a:t>Technical Features:</a:t>
+            </a:r>
+          </a:p>
+          <a:p>
+            <a:pPr marL="737335" lvl="1" indent="-368668" algn="l">
+              <a:lnSpc>
+                <a:spcPts val="4781"/>
+              </a:lnSpc>
+              <a:buFont typeface="Arial"/>
+              <a:buChar char="•"/>
+            </a:pPr>
+            <a:r>
+              <a:rPr lang="en-US" sz="3415">
+                <a:solidFill>
+                  <a:srgbClr val="071947"/>
+                </a:solidFill>
+                <a:latin typeface="Open Sans"/>
+                <a:ea typeface="Open Sans"/>
+                <a:cs typeface="Open Sans"/>
+                <a:sym typeface="Open Sans"/>
+              </a:rPr>
+              <a:t>Implemented </a:t>
+            </a:r>
+            <a:r>
+              <a:rPr lang="en-US" sz="3415" b="1">
+                <a:solidFill>
+                  <a:srgbClr val="071947"/>
+                </a:solidFill>
+                <a:latin typeface="Open Sans Bold"/>
+                <a:ea typeface="Open Sans Bold"/>
+                <a:cs typeface="Open Sans Bold"/>
+                <a:sym typeface="Open Sans Bold"/>
+              </a:rPr>
+              <a:t>11 interconnected tables</a:t>
+            </a:r>
+            <a:r>
+              <a:rPr lang="en-US" sz="3415">
+                <a:solidFill>
+                  <a:srgbClr val="071947"/>
+                </a:solidFill>
+                <a:latin typeface="Open Sans"/>
+                <a:ea typeface="Open Sans"/>
+                <a:cs typeface="Open Sans"/>
+                <a:sym typeface="Open Sans"/>
+              </a:rPr>
+              <a:t> in pgAdmin.</a:t>
+            </a:r>
+          </a:p>
+          <a:p>
+            <a:pPr marL="737335" lvl="1" indent="-368668" algn="l">
+              <a:lnSpc>
+                <a:spcPts val="4781"/>
+              </a:lnSpc>
+              <a:buFont typeface="Arial"/>
+              <a:buChar char="•"/>
+            </a:pPr>
+            <a:r>
+              <a:rPr lang="en-US" sz="3415">
+                <a:solidFill>
+                  <a:srgbClr val="071947"/>
+                </a:solidFill>
+                <a:latin typeface="Open Sans"/>
+                <a:ea typeface="Open Sans"/>
+                <a:cs typeface="Open Sans"/>
+                <a:sym typeface="Open Sans"/>
+              </a:rPr>
+              <a:t>Primary Keys: Ensured unique identification for every record.</a:t>
+            </a:r>
+          </a:p>
+          <a:p>
+            <a:pPr marL="737335" lvl="1" indent="-368668" algn="l">
+              <a:lnSpc>
+                <a:spcPts val="4781"/>
+              </a:lnSpc>
+              <a:buFont typeface="Arial"/>
+              <a:buChar char="•"/>
+            </a:pPr>
+            <a:r>
+              <a:rPr lang="en-US" sz="3415">
+                <a:solidFill>
+                  <a:srgbClr val="071947"/>
+                </a:solidFill>
+                <a:latin typeface="Open Sans"/>
+                <a:ea typeface="Open Sans"/>
+                <a:cs typeface="Open Sans"/>
+                <a:sym typeface="Open Sans"/>
+              </a:rPr>
+              <a:t>Foreign Keys: Established rigid links between tables (e.g., linking a Surgery record to a specific Patient).</a:t>
+            </a:r>
+          </a:p>
+          <a:p>
+            <a:pPr marL="737335" lvl="1" indent="-368668" algn="l">
+              <a:lnSpc>
+                <a:spcPts val="4781"/>
+              </a:lnSpc>
+              <a:buFont typeface="Arial"/>
+              <a:buChar char="•"/>
+            </a:pPr>
+            <a:r>
+              <a:rPr lang="en-US" sz="3415">
+                <a:solidFill>
+                  <a:srgbClr val="071947"/>
+                </a:solidFill>
+                <a:latin typeface="Open Sans"/>
+                <a:ea typeface="Open Sans"/>
+                <a:cs typeface="Open Sans"/>
+                <a:sym typeface="Open Sans"/>
+              </a:rPr>
+              <a:t>Constraints: Used NOT NULL and UNIQUE constraints to maintain high data quality and prevent "garbage" data.</a:t>
+            </a:r>
+          </a:p>
+          <a:p>
+            <a:pPr algn="l">
+              <a:lnSpc>
+                <a:spcPts val="4781"/>
+              </a:lnSpc>
+              <a:spcBef>
+                <a:spcPct val="0"/>
+              </a:spcBef>
+            </a:pPr>
+            <a:endParaRPr lang="en-US" sz="3415">
+              <a:solidFill>
+                <a:srgbClr val="071947"/>
+              </a:solidFill>
+              <a:latin typeface="Open Sans"/>
+              <a:ea typeface="Open Sans"/>
+              <a:cs typeface="Open Sans"/>
+              <a:sym typeface="Open Sans"/>
+            </a:endParaRPr>
+          </a:p>
+        </p:txBody>
+      </p:sp>
+    </p:spTree>
+  </p:cSld>
+  <p:clrMapOvr>
+    <a:masterClrMapping/>
+  </p:clrMapOvr>
+  <p:transition>
+    <p:fade/>
+  </p:transition>
+</p:sld>
+</file>
+
+<file path=ppt/slides/slide6.xml><?xml version="1.0" encoding="utf-8"?>
+<p:sld xmlns:a="http://schemas.openxmlformats.org/drawingml/2006/main" xmlns:r="http://schemas.openxmlformats.org/officeDocument/2006/relationships" xmlns:p="http://schemas.openxmlformats.org/presentationml/2006/main">
+  <p:cSld>
+    <p:spTree>
+      <p:nvGrpSpPr>
+        <p:cNvPr id="1" name=""/>
+        <p:cNvGrpSpPr/>
+        <p:nvPr/>
+      </p:nvGrpSpPr>
+      <p:grpSpPr>
+        <a:xfrm>
+          <a:off x="0" y="0"/>
+          <a:ext cx="0" cy="0"/>
+          <a:chOff x="0" y="0"/>
+          <a:chExt cx="0" cy="0"/>
+        </a:xfrm>
+      </p:grpSpPr>
+      <p:pic>
+        <p:nvPicPr>
+          <p:cNvPr id="3" name="Picture 2">
+            <a:extLst>
+              <a:ext uri="{FF2B5EF4-FFF2-40B4-BE49-F238E27FC236}">
+                <a16:creationId xmlns:a16="http://schemas.microsoft.com/office/drawing/2014/main" id="{12031375-507D-64BB-9968-4F16E86ECEF9}"/>
+              </a:ext>
+            </a:extLst>
+          </p:cNvPr>
+          <p:cNvPicPr>
+            <a:picLocks noChangeAspect="1"/>
+          </p:cNvPicPr>
+          <p:nvPr/>
+        </p:nvPicPr>
+        <p:blipFill>
+          <a:blip r:embed="rId2"/>
+          <a:stretch>
+            <a:fillRect/>
+          </a:stretch>
+        </p:blipFill>
+        <p:spPr>
+          <a:xfrm>
+            <a:off x="-2458" y="0"/>
+            <a:ext cx="6631858" cy="10287000"/>
+          </a:xfrm>
+          <a:prstGeom prst="rect">
+            <a:avLst/>
+          </a:prstGeom>
+        </p:spPr>
+      </p:pic>
+      <p:pic>
+        <p:nvPicPr>
+          <p:cNvPr id="5" name="Picture 4">
+            <a:extLst>
+              <a:ext uri="{FF2B5EF4-FFF2-40B4-BE49-F238E27FC236}">
+                <a16:creationId xmlns:a16="http://schemas.microsoft.com/office/drawing/2014/main" id="{4907E657-7970-AEEB-A3CB-AB178A1E3FEE}"/>
+              </a:ext>
+            </a:extLst>
+          </p:cNvPr>
+          <p:cNvPicPr>
+            <a:picLocks noChangeAspect="1"/>
+          </p:cNvPicPr>
+          <p:nvPr/>
+        </p:nvPicPr>
+        <p:blipFill>
+          <a:blip r:embed="rId3"/>
+          <a:stretch>
+            <a:fillRect/>
+          </a:stretch>
+        </p:blipFill>
+        <p:spPr>
+          <a:xfrm>
+            <a:off x="5943600" y="-190500"/>
+            <a:ext cx="12344400" cy="5334000"/>
+          </a:xfrm>
+          <a:prstGeom prst="rect">
+            <a:avLst/>
+          </a:prstGeom>
+        </p:spPr>
+      </p:pic>
+      <p:pic>
+        <p:nvPicPr>
+          <p:cNvPr id="7" name="Picture 6">
+            <a:extLst>
+              <a:ext uri="{FF2B5EF4-FFF2-40B4-BE49-F238E27FC236}">
+                <a16:creationId xmlns:a16="http://schemas.microsoft.com/office/drawing/2014/main" id="{73C37BC4-FCF2-2724-1C96-74A4DC5487E0}"/>
+              </a:ext>
+            </a:extLst>
+          </p:cNvPr>
+          <p:cNvPicPr>
+            <a:picLocks noChangeAspect="1"/>
+          </p:cNvPicPr>
+          <p:nvPr/>
+        </p:nvPicPr>
+        <p:blipFill>
+          <a:blip r:embed="rId4"/>
+          <a:stretch>
+            <a:fillRect/>
+          </a:stretch>
+        </p:blipFill>
+        <p:spPr>
+          <a:xfrm>
+            <a:off x="5943600" y="5142271"/>
+            <a:ext cx="12344400" cy="5144729"/>
+          </a:xfrm>
+          <a:prstGeom prst="rect">
+            <a:avLst/>
+          </a:prstGeom>
+        </p:spPr>
+      </p:pic>
+    </p:spTree>
+    <p:extLst>
+      <p:ext uri="{BB962C8B-B14F-4D97-AF65-F5344CB8AC3E}">
+        <p14:creationId xmlns:p14="http://schemas.microsoft.com/office/powerpoint/2010/main" val="2510867082"/>
+      </p:ext>
+    </p:extLst>
+  </p:cSld>
+  <p:clrMapOvr>
+    <a:masterClrMapping/>
+  </p:clrMapOvr>
+  <mc:AlternateContent xmlns:mc="http://schemas.openxmlformats.org/markup-compatibility/2006">
+    <mc:Choice xmlns:p159="http://schemas.microsoft.com/office/powerpoint/2015/09/main" Requires="p159">
+      <p:transition xmlns:p14="http://schemas.microsoft.com/office/powerpoint/2010/main" spd="slow" p14:dur="2000">
+        <p159:morph option="byObject"/>
+      </p:transition>
+    </mc:Choice>
+    <mc:Fallback>
+      <p:transition spd="slow">
+        <p:fade/>
+      </p:transition>
+    </mc:Fallback>
+  </mc:AlternateContent>
+</p:sld>
+</file>
+
+<file path=ppt/slides/slide7.xml><?xml version="1.0" encoding="utf-8"?>
+<p:sld xmlns:a="http://schemas.openxmlformats.org/drawingml/2006/main" xmlns:r="http://schemas.openxmlformats.org/officeDocument/2006/relationships" xmlns:p="http://schemas.openxmlformats.org/presentationml/2006/main">
+  <p:cSld>
+    <p:bg>
+      <p:bgPr>
+        <a:solidFill>
+          <a:srgbClr val="E3F4FF"/>
+        </a:solidFill>
+        <a:effectLst/>
+      </p:bgPr>
+    </p:bg>
+    <p:spTree>
+      <p:nvGrpSpPr>
+        <p:cNvPr id="1" name=""/>
+        <p:cNvGrpSpPr/>
+        <p:nvPr/>
+      </p:nvGrpSpPr>
+      <p:grpSpPr>
+        <a:xfrm>
+          <a:off x="0" y="0"/>
+          <a:ext cx="0" cy="0"/>
+          <a:chOff x="0" y="0"/>
+          <a:chExt cx="0" cy="0"/>
+        </a:xfrm>
+      </p:grpSpPr>
+      <p:sp>
+        <p:nvSpPr>
+          <p:cNvPr id="2" name="Freeform 2"/>
+          <p:cNvSpPr/>
+          <p:nvPr/>
+        </p:nvSpPr>
+        <p:spPr>
+          <a:xfrm flipV="1">
+            <a:off x="0" y="0"/>
+            <a:ext cx="4366036" cy="3715100"/>
+          </a:xfrm>
+          <a:custGeom>
+            <a:avLst/>
+            <a:gdLst/>
+            <a:ahLst/>
+            <a:cxnLst/>
+            <a:rect l="l" t="t" r="r" b="b"/>
+            <a:pathLst>
+              <a:path w="4366036" h="3715100">
+                <a:moveTo>
+                  <a:pt x="0" y="3715100"/>
+                </a:moveTo>
+                <a:lnTo>
+                  <a:pt x="4366036" y="3715100"/>
+                </a:lnTo>
+                <a:lnTo>
+                  <a:pt x="4366036" y="0"/>
+                </a:lnTo>
+                <a:lnTo>
+                  <a:pt x="0" y="0"/>
+                </a:lnTo>
+                <a:lnTo>
+                  <a:pt x="0" y="3715100"/>
+                </a:lnTo>
+                <a:close/>
+              </a:path>
+            </a:pathLst>
+          </a:custGeom>
+          <a:blipFill>
+            <a:blip>
+              <a:extLst>
+                <a:ext uri="{96DAC541-7B7A-43D3-8B79-37D633B846F1}">
+                  <asvg:svgBlip xmlns:asvg="http://schemas.microsoft.com/office/drawing/2016/SVG/main" r:embed="rId2"/>
+                </a:ext>
+              </a:extLst>
+            </a:blip>
+            <a:stretch>
+              <a:fillRect/>
+            </a:stretch>
+          </a:blipFill>
+        </p:spPr>
+        <p:txBody>
+          <a:bodyPr/>
+          <a:lstStyle/>
+          <a:p>
+            <a:endParaRPr lang="en-US"/>
+          </a:p>
+        </p:txBody>
+      </p:sp>
+      <p:sp>
+        <p:nvSpPr>
+          <p:cNvPr id="3" name="Freeform 3"/>
+          <p:cNvSpPr/>
+          <p:nvPr/>
+        </p:nvSpPr>
+        <p:spPr>
+          <a:xfrm flipH="1">
+            <a:off x="13921964" y="6571900"/>
+            <a:ext cx="4366036" cy="3715100"/>
+          </a:xfrm>
+          <a:custGeom>
+            <a:avLst/>
+            <a:gdLst/>
+            <a:ahLst/>
+            <a:cxnLst/>
+            <a:rect l="l" t="t" r="r" b="b"/>
+            <a:pathLst>
+              <a:path w="4366036" h="3715100">
+                <a:moveTo>
+                  <a:pt x="4366036" y="0"/>
+                </a:moveTo>
+                <a:lnTo>
+                  <a:pt x="0" y="0"/>
+                </a:lnTo>
+                <a:lnTo>
+                  <a:pt x="0" y="3715100"/>
+                </a:lnTo>
+                <a:lnTo>
+                  <a:pt x="4366036" y="3715100"/>
+                </a:lnTo>
+                <a:lnTo>
+                  <a:pt x="4366036" y="0"/>
+                </a:lnTo>
+                <a:close/>
+              </a:path>
+            </a:pathLst>
+          </a:custGeom>
+          <a:blipFill>
+            <a:blip>
+              <a:extLst>
+                <a:ext uri="{96DAC541-7B7A-43D3-8B79-37D633B846F1}">
+                  <asvg:svgBlip xmlns:asvg="http://schemas.microsoft.com/office/drawing/2016/SVG/main" r:embed="rId2"/>
+                </a:ext>
+              </a:extLst>
+            </a:blip>
+            <a:stretch>
+              <a:fillRect/>
+            </a:stretch>
+          </a:blipFill>
+        </p:spPr>
+        <p:txBody>
+          <a:bodyPr/>
+          <a:lstStyle/>
+          <a:p>
+            <a:endParaRPr lang="en-US"/>
+          </a:p>
+        </p:txBody>
+      </p:sp>
+      <p:sp>
+        <p:nvSpPr>
+          <p:cNvPr id="4" name="TextBox 4"/>
+          <p:cNvSpPr txBox="1"/>
+          <p:nvPr/>
+        </p:nvSpPr>
+        <p:spPr>
+          <a:xfrm>
+            <a:off x="3006629" y="923925"/>
+            <a:ext cx="12274742" cy="922410"/>
+          </a:xfrm>
+          <a:prstGeom prst="rect">
+            <a:avLst/>
+          </a:prstGeom>
+        </p:spPr>
+        <p:txBody>
+          <a:bodyPr lIns="0" tIns="0" rIns="0" bIns="0" rtlCol="0" anchor="t">
+            <a:spAutoFit/>
+          </a:bodyPr>
+          <a:lstStyle/>
+          <a:p>
+            <a:pPr algn="ctr">
+              <a:lnSpc>
+                <a:spcPts val="7518"/>
+              </a:lnSpc>
+            </a:pPr>
+            <a:r>
+              <a:rPr lang="en-US" sz="5370">
+                <a:solidFill>
+                  <a:srgbClr val="071947"/>
+                </a:solidFill>
+                <a:latin typeface="Hammersmith One"/>
+                <a:ea typeface="Hammersmith One"/>
+                <a:cs typeface="Hammersmith One"/>
+                <a:sym typeface="Hammersmith One"/>
+              </a:rPr>
+              <a:t>Database Implementation (MongoDB)</a:t>
+            </a:r>
+          </a:p>
+        </p:txBody>
+      </p:sp>
+      <p:sp>
+        <p:nvSpPr>
+          <p:cNvPr id="5" name="TextBox 5"/>
+          <p:cNvSpPr txBox="1"/>
+          <p:nvPr/>
+        </p:nvSpPr>
+        <p:spPr>
+          <a:xfrm>
+            <a:off x="1964733" y="2305890"/>
+            <a:ext cx="14358533" cy="6570932"/>
+          </a:xfrm>
+          <a:prstGeom prst="rect">
+            <a:avLst/>
+          </a:prstGeom>
+        </p:spPr>
+        <p:txBody>
+          <a:bodyPr lIns="0" tIns="0" rIns="0" bIns="0" rtlCol="0" anchor="t">
+            <a:spAutoFit/>
+          </a:bodyPr>
+          <a:lstStyle/>
+          <a:p>
+            <a:pPr algn="l">
+              <a:lnSpc>
+                <a:spcPts val="4781"/>
+              </a:lnSpc>
+            </a:pPr>
+            <a:r>
+              <a:rPr lang="en-US" sz="3415" dirty="0">
+                <a:solidFill>
+                  <a:srgbClr val="071947"/>
+                </a:solidFill>
+                <a:latin typeface="Open Sans"/>
+                <a:ea typeface="Open Sans"/>
+                <a:cs typeface="Open Sans"/>
+                <a:sym typeface="Open Sans"/>
+              </a:rPr>
+              <a:t>For the medical history part of our project, we chose MongoDB to handle non-relational data.</a:t>
+            </a:r>
+          </a:p>
+          <a:p>
+            <a:pPr marL="737335" lvl="1" indent="-368668" algn="l">
+              <a:lnSpc>
+                <a:spcPts val="4781"/>
+              </a:lnSpc>
+              <a:buFont typeface="Arial"/>
+              <a:buChar char="•"/>
+            </a:pPr>
+            <a:r>
+              <a:rPr lang="en-US" sz="3415" b="1" dirty="0">
+                <a:solidFill>
+                  <a:srgbClr val="071947"/>
+                </a:solidFill>
+                <a:latin typeface="Open Sans Bold"/>
+                <a:ea typeface="Open Sans Bold"/>
+                <a:cs typeface="Open Sans Bold"/>
+                <a:sym typeface="Open Sans Bold"/>
+              </a:rPr>
+              <a:t>Embedding Strategy:</a:t>
+            </a:r>
+            <a:r>
+              <a:rPr lang="en-US" sz="3415" dirty="0">
+                <a:solidFill>
+                  <a:srgbClr val="071947"/>
+                </a:solidFill>
+                <a:latin typeface="Open Sans"/>
+                <a:ea typeface="Open Sans"/>
+                <a:cs typeface="Open Sans"/>
+                <a:sym typeface="Open Sans"/>
+              </a:rPr>
+              <a:t> Instead of splitting data into many tables, we store surgery records and bills directly inside the Patient document.</a:t>
+            </a:r>
+          </a:p>
+          <a:p>
+            <a:pPr marL="737335" lvl="1" indent="-368668" algn="l">
+              <a:lnSpc>
+                <a:spcPts val="4781"/>
+              </a:lnSpc>
+              <a:buFont typeface="Arial"/>
+              <a:buChar char="•"/>
+            </a:pPr>
+            <a:r>
+              <a:rPr lang="en-US" sz="3415" b="1" dirty="0">
+                <a:solidFill>
+                  <a:srgbClr val="071947"/>
+                </a:solidFill>
+                <a:latin typeface="Open Sans Bold"/>
+                <a:ea typeface="Open Sans Bold"/>
+                <a:cs typeface="Open Sans Bold"/>
+                <a:sym typeface="Open Sans Bold"/>
+              </a:rPr>
+              <a:t>Performance Optimization:</a:t>
+            </a:r>
+            <a:r>
+              <a:rPr lang="en-US" sz="3415" dirty="0">
+                <a:solidFill>
+                  <a:srgbClr val="071947"/>
+                </a:solidFill>
+                <a:latin typeface="Open Sans"/>
+                <a:ea typeface="Open Sans"/>
+                <a:cs typeface="Open Sans"/>
+                <a:sym typeface="Open Sans"/>
+              </a:rPr>
+              <a:t> This design is optimized for "Read-Heavy" operations. A doctor can retrieve a patient’s entire history in a single query without using slow "Join" operations.</a:t>
+            </a:r>
+          </a:p>
+          <a:p>
+            <a:pPr marL="737335" lvl="1" indent="-368668" algn="l">
+              <a:lnSpc>
+                <a:spcPts val="4781"/>
+              </a:lnSpc>
+              <a:buFont typeface="Arial"/>
+              <a:buChar char="•"/>
+            </a:pPr>
+            <a:r>
+              <a:rPr lang="en-US" sz="3415" b="1" dirty="0">
+                <a:solidFill>
+                  <a:srgbClr val="071947"/>
+                </a:solidFill>
+                <a:latin typeface="Open Sans Bold"/>
+                <a:ea typeface="Open Sans Bold"/>
+                <a:cs typeface="Open Sans Bold"/>
+                <a:sym typeface="Open Sans Bold"/>
+              </a:rPr>
+              <a:t>Validation:</a:t>
+            </a:r>
+            <a:r>
+              <a:rPr lang="en-US" sz="3415" dirty="0">
+                <a:solidFill>
+                  <a:srgbClr val="071947"/>
+                </a:solidFill>
+                <a:latin typeface="Open Sans"/>
+                <a:ea typeface="Open Sans"/>
+                <a:cs typeface="Open Sans"/>
+                <a:sym typeface="Open Sans"/>
+              </a:rPr>
+              <a:t> We implemented </a:t>
+            </a:r>
+            <a:r>
+              <a:rPr lang="en-US" sz="3415" b="1" dirty="0">
+                <a:solidFill>
+                  <a:srgbClr val="071947"/>
+                </a:solidFill>
+                <a:latin typeface="Open Sans Bold"/>
+                <a:ea typeface="Open Sans Bold"/>
+                <a:cs typeface="Open Sans Bold"/>
+                <a:sym typeface="Open Sans Bold"/>
+              </a:rPr>
+              <a:t>JSON Schema Validation</a:t>
+            </a:r>
+            <a:r>
+              <a:rPr lang="en-US" sz="3415" dirty="0">
+                <a:solidFill>
+                  <a:srgbClr val="071947"/>
+                </a:solidFill>
+                <a:latin typeface="Open Sans"/>
+                <a:ea typeface="Open Sans"/>
+                <a:cs typeface="Open Sans"/>
+                <a:sym typeface="Open Sans"/>
+              </a:rPr>
+              <a:t> to enforce data types, making our NoSQL collections as reliable as SQL tables.</a:t>
+            </a:r>
+          </a:p>
+          <a:p>
+            <a:pPr algn="l">
+              <a:lnSpc>
+                <a:spcPts val="4781"/>
+              </a:lnSpc>
+              <a:spcBef>
+                <a:spcPct val="0"/>
+              </a:spcBef>
+            </a:pPr>
+            <a:endParaRPr lang="en-US" sz="3415" dirty="0">
+              <a:solidFill>
+                <a:srgbClr val="071947"/>
+              </a:solidFill>
+              <a:latin typeface="Open Sans"/>
+              <a:ea typeface="Open Sans"/>
+              <a:cs typeface="Open Sans"/>
+              <a:sym typeface="Open Sans"/>
+            </a:endParaRPr>
+          </a:p>
+        </p:txBody>
+      </p:sp>
+    </p:spTree>
+  </p:cSld>
+  <p:clrMapOvr>
+    <a:masterClrMapping/>
+  </p:clrMapOvr>
+  <p:transition>
+    <p:fade/>
+  </p:transition>
+</p:sld>
+</file>
+
+<file path=ppt/slides/slide8.xml><?xml version="1.0" encoding="utf-8"?>
+<p:sld xmlns:a="http://schemas.openxmlformats.org/drawingml/2006/main" xmlns:r="http://schemas.openxmlformats.org/officeDocument/2006/relationships" xmlns:p="http://schemas.openxmlformats.org/presentationml/2006/main">
+  <p:cSld>
+    <p:bg>
+      <p:bgPr>
+        <a:solidFill>
+          <a:srgbClr val="E3F4FF"/>
+        </a:solidFill>
+        <a:effectLst/>
+      </p:bgPr>
+    </p:bg>
+    <p:spTree>
+      <p:nvGrpSpPr>
+        <p:cNvPr id="1" name=""/>
+        <p:cNvGrpSpPr/>
+        <p:nvPr/>
+      </p:nvGrpSpPr>
+      <p:grpSpPr>
+        <a:xfrm>
+          <a:off x="0" y="0"/>
+          <a:ext cx="0" cy="0"/>
+          <a:chOff x="0" y="0"/>
+          <a:chExt cx="0" cy="0"/>
+        </a:xfrm>
+      </p:grpSpPr>
+      <p:sp>
+        <p:nvSpPr>
+          <p:cNvPr id="2" name="Freeform 2"/>
+          <p:cNvSpPr/>
+          <p:nvPr/>
+        </p:nvSpPr>
+        <p:spPr>
+          <a:xfrm flipH="1" flipV="1">
+            <a:off x="14972802" y="0"/>
+            <a:ext cx="3315198" cy="4370993"/>
+          </a:xfrm>
+          <a:custGeom>
+            <a:avLst/>
+            <a:gdLst/>
+            <a:ahLst/>
+            <a:cxnLst/>
+            <a:rect l="l" t="t" r="r" b="b"/>
+            <a:pathLst>
+              <a:path w="3315198" h="4370993">
+                <a:moveTo>
+                  <a:pt x="3315198" y="4370993"/>
+                </a:moveTo>
+                <a:lnTo>
+                  <a:pt x="0" y="4370993"/>
+                </a:lnTo>
+                <a:lnTo>
+                  <a:pt x="0" y="0"/>
+                </a:lnTo>
+                <a:lnTo>
+                  <a:pt x="3315198" y="0"/>
+                </a:lnTo>
+                <a:lnTo>
+                  <a:pt x="3315198" y="4370993"/>
+                </a:lnTo>
+                <a:close/>
+              </a:path>
+            </a:pathLst>
+          </a:custGeom>
+          <a:blipFill>
+            <a:blip>
+              <a:extLst>
+                <a:ext uri="{96DAC541-7B7A-43D3-8B79-37D633B846F1}">
+                  <asvg:svgBlip xmlns:asvg="http://schemas.microsoft.com/office/drawing/2016/SVG/main" r:embed="rId2"/>
+                </a:ext>
+              </a:extLst>
+            </a:blip>
+            <a:stretch>
+              <a:fillRect/>
+            </a:stretch>
+          </a:blipFill>
+        </p:spPr>
+        <p:txBody>
+          <a:bodyPr/>
+          <a:lstStyle/>
+          <a:p>
+            <a:endParaRPr lang="en-US"/>
+          </a:p>
+        </p:txBody>
+      </p:sp>
+      <p:sp>
+        <p:nvSpPr>
+          <p:cNvPr id="3" name="Freeform 3"/>
+          <p:cNvSpPr/>
+          <p:nvPr/>
+        </p:nvSpPr>
+        <p:spPr>
+          <a:xfrm rot="-10800000" flipH="1" flipV="1">
+            <a:off x="0" y="5916007"/>
+            <a:ext cx="3315198" cy="4370993"/>
+          </a:xfrm>
+          <a:custGeom>
+            <a:avLst/>
+            <a:gdLst/>
+            <a:ahLst/>
+            <a:cxnLst/>
+            <a:rect l="l" t="t" r="r" b="b"/>
+            <a:pathLst>
+              <a:path w="3315198" h="4370993">
+                <a:moveTo>
+                  <a:pt x="3315198" y="4370993"/>
+                </a:moveTo>
+                <a:lnTo>
+                  <a:pt x="0" y="4370993"/>
+                </a:lnTo>
+                <a:lnTo>
+                  <a:pt x="0" y="0"/>
+                </a:lnTo>
+                <a:lnTo>
+                  <a:pt x="3315198" y="0"/>
+                </a:lnTo>
+                <a:lnTo>
+                  <a:pt x="3315198" y="4370993"/>
+                </a:lnTo>
+                <a:close/>
+              </a:path>
+            </a:pathLst>
+          </a:custGeom>
+          <a:blipFill>
+            <a:blip>
+              <a:extLst>
+                <a:ext uri="{96DAC541-7B7A-43D3-8B79-37D633B846F1}">
+                  <asvg:svgBlip xmlns:asvg="http://schemas.microsoft.com/office/drawing/2016/SVG/main" r:embed="rId2"/>
+                </a:ext>
+              </a:extLst>
+            </a:blip>
+            <a:stretch>
+              <a:fillRect/>
+            </a:stretch>
+          </a:blipFill>
+        </p:spPr>
+        <p:txBody>
+          <a:bodyPr/>
+          <a:lstStyle/>
+          <a:p>
+            <a:endParaRPr lang="en-US"/>
+          </a:p>
+        </p:txBody>
+      </p:sp>
+      <p:pic>
+        <p:nvPicPr>
+          <p:cNvPr id="5" name="Picture 4">
+            <a:extLst>
+              <a:ext uri="{FF2B5EF4-FFF2-40B4-BE49-F238E27FC236}">
+                <a16:creationId xmlns:a16="http://schemas.microsoft.com/office/drawing/2014/main" id="{0F09309B-471C-7C43-EF9C-A8D34F8518F9}"/>
+              </a:ext>
+            </a:extLst>
+          </p:cNvPr>
+          <p:cNvPicPr>
+            <a:picLocks noChangeAspect="1"/>
+          </p:cNvPicPr>
+          <p:nvPr/>
+        </p:nvPicPr>
+        <p:blipFill>
+          <a:blip r:embed="rId3"/>
+          <a:stretch>
+            <a:fillRect/>
+          </a:stretch>
+        </p:blipFill>
+        <p:spPr>
+          <a:xfrm>
+            <a:off x="0" y="647700"/>
+            <a:ext cx="18252409" cy="8991600"/>
+          </a:xfrm>
+          <a:prstGeom prst="rect">
+            <a:avLst/>
+          </a:prstGeom>
+        </p:spPr>
+      </p:pic>
+    </p:spTree>
+  </p:cSld>
+  <p:clrMapOvr>
+    <a:masterClrMapping/>
+  </p:clrMapOvr>
+  <p:transition>
+    <p:fade/>
+  </p:transition>
+</p:sld>
+</file>
+
+<file path=ppt/slides/slide9.xml><?xml version="1.0" encoding="utf-8"?>
+<p:sld xmlns:a="http://schemas.openxmlformats.org/drawingml/2006/main" xmlns:r="http://schemas.openxmlformats.org/officeDocument/2006/relationships" xmlns:p="http://schemas.openxmlformats.org/presentationml/2006/main">
+  <p:cSld>
+    <p:bg>
+      <p:bgPr>
+        <a:solidFill>
+          <a:srgbClr val="E3F4FF"/>
+        </a:solidFill>
+        <a:effectLst/>
+      </p:bgPr>
+    </p:bg>
+    <p:spTree>
+      <p:nvGrpSpPr>
+        <p:cNvPr id="1" name=""/>
+        <p:cNvGrpSpPr/>
+        <p:nvPr/>
+      </p:nvGrpSpPr>
+      <p:grpSpPr>
+        <a:xfrm>
+          <a:off x="0" y="0"/>
+          <a:ext cx="0" cy="0"/>
+          <a:chOff x="0" y="0"/>
+          <a:chExt cx="0" cy="0"/>
+        </a:xfrm>
+      </p:grpSpPr>
+      <p:sp>
+        <p:nvSpPr>
+          <p:cNvPr id="2" name="Freeform 2"/>
+          <p:cNvSpPr/>
+          <p:nvPr/>
+        </p:nvSpPr>
+        <p:spPr>
+          <a:xfrm flipV="1">
+            <a:off x="0" y="7112454"/>
+            <a:ext cx="5727460" cy="3174546"/>
+          </a:xfrm>
+          <a:custGeom>
+            <a:avLst/>
+            <a:gdLst/>
+            <a:ahLst/>
+            <a:cxnLst/>
+            <a:rect l="l" t="t" r="r" b="b"/>
+            <a:pathLst>
+              <a:path w="5727460" h="3174546">
+                <a:moveTo>
+                  <a:pt x="0" y="3174546"/>
+                </a:moveTo>
+                <a:lnTo>
+                  <a:pt x="5727460" y="3174546"/>
+                </a:lnTo>
+                <a:lnTo>
+                  <a:pt x="5727460" y="0"/>
+                </a:lnTo>
+                <a:lnTo>
+                  <a:pt x="0" y="0"/>
+                </a:lnTo>
+                <a:lnTo>
+                  <a:pt x="0" y="3174546"/>
+                </a:lnTo>
+                <a:close/>
+              </a:path>
+            </a:pathLst>
+          </a:custGeom>
+          <a:blipFill>
+            <a:blip>
+              <a:extLst>
+                <a:ext uri="{96DAC541-7B7A-43D3-8B79-37D633B846F1}">
+                  <asvg:svgBlip xmlns:asvg="http://schemas.microsoft.com/office/drawing/2016/SVG/main" r:embed="rId2"/>
+                </a:ext>
+              </a:extLst>
+            </a:blip>
+            <a:stretch>
+              <a:fillRect/>
+            </a:stretch>
+          </a:blipFill>
+        </p:spPr>
+        <p:txBody>
+          <a:bodyPr/>
+          <a:lstStyle/>
+          <a:p>
+            <a:endParaRPr lang="en-US"/>
+          </a:p>
+        </p:txBody>
+      </p:sp>
+      <p:sp>
+        <p:nvSpPr>
+          <p:cNvPr id="3" name="TextBox 3"/>
+          <p:cNvSpPr txBox="1"/>
+          <p:nvPr/>
+        </p:nvSpPr>
+        <p:spPr>
+          <a:xfrm>
+            <a:off x="2346275" y="1191618"/>
+            <a:ext cx="13621079" cy="1004280"/>
+          </a:xfrm>
+          <a:prstGeom prst="rect">
+            <a:avLst/>
+          </a:prstGeom>
+        </p:spPr>
+        <p:txBody>
+          <a:bodyPr lIns="0" tIns="0" rIns="0" bIns="0" rtlCol="0" anchor="t">
+            <a:spAutoFit/>
+          </a:bodyPr>
+          <a:lstStyle/>
+          <a:p>
+            <a:pPr algn="ctr">
+              <a:lnSpc>
+                <a:spcPts val="8271"/>
+              </a:lnSpc>
+            </a:pPr>
+            <a:r>
+              <a:rPr lang="en-US" sz="5908">
+                <a:solidFill>
+                  <a:srgbClr val="071947"/>
+                </a:solidFill>
+                <a:latin typeface="Hammersmith One"/>
+                <a:ea typeface="Hammersmith One"/>
+                <a:cs typeface="Hammersmith One"/>
+                <a:sym typeface="Hammersmith One"/>
+              </a:rPr>
+              <a:t>Bridging the Gap: The Java Application</a:t>
+            </a:r>
+          </a:p>
+        </p:txBody>
+      </p:sp>
+      <p:sp>
+        <p:nvSpPr>
+          <p:cNvPr id="4" name="TextBox 4"/>
+          <p:cNvSpPr txBox="1"/>
+          <p:nvPr/>
+        </p:nvSpPr>
+        <p:spPr>
+          <a:xfrm>
+            <a:off x="2305935" y="2628548"/>
+            <a:ext cx="13661419" cy="6114687"/>
+          </a:xfrm>
+          <a:prstGeom prst="rect">
+            <a:avLst/>
+          </a:prstGeom>
+        </p:spPr>
+        <p:txBody>
+          <a:bodyPr lIns="0" tIns="0" rIns="0" bIns="0" rtlCol="0" anchor="t">
+            <a:spAutoFit/>
+          </a:bodyPr>
+          <a:lstStyle/>
+          <a:p>
+            <a:pPr marL="737335" lvl="1" indent="-368668" algn="l">
+              <a:lnSpc>
+                <a:spcPts val="4781"/>
+              </a:lnSpc>
+              <a:spcBef>
+                <a:spcPct val="0"/>
+              </a:spcBef>
+              <a:buFont typeface="Arial"/>
+              <a:buChar char="•"/>
+            </a:pPr>
+            <a:r>
+              <a:rPr lang="en-US" sz="3415" dirty="0">
+                <a:solidFill>
+                  <a:srgbClr val="071947"/>
+                </a:solidFill>
+                <a:latin typeface="Open Sans"/>
+                <a:ea typeface="Open Sans"/>
+                <a:cs typeface="Open Sans"/>
+                <a:sym typeface="Open Sans"/>
+              </a:rPr>
+              <a:t>We devel</a:t>
+            </a:r>
+            <a:r>
+              <a:rPr lang="en-US" sz="3415" u="none" strike="noStrike" dirty="0">
+                <a:solidFill>
+                  <a:srgbClr val="071947"/>
+                </a:solidFill>
+                <a:latin typeface="Open Sans"/>
+                <a:ea typeface="Open Sans"/>
+                <a:cs typeface="Open Sans"/>
+                <a:sym typeface="Open Sans"/>
+              </a:rPr>
+              <a:t>oped a functional application using Java and IntelliJ IDEA to interact with the PostgreSQL database.</a:t>
+            </a:r>
+          </a:p>
+          <a:p>
+            <a:pPr marL="737335" lvl="1" indent="-368668" algn="l">
+              <a:lnSpc>
+                <a:spcPts val="4781"/>
+              </a:lnSpc>
+              <a:spcBef>
+                <a:spcPct val="0"/>
+              </a:spcBef>
+              <a:buFont typeface="Arial"/>
+              <a:buChar char="•"/>
+            </a:pPr>
+            <a:r>
+              <a:rPr lang="en-US" sz="3415" u="none" strike="noStrike" dirty="0">
+                <a:solidFill>
+                  <a:srgbClr val="071947"/>
+                </a:solidFill>
+                <a:latin typeface="Open Sans"/>
+                <a:ea typeface="Open Sans"/>
+                <a:cs typeface="Open Sans"/>
+                <a:sym typeface="Open Sans"/>
+              </a:rPr>
+              <a:t>Connectivity: We used JDBC (Java Database Connectivity) as a translator between our code and the SQL server.</a:t>
+            </a:r>
+          </a:p>
+          <a:p>
+            <a:pPr marL="737335" lvl="1" indent="-368668" algn="l">
+              <a:lnSpc>
+                <a:spcPts val="4781"/>
+              </a:lnSpc>
+              <a:spcBef>
+                <a:spcPct val="0"/>
+              </a:spcBef>
+              <a:buFont typeface="Arial"/>
+              <a:buChar char="•"/>
+            </a:pPr>
+            <a:r>
+              <a:rPr lang="en-US" sz="3415" u="none" strike="noStrike" dirty="0">
+                <a:solidFill>
+                  <a:srgbClr val="071947"/>
+                </a:solidFill>
+                <a:latin typeface="Open Sans"/>
+                <a:ea typeface="Open Sans"/>
+                <a:cs typeface="Open Sans"/>
+                <a:sym typeface="Open Sans"/>
+              </a:rPr>
+              <a:t>Full CRUD Support: The application allows users to:</a:t>
+            </a:r>
+          </a:p>
+          <a:p>
+            <a:pPr marL="737335" lvl="1" indent="-368668" algn="l">
+              <a:lnSpc>
+                <a:spcPts val="4781"/>
+              </a:lnSpc>
+              <a:spcBef>
+                <a:spcPct val="0"/>
+              </a:spcBef>
+              <a:buFont typeface="Arial"/>
+              <a:buChar char="•"/>
+            </a:pPr>
+            <a:r>
+              <a:rPr lang="en-US" sz="3415" u="none" strike="noStrike" dirty="0">
+                <a:solidFill>
+                  <a:srgbClr val="071947"/>
+                </a:solidFill>
+                <a:latin typeface="Open Sans"/>
+                <a:ea typeface="Open Sans"/>
+                <a:cs typeface="Open Sans"/>
+                <a:sym typeface="Open Sans"/>
+              </a:rPr>
+              <a:t>Create: Register new patients.</a:t>
+            </a:r>
+          </a:p>
+          <a:p>
+            <a:pPr marL="737335" lvl="1" indent="-368668">
+              <a:lnSpc>
+                <a:spcPts val="4781"/>
+              </a:lnSpc>
+              <a:spcBef>
+                <a:spcPct val="0"/>
+              </a:spcBef>
+              <a:buFont typeface="Arial"/>
+              <a:buChar char="•"/>
+            </a:pPr>
+            <a:r>
+              <a:rPr lang="en-US" sz="3415" u="none" strike="noStrike" dirty="0">
+                <a:solidFill>
+                  <a:srgbClr val="071947"/>
+                </a:solidFill>
+                <a:latin typeface="Open Sans"/>
+                <a:ea typeface="Open Sans"/>
+                <a:cs typeface="Open Sans"/>
+                <a:sym typeface="Open Sans"/>
+              </a:rPr>
+              <a:t>Read: Search and view </a:t>
+            </a:r>
+            <a:r>
+              <a:rPr lang="en-US" sz="3415" dirty="0">
+                <a:solidFill>
+                  <a:srgbClr val="071947"/>
+                </a:solidFill>
+                <a:latin typeface="Open Sans"/>
+                <a:ea typeface="Open Sans"/>
+                <a:cs typeface="Open Sans"/>
+                <a:sym typeface="Open Sans"/>
+              </a:rPr>
+              <a:t>patients</a:t>
+            </a:r>
+            <a:r>
+              <a:rPr lang="en-US" sz="3415" u="none" strike="noStrike" dirty="0">
+                <a:solidFill>
+                  <a:srgbClr val="071947"/>
+                </a:solidFill>
+                <a:latin typeface="Open Sans"/>
+                <a:ea typeface="Open Sans"/>
+                <a:cs typeface="Open Sans"/>
+                <a:sym typeface="Open Sans"/>
+              </a:rPr>
+              <a:t>.</a:t>
+            </a:r>
+          </a:p>
+          <a:p>
+            <a:pPr marL="737335" lvl="1" indent="-368668" algn="l">
+              <a:lnSpc>
+                <a:spcPts val="4781"/>
+              </a:lnSpc>
+              <a:spcBef>
+                <a:spcPct val="0"/>
+              </a:spcBef>
+              <a:buFont typeface="Arial"/>
+              <a:buChar char="•"/>
+            </a:pPr>
+            <a:r>
+              <a:rPr lang="en-US" sz="3415" u="none" strike="noStrike" dirty="0">
+                <a:solidFill>
+                  <a:srgbClr val="071947"/>
+                </a:solidFill>
+                <a:latin typeface="Open Sans"/>
+                <a:ea typeface="Open Sans"/>
+                <a:cs typeface="Open Sans"/>
+                <a:sym typeface="Open Sans"/>
+              </a:rPr>
+              <a:t>Update: Modify patient details.</a:t>
+            </a:r>
+          </a:p>
+          <a:p>
+            <a:pPr marL="737335" lvl="1" indent="-368668" algn="l">
+              <a:lnSpc>
+                <a:spcPts val="4781"/>
+              </a:lnSpc>
+              <a:spcBef>
+                <a:spcPct val="0"/>
+              </a:spcBef>
+              <a:buFont typeface="Arial"/>
+              <a:buChar char="•"/>
+            </a:pPr>
+            <a:r>
+              <a:rPr lang="en-US" sz="3415" u="none" strike="noStrike" dirty="0">
+                <a:solidFill>
+                  <a:srgbClr val="071947"/>
+                </a:solidFill>
+                <a:latin typeface="Open Sans"/>
+                <a:ea typeface="Open Sans"/>
+                <a:cs typeface="Open Sans"/>
+                <a:sym typeface="Open Sans"/>
+              </a:rPr>
+              <a:t>Delete: Remove records when necessary. This demonstrates the real-world usability of our database design.</a:t>
+            </a:r>
+          </a:p>
+        </p:txBody>
+      </p:sp>
+      <p:sp>
+        <p:nvSpPr>
+          <p:cNvPr id="5" name="Freeform 5"/>
+          <p:cNvSpPr/>
+          <p:nvPr/>
+        </p:nvSpPr>
+        <p:spPr>
+          <a:xfrm flipH="1">
+            <a:off x="12560540" y="-68755"/>
+            <a:ext cx="5727460" cy="3174546"/>
+          </a:xfrm>
+          <a:custGeom>
+            <a:avLst/>
+            <a:gdLst/>
+            <a:ahLst/>
+            <a:cxnLst/>
+            <a:rect l="l" t="t" r="r" b="b"/>
+            <a:pathLst>
+              <a:path w="5727460" h="3174546">
+                <a:moveTo>
+                  <a:pt x="5727460" y="0"/>
+                </a:moveTo>
+                <a:lnTo>
+                  <a:pt x="0" y="0"/>
+                </a:lnTo>
+                <a:lnTo>
+                  <a:pt x="0" y="3174546"/>
+                </a:lnTo>
+                <a:lnTo>
+                  <a:pt x="5727460" y="3174546"/>
+                </a:lnTo>
+                <a:lnTo>
+                  <a:pt x="5727460" y="0"/>
+                </a:lnTo>
+                <a:close/>
+              </a:path>
+            </a:pathLst>
+          </a:custGeom>
+          <a:blipFill>
+            <a:blip>
+              <a:extLst>
+                <a:ext uri="{96DAC541-7B7A-43D3-8B79-37D633B846F1}">
+                  <asvg:svgBlip xmlns:asvg="http://schemas.microsoft.com/office/drawing/2016/SVG/main" r:embed="rId2"/>
+                </a:ext>
+              </a:extLst>
+            </a:blip>
+            <a:stretch>
+              <a:fillRect/>
+            </a:stretch>
+          </a:blipFill>
+        </p:spPr>
+        <p:txBody>
+          <a:bodyPr/>
+          <a:lstStyle/>
+          <a:p>
+            <a:endParaRPr lang="en-US"/>
+          </a:p>
+        </p:txBody>
+      </p:sp>
+    </p:spTree>
+  </p:cSld>
+  <p:clrMapOvr>
+    <a:masterClrMapping/>
+  </p:clrMapOvr>
 </p:sld>
 </file>
 

--- a/Hospital Management System.pptx
+++ b/Hospital Management System.pptx
@@ -11,29 +11,32 @@
     <p:sldId id="259" r:id="rId5"/>
     <p:sldId id="260" r:id="rId6"/>
     <p:sldId id="265" r:id="rId7"/>
-    <p:sldId id="261" r:id="rId8"/>
-    <p:sldId id="262" r:id="rId9"/>
-    <p:sldId id="263" r:id="rId10"/>
-    <p:sldId id="264" r:id="rId11"/>
+    <p:sldId id="266" r:id="rId8"/>
+    <p:sldId id="267" r:id="rId9"/>
+    <p:sldId id="261" r:id="rId10"/>
+    <p:sldId id="262" r:id="rId11"/>
+    <p:sldId id="263" r:id="rId12"/>
+    <p:sldId id="264" r:id="rId13"/>
   </p:sldIdLst>
   <p:sldSz cx="18288000" cy="10287000"/>
   <p:notesSz cx="6858000" cy="9144000"/>
   <p:embeddedFontLst>
     <p:embeddedFont>
       <p:font typeface="Forum" panose="020B0604020202020204" charset="0"/>
-      <p:regular r:id="rId12"/>
+      <p:regular r:id="rId14"/>
     </p:embeddedFont>
     <p:embeddedFont>
       <p:font typeface="Hammersmith One" panose="02010703030501060504" pitchFamily="2" charset="0"/>
-      <p:regular r:id="rId13"/>
+      <p:regular r:id="rId15"/>
     </p:embeddedFont>
     <p:embeddedFont>
       <p:font typeface="Open Sans" panose="020B0606030504020204" pitchFamily="34" charset="0"/>
-      <p:regular r:id="rId14"/>
+      <p:regular r:id="rId16"/>
+      <p:bold r:id="rId17"/>
     </p:embeddedFont>
     <p:embeddedFont>
       <p:font typeface="Open Sans Bold" panose="020B0806030504020204" charset="0"/>
-      <p:regular r:id="rId15"/>
+      <p:regular r:id="rId18"/>
     </p:embeddedFont>
   </p:embeddedFontLst>
   <p:defaultTextStyle>
@@ -3480,6 +3483,608 @@
       </p:grpSpPr>
       <p:sp>
         <p:nvSpPr>
+          <p:cNvPr id="2" name="Freeform 2"/>
+          <p:cNvSpPr/>
+          <p:nvPr/>
+        </p:nvSpPr>
+        <p:spPr>
+          <a:xfrm flipH="1" flipV="1">
+            <a:off x="14972802" y="0"/>
+            <a:ext cx="3315198" cy="4370993"/>
+          </a:xfrm>
+          <a:custGeom>
+            <a:avLst/>
+            <a:gdLst/>
+            <a:ahLst/>
+            <a:cxnLst/>
+            <a:rect l="l" t="t" r="r" b="b"/>
+            <a:pathLst>
+              <a:path w="3315198" h="4370993">
+                <a:moveTo>
+                  <a:pt x="3315198" y="4370993"/>
+                </a:moveTo>
+                <a:lnTo>
+                  <a:pt x="0" y="4370993"/>
+                </a:lnTo>
+                <a:lnTo>
+                  <a:pt x="0" y="0"/>
+                </a:lnTo>
+                <a:lnTo>
+                  <a:pt x="3315198" y="0"/>
+                </a:lnTo>
+                <a:lnTo>
+                  <a:pt x="3315198" y="4370993"/>
+                </a:lnTo>
+                <a:close/>
+              </a:path>
+            </a:pathLst>
+          </a:custGeom>
+          <a:blipFill>
+            <a:blip>
+              <a:extLst>
+                <a:ext uri="{96DAC541-7B7A-43D3-8B79-37D633B846F1}">
+                  <asvg:svgBlip xmlns:asvg="http://schemas.microsoft.com/office/drawing/2016/SVG/main" r:embed="rId2"/>
+                </a:ext>
+              </a:extLst>
+            </a:blip>
+            <a:stretch>
+              <a:fillRect/>
+            </a:stretch>
+          </a:blipFill>
+        </p:spPr>
+        <p:txBody>
+          <a:bodyPr/>
+          <a:lstStyle/>
+          <a:p>
+            <a:endParaRPr lang="en-US"/>
+          </a:p>
+        </p:txBody>
+      </p:sp>
+      <p:sp>
+        <p:nvSpPr>
+          <p:cNvPr id="3" name="Freeform 3"/>
+          <p:cNvSpPr/>
+          <p:nvPr/>
+        </p:nvSpPr>
+        <p:spPr>
+          <a:xfrm rot="-10800000" flipH="1" flipV="1">
+            <a:off x="0" y="5916007"/>
+            <a:ext cx="3315198" cy="4370993"/>
+          </a:xfrm>
+          <a:custGeom>
+            <a:avLst/>
+            <a:gdLst/>
+            <a:ahLst/>
+            <a:cxnLst/>
+            <a:rect l="l" t="t" r="r" b="b"/>
+            <a:pathLst>
+              <a:path w="3315198" h="4370993">
+                <a:moveTo>
+                  <a:pt x="3315198" y="4370993"/>
+                </a:moveTo>
+                <a:lnTo>
+                  <a:pt x="0" y="4370993"/>
+                </a:lnTo>
+                <a:lnTo>
+                  <a:pt x="0" y="0"/>
+                </a:lnTo>
+                <a:lnTo>
+                  <a:pt x="3315198" y="0"/>
+                </a:lnTo>
+                <a:lnTo>
+                  <a:pt x="3315198" y="4370993"/>
+                </a:lnTo>
+                <a:close/>
+              </a:path>
+            </a:pathLst>
+          </a:custGeom>
+          <a:blipFill>
+            <a:blip>
+              <a:extLst>
+                <a:ext uri="{96DAC541-7B7A-43D3-8B79-37D633B846F1}">
+                  <asvg:svgBlip xmlns:asvg="http://schemas.microsoft.com/office/drawing/2016/SVG/main" r:embed="rId2"/>
+                </a:ext>
+              </a:extLst>
+            </a:blip>
+            <a:stretch>
+              <a:fillRect/>
+            </a:stretch>
+          </a:blipFill>
+        </p:spPr>
+        <p:txBody>
+          <a:bodyPr/>
+          <a:lstStyle/>
+          <a:p>
+            <a:endParaRPr lang="en-US"/>
+          </a:p>
+        </p:txBody>
+      </p:sp>
+      <p:pic>
+        <p:nvPicPr>
+          <p:cNvPr id="5" name="Picture 4">
+            <a:extLst>
+              <a:ext uri="{FF2B5EF4-FFF2-40B4-BE49-F238E27FC236}">
+                <a16:creationId xmlns:a16="http://schemas.microsoft.com/office/drawing/2014/main" id="{0F09309B-471C-7C43-EF9C-A8D34F8518F9}"/>
+              </a:ext>
+            </a:extLst>
+          </p:cNvPr>
+          <p:cNvPicPr>
+            <a:picLocks noChangeAspect="1"/>
+          </p:cNvPicPr>
+          <p:nvPr/>
+        </p:nvPicPr>
+        <p:blipFill>
+          <a:blip r:embed="rId3"/>
+          <a:stretch>
+            <a:fillRect/>
+          </a:stretch>
+        </p:blipFill>
+        <p:spPr>
+          <a:xfrm>
+            <a:off x="0" y="647700"/>
+            <a:ext cx="18252409" cy="8991600"/>
+          </a:xfrm>
+          <a:prstGeom prst="rect">
+            <a:avLst/>
+          </a:prstGeom>
+        </p:spPr>
+      </p:pic>
+    </p:spTree>
+  </p:cSld>
+  <p:clrMapOvr>
+    <a:masterClrMapping/>
+  </p:clrMapOvr>
+  <p:transition>
+    <p:fade/>
+  </p:transition>
+</p:sld>
+</file>
+
+<file path=ppt/slides/slide11.xml><?xml version="1.0" encoding="utf-8"?>
+<p:sld xmlns:a="http://schemas.openxmlformats.org/drawingml/2006/main" xmlns:r="http://schemas.openxmlformats.org/officeDocument/2006/relationships" xmlns:p="http://schemas.openxmlformats.org/presentationml/2006/main">
+  <p:cSld>
+    <p:bg>
+      <p:bgPr>
+        <a:solidFill>
+          <a:srgbClr val="E3F4FF"/>
+        </a:solidFill>
+        <a:effectLst/>
+      </p:bgPr>
+    </p:bg>
+    <p:spTree>
+      <p:nvGrpSpPr>
+        <p:cNvPr id="1" name=""/>
+        <p:cNvGrpSpPr/>
+        <p:nvPr/>
+      </p:nvGrpSpPr>
+      <p:grpSpPr>
+        <a:xfrm>
+          <a:off x="0" y="0"/>
+          <a:ext cx="0" cy="0"/>
+          <a:chOff x="0" y="0"/>
+          <a:chExt cx="0" cy="0"/>
+        </a:xfrm>
+      </p:grpSpPr>
+      <p:sp>
+        <p:nvSpPr>
+          <p:cNvPr id="2" name="Freeform 2"/>
+          <p:cNvSpPr/>
+          <p:nvPr/>
+        </p:nvSpPr>
+        <p:spPr>
+          <a:xfrm flipV="1">
+            <a:off x="0" y="7112454"/>
+            <a:ext cx="5727460" cy="3174546"/>
+          </a:xfrm>
+          <a:custGeom>
+            <a:avLst/>
+            <a:gdLst/>
+            <a:ahLst/>
+            <a:cxnLst/>
+            <a:rect l="l" t="t" r="r" b="b"/>
+            <a:pathLst>
+              <a:path w="5727460" h="3174546">
+                <a:moveTo>
+                  <a:pt x="0" y="3174546"/>
+                </a:moveTo>
+                <a:lnTo>
+                  <a:pt x="5727460" y="3174546"/>
+                </a:lnTo>
+                <a:lnTo>
+                  <a:pt x="5727460" y="0"/>
+                </a:lnTo>
+                <a:lnTo>
+                  <a:pt x="0" y="0"/>
+                </a:lnTo>
+                <a:lnTo>
+                  <a:pt x="0" y="3174546"/>
+                </a:lnTo>
+                <a:close/>
+              </a:path>
+            </a:pathLst>
+          </a:custGeom>
+          <a:blipFill>
+            <a:blip>
+              <a:extLst>
+                <a:ext uri="{96DAC541-7B7A-43D3-8B79-37D633B846F1}">
+                  <asvg:svgBlip xmlns:asvg="http://schemas.microsoft.com/office/drawing/2016/SVG/main" r:embed="rId2"/>
+                </a:ext>
+              </a:extLst>
+            </a:blip>
+            <a:stretch>
+              <a:fillRect/>
+            </a:stretch>
+          </a:blipFill>
+        </p:spPr>
+        <p:txBody>
+          <a:bodyPr/>
+          <a:lstStyle/>
+          <a:p>
+            <a:endParaRPr lang="en-US"/>
+          </a:p>
+        </p:txBody>
+      </p:sp>
+      <p:sp>
+        <p:nvSpPr>
+          <p:cNvPr id="3" name="TextBox 3"/>
+          <p:cNvSpPr txBox="1"/>
+          <p:nvPr/>
+        </p:nvSpPr>
+        <p:spPr>
+          <a:xfrm>
+            <a:off x="2346275" y="1191618"/>
+            <a:ext cx="13621079" cy="1004280"/>
+          </a:xfrm>
+          <a:prstGeom prst="rect">
+            <a:avLst/>
+          </a:prstGeom>
+        </p:spPr>
+        <p:txBody>
+          <a:bodyPr lIns="0" tIns="0" rIns="0" bIns="0" rtlCol="0" anchor="t">
+            <a:spAutoFit/>
+          </a:bodyPr>
+          <a:lstStyle/>
+          <a:p>
+            <a:pPr algn="ctr">
+              <a:lnSpc>
+                <a:spcPts val="8271"/>
+              </a:lnSpc>
+            </a:pPr>
+            <a:r>
+              <a:rPr lang="en-US" sz="5908">
+                <a:solidFill>
+                  <a:srgbClr val="071947"/>
+                </a:solidFill>
+                <a:latin typeface="Hammersmith One"/>
+                <a:ea typeface="Hammersmith One"/>
+                <a:cs typeface="Hammersmith One"/>
+                <a:sym typeface="Hammersmith One"/>
+              </a:rPr>
+              <a:t>Bridging the Gap: The Java Application</a:t>
+            </a:r>
+          </a:p>
+        </p:txBody>
+      </p:sp>
+      <p:sp>
+        <p:nvSpPr>
+          <p:cNvPr id="4" name="TextBox 4"/>
+          <p:cNvSpPr txBox="1"/>
+          <p:nvPr/>
+        </p:nvSpPr>
+        <p:spPr>
+          <a:xfrm>
+            <a:off x="2305935" y="2628548"/>
+            <a:ext cx="13661419" cy="6114687"/>
+          </a:xfrm>
+          <a:prstGeom prst="rect">
+            <a:avLst/>
+          </a:prstGeom>
+        </p:spPr>
+        <p:txBody>
+          <a:bodyPr lIns="0" tIns="0" rIns="0" bIns="0" rtlCol="0" anchor="t">
+            <a:spAutoFit/>
+          </a:bodyPr>
+          <a:lstStyle/>
+          <a:p>
+            <a:pPr marL="737335" lvl="1" indent="-368668" algn="l">
+              <a:lnSpc>
+                <a:spcPts val="4781"/>
+              </a:lnSpc>
+              <a:spcBef>
+                <a:spcPct val="0"/>
+              </a:spcBef>
+              <a:buFont typeface="Arial"/>
+              <a:buChar char="•"/>
+            </a:pPr>
+            <a:r>
+              <a:rPr lang="en-US" sz="3415" dirty="0">
+                <a:solidFill>
+                  <a:srgbClr val="071947"/>
+                </a:solidFill>
+                <a:latin typeface="Open Sans"/>
+                <a:ea typeface="Open Sans"/>
+                <a:cs typeface="Open Sans"/>
+                <a:sym typeface="Open Sans"/>
+              </a:rPr>
+              <a:t>We devel</a:t>
+            </a:r>
+            <a:r>
+              <a:rPr lang="en-US" sz="3415" u="none" strike="noStrike" dirty="0">
+                <a:solidFill>
+                  <a:srgbClr val="071947"/>
+                </a:solidFill>
+                <a:latin typeface="Open Sans"/>
+                <a:ea typeface="Open Sans"/>
+                <a:cs typeface="Open Sans"/>
+                <a:sym typeface="Open Sans"/>
+              </a:rPr>
+              <a:t>oped a functional application using Java and IntelliJ IDEA to interact with the PostgreSQL database.</a:t>
+            </a:r>
+          </a:p>
+          <a:p>
+            <a:pPr marL="737335" lvl="1" indent="-368668" algn="l">
+              <a:lnSpc>
+                <a:spcPts val="4781"/>
+              </a:lnSpc>
+              <a:spcBef>
+                <a:spcPct val="0"/>
+              </a:spcBef>
+              <a:buFont typeface="Arial"/>
+              <a:buChar char="•"/>
+            </a:pPr>
+            <a:r>
+              <a:rPr lang="en-US" sz="3415" u="none" strike="noStrike" dirty="0">
+                <a:solidFill>
+                  <a:srgbClr val="071947"/>
+                </a:solidFill>
+                <a:latin typeface="Open Sans"/>
+                <a:ea typeface="Open Sans"/>
+                <a:cs typeface="Open Sans"/>
+                <a:sym typeface="Open Sans"/>
+              </a:rPr>
+              <a:t>Connectivity: We used JDBC (Java Database Connectivity) as a translator between our code and the SQL server.</a:t>
+            </a:r>
+          </a:p>
+          <a:p>
+            <a:pPr marL="737335" lvl="1" indent="-368668" algn="l">
+              <a:lnSpc>
+                <a:spcPts val="4781"/>
+              </a:lnSpc>
+              <a:spcBef>
+                <a:spcPct val="0"/>
+              </a:spcBef>
+              <a:buFont typeface="Arial"/>
+              <a:buChar char="•"/>
+            </a:pPr>
+            <a:r>
+              <a:rPr lang="en-US" sz="3415" u="none" strike="noStrike" dirty="0">
+                <a:solidFill>
+                  <a:srgbClr val="071947"/>
+                </a:solidFill>
+                <a:latin typeface="Open Sans"/>
+                <a:ea typeface="Open Sans"/>
+                <a:cs typeface="Open Sans"/>
+                <a:sym typeface="Open Sans"/>
+              </a:rPr>
+              <a:t>Full CRUD Support: The application allows users to:</a:t>
+            </a:r>
+          </a:p>
+          <a:p>
+            <a:pPr marL="737335" lvl="1" indent="-368668" algn="l">
+              <a:lnSpc>
+                <a:spcPts val="4781"/>
+              </a:lnSpc>
+              <a:spcBef>
+                <a:spcPct val="0"/>
+              </a:spcBef>
+              <a:buFont typeface="Arial"/>
+              <a:buChar char="•"/>
+            </a:pPr>
+            <a:r>
+              <a:rPr lang="en-US" sz="3415" u="none" strike="noStrike" dirty="0">
+                <a:solidFill>
+                  <a:srgbClr val="071947"/>
+                </a:solidFill>
+                <a:latin typeface="Open Sans"/>
+                <a:ea typeface="Open Sans"/>
+                <a:cs typeface="Open Sans"/>
+                <a:sym typeface="Open Sans"/>
+              </a:rPr>
+              <a:t>Create: Register new patients.</a:t>
+            </a:r>
+          </a:p>
+          <a:p>
+            <a:pPr marL="737335" lvl="1" indent="-368668">
+              <a:lnSpc>
+                <a:spcPts val="4781"/>
+              </a:lnSpc>
+              <a:spcBef>
+                <a:spcPct val="0"/>
+              </a:spcBef>
+              <a:buFont typeface="Arial"/>
+              <a:buChar char="•"/>
+            </a:pPr>
+            <a:r>
+              <a:rPr lang="en-US" sz="3415" u="none" strike="noStrike" dirty="0">
+                <a:solidFill>
+                  <a:srgbClr val="071947"/>
+                </a:solidFill>
+                <a:latin typeface="Open Sans"/>
+                <a:ea typeface="Open Sans"/>
+                <a:cs typeface="Open Sans"/>
+                <a:sym typeface="Open Sans"/>
+              </a:rPr>
+              <a:t>Read: Search and view </a:t>
+            </a:r>
+            <a:r>
+              <a:rPr lang="en-US" sz="3415" dirty="0">
+                <a:solidFill>
+                  <a:srgbClr val="071947"/>
+                </a:solidFill>
+                <a:latin typeface="Open Sans"/>
+                <a:ea typeface="Open Sans"/>
+                <a:cs typeface="Open Sans"/>
+                <a:sym typeface="Open Sans"/>
+              </a:rPr>
+              <a:t>patients</a:t>
+            </a:r>
+            <a:r>
+              <a:rPr lang="en-US" sz="3415" u="none" strike="noStrike" dirty="0">
+                <a:solidFill>
+                  <a:srgbClr val="071947"/>
+                </a:solidFill>
+                <a:latin typeface="Open Sans"/>
+                <a:ea typeface="Open Sans"/>
+                <a:cs typeface="Open Sans"/>
+                <a:sym typeface="Open Sans"/>
+              </a:rPr>
+              <a:t>.</a:t>
+            </a:r>
+          </a:p>
+          <a:p>
+            <a:pPr marL="737335" lvl="1" indent="-368668" algn="l">
+              <a:lnSpc>
+                <a:spcPts val="4781"/>
+              </a:lnSpc>
+              <a:spcBef>
+                <a:spcPct val="0"/>
+              </a:spcBef>
+              <a:buFont typeface="Arial"/>
+              <a:buChar char="•"/>
+            </a:pPr>
+            <a:r>
+              <a:rPr lang="en-US" sz="3415" u="none" strike="noStrike" dirty="0">
+                <a:solidFill>
+                  <a:srgbClr val="071947"/>
+                </a:solidFill>
+                <a:latin typeface="Open Sans"/>
+                <a:ea typeface="Open Sans"/>
+                <a:cs typeface="Open Sans"/>
+                <a:sym typeface="Open Sans"/>
+              </a:rPr>
+              <a:t>Update: Modify patient details.</a:t>
+            </a:r>
+          </a:p>
+          <a:p>
+            <a:pPr marL="737335" lvl="1" indent="-368668" algn="l">
+              <a:lnSpc>
+                <a:spcPts val="4781"/>
+              </a:lnSpc>
+              <a:spcBef>
+                <a:spcPct val="0"/>
+              </a:spcBef>
+              <a:buFont typeface="Arial"/>
+              <a:buChar char="•"/>
+            </a:pPr>
+            <a:r>
+              <a:rPr lang="en-US" sz="3415" u="none" strike="noStrike" dirty="0">
+                <a:solidFill>
+                  <a:srgbClr val="071947"/>
+                </a:solidFill>
+                <a:latin typeface="Open Sans"/>
+                <a:ea typeface="Open Sans"/>
+                <a:cs typeface="Open Sans"/>
+                <a:sym typeface="Open Sans"/>
+              </a:rPr>
+              <a:t>Delete: Remove records when necessary. This demonstrates the real-world usability of our database design.</a:t>
+            </a:r>
+          </a:p>
+        </p:txBody>
+      </p:sp>
+      <p:sp>
+        <p:nvSpPr>
+          <p:cNvPr id="5" name="Freeform 5"/>
+          <p:cNvSpPr/>
+          <p:nvPr/>
+        </p:nvSpPr>
+        <p:spPr>
+          <a:xfrm flipH="1">
+            <a:off x="12560540" y="-68755"/>
+            <a:ext cx="5727460" cy="3174546"/>
+          </a:xfrm>
+          <a:custGeom>
+            <a:avLst/>
+            <a:gdLst/>
+            <a:ahLst/>
+            <a:cxnLst/>
+            <a:rect l="l" t="t" r="r" b="b"/>
+            <a:pathLst>
+              <a:path w="5727460" h="3174546">
+                <a:moveTo>
+                  <a:pt x="5727460" y="0"/>
+                </a:moveTo>
+                <a:lnTo>
+                  <a:pt x="0" y="0"/>
+                </a:lnTo>
+                <a:lnTo>
+                  <a:pt x="0" y="3174546"/>
+                </a:lnTo>
+                <a:lnTo>
+                  <a:pt x="5727460" y="3174546"/>
+                </a:lnTo>
+                <a:lnTo>
+                  <a:pt x="5727460" y="0"/>
+                </a:lnTo>
+                <a:close/>
+              </a:path>
+            </a:pathLst>
+          </a:custGeom>
+          <a:blipFill>
+            <a:blip>
+              <a:extLst>
+                <a:ext uri="{96DAC541-7B7A-43D3-8B79-37D633B846F1}">
+                  <asvg:svgBlip xmlns:asvg="http://schemas.microsoft.com/office/drawing/2016/SVG/main" r:embed="rId2"/>
+                </a:ext>
+              </a:extLst>
+            </a:blip>
+            <a:stretch>
+              <a:fillRect/>
+            </a:stretch>
+          </a:blipFill>
+        </p:spPr>
+        <p:txBody>
+          <a:bodyPr/>
+          <a:lstStyle/>
+          <a:p>
+            <a:endParaRPr lang="en-US"/>
+          </a:p>
+        </p:txBody>
+      </p:sp>
+    </p:spTree>
+  </p:cSld>
+  <p:clrMapOvr>
+    <a:masterClrMapping/>
+  </p:clrMapOvr>
+</p:sld>
+</file>
+
+<file path=ppt/slides/slide12.xml><?xml version="1.0" encoding="utf-8"?>
+<p:sld xmlns:a="http://schemas.openxmlformats.org/drawingml/2006/main" xmlns:r="http://schemas.openxmlformats.org/officeDocument/2006/relationships" xmlns:p="http://schemas.openxmlformats.org/presentationml/2006/main">
+  <p:cSld>
+    <p:bg>
+      <p:bgPr>
+        <a:solidFill>
+          <a:srgbClr val="E3F4FF"/>
+        </a:solidFill>
+        <a:effectLst/>
+      </p:bgPr>
+    </p:bg>
+    <p:spTree>
+      <p:nvGrpSpPr>
+        <p:cNvPr id="1" name=""/>
+        <p:cNvGrpSpPr/>
+        <p:nvPr/>
+      </p:nvGrpSpPr>
+      <p:grpSpPr>
+        <a:xfrm>
+          <a:off x="0" y="0"/>
+          <a:ext cx="0" cy="0"/>
+          <a:chOff x="0" y="0"/>
+          <a:chExt cx="0" cy="0"/>
+        </a:xfrm>
+      </p:grpSpPr>
+      <p:sp>
+        <p:nvSpPr>
           <p:cNvPr id="2" name="TextBox 2"/>
           <p:cNvSpPr txBox="1"/>
           <p:nvPr/>
@@ -4257,7 +4862,7 @@
             </a:endParaRPr>
           </a:p>
           <a:p>
-            <a:pPr marL="737335" lvl="1" indent="-368668" algn="l">
+            <a:pPr marL="737335" lvl="1" indent="-368668">
               <a:lnSpc>
                 <a:spcPts val="4781"/>
               </a:lnSpc>
@@ -4265,20 +4870,52 @@
               <a:buChar char="•"/>
             </a:pPr>
             <a:r>
-              <a:rPr lang="en-US" sz="3415" dirty="0">
-                <a:solidFill>
-                  <a:srgbClr val="071947"/>
-                </a:solidFill>
-                <a:latin typeface="Open Sans"/>
-                <a:ea typeface="Open Sans"/>
-                <a:cs typeface="Open Sans"/>
-                <a:sym typeface="Open Sans"/>
-              </a:rPr>
-              <a:t>A patient cannot be hospitalized without a direct assignment from a doctor.</a:t>
-            </a:r>
-          </a:p>
-          <a:p>
-            <a:pPr marL="737335" lvl="1" indent="-368668" algn="l">
+              <a:rPr lang="en-US" sz="3400" dirty="0">
+                <a:solidFill>
+                  <a:schemeClr val="tx2"/>
+                </a:solidFill>
+                <a:latin typeface="Open Sans" panose="020B0606030504020204" pitchFamily="34" charset="0"/>
+                <a:ea typeface="Open Sans" panose="020B0606030504020204" pitchFamily="34" charset="0"/>
+                <a:cs typeface="Open Sans" panose="020B0606030504020204" pitchFamily="34" charset="0"/>
+              </a:rPr>
+              <a:t>A patient cannot be hospitalized without being assigned to a specific </a:t>
+            </a:r>
+            <a:r>
+              <a:rPr lang="en-US" sz="3400" b="1" dirty="0">
+                <a:solidFill>
+                  <a:schemeClr val="tx2"/>
+                </a:solidFill>
+                <a:latin typeface="Open Sans" panose="020B0606030504020204" pitchFamily="34" charset="0"/>
+                <a:ea typeface="Open Sans" panose="020B0606030504020204" pitchFamily="34" charset="0"/>
+                <a:cs typeface="Open Sans" panose="020B0606030504020204" pitchFamily="34" charset="0"/>
+              </a:rPr>
+              <a:t>Ward</a:t>
+            </a:r>
+            <a:r>
+              <a:rPr lang="en-US" sz="3400" dirty="0">
+                <a:solidFill>
+                  <a:schemeClr val="tx2"/>
+                </a:solidFill>
+                <a:latin typeface="Open Sans" panose="020B0606030504020204" pitchFamily="34" charset="0"/>
+                <a:ea typeface="Open Sans" panose="020B0606030504020204" pitchFamily="34" charset="0"/>
+                <a:cs typeface="Open Sans" panose="020B0606030504020204" pitchFamily="34" charset="0"/>
+              </a:rPr>
+              <a:t> with available </a:t>
+            </a:r>
+            <a:r>
+              <a:rPr lang="en-US" sz="3400" b="1" dirty="0">
+                <a:solidFill>
+                  <a:schemeClr val="tx2"/>
+                </a:solidFill>
+                <a:latin typeface="Open Sans" panose="020B0606030504020204" pitchFamily="34" charset="0"/>
+                <a:ea typeface="Open Sans" panose="020B0606030504020204" pitchFamily="34" charset="0"/>
+                <a:cs typeface="Open Sans" panose="020B0606030504020204" pitchFamily="34" charset="0"/>
+              </a:rPr>
+              <a:t>Capacity.</a:t>
+            </a:r>
+          </a:p>
+          <a:p>
+            <a:pPr marL="737335" lvl="1" indent="-368668">
               <a:lnSpc>
                 <a:spcPts val="4781"/>
               </a:lnSpc>
@@ -4388,7 +5025,7 @@
               </a:lnSpc>
             </a:pPr>
             <a:r>
-              <a:rPr lang="en-US" sz="6158">
+              <a:rPr lang="en-US" sz="6158" dirty="0">
                 <a:solidFill>
                   <a:srgbClr val="071947"/>
                 </a:solidFill>
@@ -5021,7 +5658,7 @@
               </a:lnSpc>
             </a:pPr>
             <a:r>
-              <a:rPr lang="en-US" sz="3415">
+              <a:rPr lang="en-US" sz="3415" dirty="0">
                 <a:solidFill>
                   <a:srgbClr val="071947"/>
                 </a:solidFill>
@@ -5039,7 +5676,7 @@
                 <a:spcPts val="4781"/>
               </a:lnSpc>
             </a:pPr>
-            <a:endParaRPr lang="en-US" sz="3415">
+            <a:endParaRPr lang="en-US" sz="3415" dirty="0">
               <a:solidFill>
                 <a:srgbClr val="071947"/>
               </a:solidFill>
@@ -5056,7 +5693,7 @@
               </a:lnSpc>
             </a:pPr>
             <a:r>
-              <a:rPr lang="en-US" sz="3415" b="1">
+              <a:rPr lang="en-US" sz="3415" b="1" dirty="0">
                 <a:solidFill>
                   <a:srgbClr val="071947"/>
                 </a:solidFill>
@@ -5077,7 +5714,7 @@
               <a:buChar char="•"/>
             </a:pPr>
             <a:r>
-              <a:rPr lang="en-US" sz="3415">
+              <a:rPr lang="en-US" sz="3415" dirty="0">
                 <a:solidFill>
                   <a:srgbClr val="071947"/>
                 </a:solidFill>
@@ -5089,7 +5726,7 @@
               <a:t>Implemented </a:t>
             </a:r>
             <a:r>
-              <a:rPr lang="en-US" sz="3415" b="1">
+              <a:rPr lang="en-US" sz="3415" b="1" dirty="0">
                 <a:solidFill>
                   <a:srgbClr val="071947"/>
                 </a:solidFill>
@@ -5101,7 +5738,7 @@
               <a:t>11 interconnected tables</a:t>
             </a:r>
             <a:r>
-              <a:rPr lang="en-US" sz="3415">
+              <a:rPr lang="en-US" sz="3415" dirty="0">
                 <a:solidFill>
                   <a:srgbClr val="071947"/>
                 </a:solidFill>
@@ -5110,7 +5747,31 @@
                 <a:cs typeface="Open Sans"/>
                 <a:sym typeface="Open Sans"/>
               </a:rPr>
-              <a:t> in pgAdmin.</a:t>
+              <a:t> in </a:t>
+            </a:r>
+            <a:r>
+              <a:rPr lang="en-US" sz="3415" dirty="0" err="1">
+                <a:solidFill>
+                  <a:srgbClr val="071947"/>
+                </a:solidFill>
+                <a:latin typeface="Open Sans"/>
+                <a:ea typeface="Open Sans"/>
+                <a:cs typeface="Open Sans"/>
+                <a:sym typeface="Open Sans"/>
+              </a:rPr>
+              <a:t>pgAdmin</a:t>
+            </a:r>
+            <a:r>
+              <a:rPr lang="en-US" sz="3415" dirty="0">
+                <a:solidFill>
+                  <a:srgbClr val="071947"/>
+                </a:solidFill>
+                <a:latin typeface="Open Sans"/>
+                <a:ea typeface="Open Sans"/>
+                <a:cs typeface="Open Sans"/>
+                <a:sym typeface="Open Sans"/>
+              </a:rPr>
+              <a:t>.</a:t>
             </a:r>
           </a:p>
           <a:p>
@@ -5122,7 +5783,7 @@
               <a:buChar char="•"/>
             </a:pPr>
             <a:r>
-              <a:rPr lang="en-US" sz="3415">
+              <a:rPr lang="en-US" sz="3415" dirty="0">
                 <a:solidFill>
                   <a:srgbClr val="071947"/>
                 </a:solidFill>
@@ -5143,7 +5804,7 @@
               <a:buChar char="•"/>
             </a:pPr>
             <a:r>
-              <a:rPr lang="en-US" sz="3415">
+              <a:rPr lang="en-US" sz="3415" dirty="0">
                 <a:solidFill>
                   <a:srgbClr val="071947"/>
                 </a:solidFill>
@@ -5164,7 +5825,7 @@
               <a:buChar char="•"/>
             </a:pPr>
             <a:r>
-              <a:rPr lang="en-US" sz="3415">
+              <a:rPr lang="en-US" sz="3415" dirty="0">
                 <a:solidFill>
                   <a:srgbClr val="071947"/>
                 </a:solidFill>
@@ -5185,7 +5846,7 @@
                 <a:spcPct val="0"/>
               </a:spcBef>
             </a:pPr>
-            <a:endParaRPr lang="en-US" sz="3415">
+            <a:endParaRPr lang="en-US" sz="3415" dirty="0">
               <a:solidFill>
                 <a:srgbClr val="071947"/>
               </a:solidFill>
@@ -5325,13 +5986,13 @@
   <p:clrMapOvr>
     <a:masterClrMapping/>
   </p:clrMapOvr>
-  <mc:AlternateContent xmlns:mc="http://schemas.openxmlformats.org/markup-compatibility/2006">
-    <mc:Choice xmlns:p159="http://schemas.microsoft.com/office/powerpoint/2015/09/main" Requires="p159">
+  <mc:AlternateContent xmlns:mc="http://schemas.openxmlformats.org/markup-compatibility/2006" xmlns:p159="http://schemas.microsoft.com/office/powerpoint/2015/09/main">
+    <mc:Choice Requires="p159">
       <p:transition xmlns:p14="http://schemas.microsoft.com/office/powerpoint/2010/main" spd="slow" p14:dur="2000">
         <p159:morph option="byObject"/>
       </p:transition>
     </mc:Choice>
-    <mc:Fallback>
+    <mc:Fallback xmlns="">
       <p:transition spd="slow">
         <p:fade/>
       </p:transition>
@@ -5343,17 +6004,15 @@
 <file path=ppt/slides/slide7.xml><?xml version="1.0" encoding="utf-8"?>
 <p:sld xmlns:a="http://schemas.openxmlformats.org/drawingml/2006/main" xmlns:r="http://schemas.openxmlformats.org/officeDocument/2006/relationships" xmlns:p="http://schemas.openxmlformats.org/presentationml/2006/main">
   <p:cSld>
-    <p:bg>
-      <p:bgPr>
-        <a:solidFill>
-          <a:srgbClr val="E3F4FF"/>
-        </a:solidFill>
-        <a:effectLst/>
-      </p:bgPr>
-    </p:bg>
     <p:spTree>
       <p:nvGrpSpPr>
-        <p:cNvPr id="1" name=""/>
+        <p:cNvPr id="1" name="">
+          <a:extLst>
+            <a:ext uri="{FF2B5EF4-FFF2-40B4-BE49-F238E27FC236}">
+              <a16:creationId xmlns:a16="http://schemas.microsoft.com/office/drawing/2014/main" id="{99A50DAD-37CF-0B98-C833-05922D33661D}"/>
+            </a:ext>
+          </a:extLst>
+        </p:cNvPr>
         <p:cNvGrpSpPr/>
         <p:nvPr/>
       </p:nvGrpSpPr>
@@ -5367,14 +6026,20 @@
       </p:grpSpPr>
       <p:sp>
         <p:nvSpPr>
-          <p:cNvPr id="2" name="Freeform 2"/>
+          <p:cNvPr id="2" name="Freeform 2">
+            <a:extLst>
+              <a:ext uri="{FF2B5EF4-FFF2-40B4-BE49-F238E27FC236}">
+                <a16:creationId xmlns:a16="http://schemas.microsoft.com/office/drawing/2014/main" id="{297C434C-E098-90EB-2916-7E50D4F28E20}"/>
+              </a:ext>
+            </a:extLst>
+          </p:cNvPr>
           <p:cNvSpPr/>
           <p:nvPr/>
         </p:nvSpPr>
         <p:spPr>
-          <a:xfrm flipV="1">
-            <a:off x="0" y="0"/>
-            <a:ext cx="4366036" cy="3715100"/>
+          <a:xfrm>
+            <a:off x="25705" y="5817885"/>
+            <a:ext cx="3315198" cy="4370993"/>
           </a:xfrm>
           <a:custGeom>
             <a:avLst/>
@@ -5383,21 +6048,21 @@
             <a:cxnLst/>
             <a:rect l="l" t="t" r="r" b="b"/>
             <a:pathLst>
-              <a:path w="4366036" h="3715100">
+              <a:path w="3315198" h="4370993">
                 <a:moveTo>
-                  <a:pt x="0" y="3715100"/>
+                  <a:pt x="0" y="0"/>
                 </a:moveTo>
                 <a:lnTo>
-                  <a:pt x="4366036" y="3715100"/>
-                </a:lnTo>
-                <a:lnTo>
-                  <a:pt x="4366036" y="0"/>
+                  <a:pt x="3315198" y="0"/>
+                </a:lnTo>
+                <a:lnTo>
+                  <a:pt x="3315198" y="4370993"/>
+                </a:lnTo>
+                <a:lnTo>
+                  <a:pt x="0" y="4370993"/>
                 </a:lnTo>
                 <a:lnTo>
                   <a:pt x="0" y="0"/>
-                </a:lnTo>
-                <a:lnTo>
-                  <a:pt x="0" y="3715100"/>
                 </a:lnTo>
                 <a:close/>
               </a:path>
@@ -5426,14 +6091,20 @@
       </p:sp>
       <p:sp>
         <p:nvSpPr>
-          <p:cNvPr id="3" name="Freeform 3"/>
+          <p:cNvPr id="3" name="Freeform 3">
+            <a:extLst>
+              <a:ext uri="{FF2B5EF4-FFF2-40B4-BE49-F238E27FC236}">
+                <a16:creationId xmlns:a16="http://schemas.microsoft.com/office/drawing/2014/main" id="{1AFBAB61-7685-6760-488A-BCD94960432B}"/>
+              </a:ext>
+            </a:extLst>
+          </p:cNvPr>
           <p:cNvSpPr/>
           <p:nvPr/>
         </p:nvSpPr>
         <p:spPr>
-          <a:xfrm flipH="1">
-            <a:off x="13921964" y="6571900"/>
-            <a:ext cx="4366036" cy="3715100"/>
+          <a:xfrm flipH="1" flipV="1">
+            <a:off x="14972802" y="0"/>
+            <a:ext cx="3315198" cy="4370993"/>
           </a:xfrm>
           <a:custGeom>
             <a:avLst/>
@@ -5442,21 +6113,21 @@
             <a:cxnLst/>
             <a:rect l="l" t="t" r="r" b="b"/>
             <a:pathLst>
-              <a:path w="4366036" h="3715100">
+              <a:path w="3315198" h="4370993">
                 <a:moveTo>
-                  <a:pt x="4366036" y="0"/>
+                  <a:pt x="3315198" y="4370993"/>
                 </a:moveTo>
                 <a:lnTo>
+                  <a:pt x="0" y="4370993"/>
+                </a:lnTo>
+                <a:lnTo>
                   <a:pt x="0" y="0"/>
                 </a:lnTo>
                 <a:lnTo>
-                  <a:pt x="0" y="3715100"/>
-                </a:lnTo>
-                <a:lnTo>
-                  <a:pt x="4366036" y="3715100"/>
-                </a:lnTo>
-                <a:lnTo>
-                  <a:pt x="4366036" y="0"/>
+                  <a:pt x="3315198" y="0"/>
+                </a:lnTo>
+                <a:lnTo>
+                  <a:pt x="3315198" y="4370993"/>
                 </a:lnTo>
                 <a:close/>
               </a:path>
@@ -5485,14 +6156,20 @@
       </p:sp>
       <p:sp>
         <p:nvSpPr>
-          <p:cNvPr id="4" name="TextBox 4"/>
+          <p:cNvPr id="4" name="TextBox 4">
+            <a:extLst>
+              <a:ext uri="{FF2B5EF4-FFF2-40B4-BE49-F238E27FC236}">
+                <a16:creationId xmlns:a16="http://schemas.microsoft.com/office/drawing/2014/main" id="{E5DA54E4-F749-5F7A-1B82-6CCF0CB8138F}"/>
+              </a:ext>
+            </a:extLst>
+          </p:cNvPr>
           <p:cNvSpPr txBox="1"/>
           <p:nvPr/>
         </p:nvSpPr>
         <p:spPr>
           <a:xfrm>
-            <a:off x="3006629" y="923925"/>
-            <a:ext cx="12274742" cy="922410"/>
+            <a:off x="2946264" y="933450"/>
+            <a:ext cx="12395472" cy="830997"/>
           </a:xfrm>
           <a:prstGeom prst="rect">
             <a:avLst/>
@@ -5504,36 +6181,29 @@
           </a:bodyPr>
           <a:lstStyle/>
           <a:p>
-            <a:pPr algn="ctr">
-              <a:lnSpc>
-                <a:spcPts val="7518"/>
-              </a:lnSpc>
-            </a:pPr>
-            <a:r>
-              <a:rPr lang="en-US" sz="5370">
-                <a:solidFill>
-                  <a:srgbClr val="071947"/>
-                </a:solidFill>
-                <a:latin typeface="Hammersmith One"/>
-                <a:ea typeface="Hammersmith One"/>
-                <a:cs typeface="Hammersmith One"/>
-                <a:sym typeface="Hammersmith One"/>
-              </a:rPr>
-              <a:t>Database Implementation (MongoDB)</a:t>
-            </a:r>
-          </a:p>
-        </p:txBody>
-      </p:sp>
-      <p:sp>
-        <p:nvSpPr>
-          <p:cNvPr id="5" name="TextBox 5"/>
+            <a:r>
+              <a:rPr lang="en-US" sz="5400" b="1" dirty="0"/>
+              <a:t>Database Optimization (Indexing)</a:t>
+            </a:r>
+          </a:p>
+        </p:txBody>
+      </p:sp>
+      <p:sp>
+        <p:nvSpPr>
+          <p:cNvPr id="5" name="TextBox 5">
+            <a:extLst>
+              <a:ext uri="{FF2B5EF4-FFF2-40B4-BE49-F238E27FC236}">
+                <a16:creationId xmlns:a16="http://schemas.microsoft.com/office/drawing/2014/main" id="{FB4B3B5F-3C19-3765-91D6-D14435065B86}"/>
+              </a:ext>
+            </a:extLst>
+          </p:cNvPr>
           <p:cNvSpPr txBox="1"/>
           <p:nvPr/>
         </p:nvSpPr>
         <p:spPr>
           <a:xfrm>
-            <a:off x="1964733" y="2305890"/>
-            <a:ext cx="14358533" cy="6570932"/>
+            <a:off x="1518198" y="2203820"/>
+            <a:ext cx="15251605" cy="7685822"/>
           </a:xfrm>
           <a:prstGeom prst="rect">
             <a:avLst/>
@@ -5545,159 +6215,24 @@
           </a:bodyPr>
           <a:lstStyle/>
           <a:p>
+            <a:r>
+              <a:rPr lang="en-US" sz="3400" dirty="0">
+                <a:solidFill>
+                  <a:schemeClr val="tx2"/>
+                </a:solidFill>
+              </a:rPr>
+              <a:t>To maintain high performance as the hospital database grows, we implemented strategic indexing. This ensures that critical medical data, such as appointment schedules, can be retrieved instantly without full table scans.</a:t>
+            </a:r>
+          </a:p>
+          <a:p>
             <a:pPr algn="l">
               <a:lnSpc>
                 <a:spcPts val="4781"/>
               </a:lnSpc>
             </a:pPr>
-            <a:r>
-              <a:rPr lang="en-US" sz="3415" dirty="0">
-                <a:solidFill>
-                  <a:srgbClr val="071947"/>
-                </a:solidFill>
-                <a:latin typeface="Open Sans"/>
-                <a:ea typeface="Open Sans"/>
-                <a:cs typeface="Open Sans"/>
-                <a:sym typeface="Open Sans"/>
-              </a:rPr>
-              <a:t>For the medical history part of our project, we chose MongoDB to handle non-relational data.</a:t>
-            </a:r>
-          </a:p>
-          <a:p>
-            <a:pPr marL="737335" lvl="1" indent="-368668" algn="l">
-              <a:lnSpc>
-                <a:spcPts val="4781"/>
-              </a:lnSpc>
-              <a:buFont typeface="Arial"/>
-              <a:buChar char="•"/>
-            </a:pPr>
-            <a:r>
-              <a:rPr lang="en-US" sz="3415" b="1" dirty="0">
-                <a:solidFill>
-                  <a:srgbClr val="071947"/>
-                </a:solidFill>
-                <a:latin typeface="Open Sans Bold"/>
-                <a:ea typeface="Open Sans Bold"/>
-                <a:cs typeface="Open Sans Bold"/>
-                <a:sym typeface="Open Sans Bold"/>
-              </a:rPr>
-              <a:t>Embedding Strategy:</a:t>
-            </a:r>
-            <a:r>
-              <a:rPr lang="en-US" sz="3415" dirty="0">
-                <a:solidFill>
-                  <a:srgbClr val="071947"/>
-                </a:solidFill>
-                <a:latin typeface="Open Sans"/>
-                <a:ea typeface="Open Sans"/>
-                <a:cs typeface="Open Sans"/>
-                <a:sym typeface="Open Sans"/>
-              </a:rPr>
-              <a:t> Instead of splitting data into many tables, we store surgery records and bills directly inside the Patient document.</a:t>
-            </a:r>
-          </a:p>
-          <a:p>
-            <a:pPr marL="737335" lvl="1" indent="-368668" algn="l">
-              <a:lnSpc>
-                <a:spcPts val="4781"/>
-              </a:lnSpc>
-              <a:buFont typeface="Arial"/>
-              <a:buChar char="•"/>
-            </a:pPr>
-            <a:r>
-              <a:rPr lang="en-US" sz="3415" b="1" dirty="0">
-                <a:solidFill>
-                  <a:srgbClr val="071947"/>
-                </a:solidFill>
-                <a:latin typeface="Open Sans Bold"/>
-                <a:ea typeface="Open Sans Bold"/>
-                <a:cs typeface="Open Sans Bold"/>
-                <a:sym typeface="Open Sans Bold"/>
-              </a:rPr>
-              <a:t>Performance Optimization:</a:t>
-            </a:r>
-            <a:r>
-              <a:rPr lang="en-US" sz="3415" dirty="0">
-                <a:solidFill>
-                  <a:srgbClr val="071947"/>
-                </a:solidFill>
-                <a:latin typeface="Open Sans"/>
-                <a:ea typeface="Open Sans"/>
-                <a:cs typeface="Open Sans"/>
-                <a:sym typeface="Open Sans"/>
-              </a:rPr>
-              <a:t> This design is optimized for "Read-Heavy" operations. A doctor can retrieve a patient’s entire history in a single query without using slow "Join" operations.</a:t>
-            </a:r>
-          </a:p>
-          <a:p>
-            <a:pPr marL="737335" lvl="1" indent="-368668" algn="l">
-              <a:lnSpc>
-                <a:spcPts val="4781"/>
-              </a:lnSpc>
-              <a:buFont typeface="Arial"/>
-              <a:buChar char="•"/>
-            </a:pPr>
-            <a:r>
-              <a:rPr lang="en-US" sz="3415" b="1" dirty="0">
-                <a:solidFill>
-                  <a:srgbClr val="071947"/>
-                </a:solidFill>
-                <a:latin typeface="Open Sans Bold"/>
-                <a:ea typeface="Open Sans Bold"/>
-                <a:cs typeface="Open Sans Bold"/>
-                <a:sym typeface="Open Sans Bold"/>
-              </a:rPr>
-              <a:t>Validation:</a:t>
-            </a:r>
-            <a:r>
-              <a:rPr lang="en-US" sz="3415" dirty="0">
-                <a:solidFill>
-                  <a:srgbClr val="071947"/>
-                </a:solidFill>
-                <a:latin typeface="Open Sans"/>
-                <a:ea typeface="Open Sans"/>
-                <a:cs typeface="Open Sans"/>
-                <a:sym typeface="Open Sans"/>
-              </a:rPr>
-              <a:t> We implemented </a:t>
-            </a:r>
-            <a:r>
-              <a:rPr lang="en-US" sz="3415" b="1" dirty="0">
-                <a:solidFill>
-                  <a:srgbClr val="071947"/>
-                </a:solidFill>
-                <a:latin typeface="Open Sans Bold"/>
-                <a:ea typeface="Open Sans Bold"/>
-                <a:cs typeface="Open Sans Bold"/>
-                <a:sym typeface="Open Sans Bold"/>
-              </a:rPr>
-              <a:t>JSON Schema Validation</a:t>
-            </a:r>
-            <a:r>
-              <a:rPr lang="en-US" sz="3415" dirty="0">
-                <a:solidFill>
-                  <a:srgbClr val="071947"/>
-                </a:solidFill>
-                <a:latin typeface="Open Sans"/>
-                <a:ea typeface="Open Sans"/>
-                <a:cs typeface="Open Sans"/>
-                <a:sym typeface="Open Sans"/>
-              </a:rPr>
-              <a:t> to enforce data types, making our NoSQL collections as reliable as SQL tables.</a:t>
-            </a:r>
-          </a:p>
-          <a:p>
-            <a:pPr algn="l">
-              <a:lnSpc>
-                <a:spcPts val="4781"/>
-              </a:lnSpc>
-              <a:spcBef>
-                <a:spcPct val="0"/>
-              </a:spcBef>
-            </a:pPr>
-            <a:endParaRPr lang="en-US" sz="3415" dirty="0">
+            <a:endParaRPr lang="en-US" sz="3400" dirty="0">
               <a:solidFill>
-                <a:srgbClr val="071947"/>
+                <a:schemeClr val="tx2"/>
               </a:solidFill>
               <a:latin typeface="Open Sans"/>
               <a:ea typeface="Open Sans"/>
@@ -5705,9 +6240,234 @@
               <a:sym typeface="Open Sans"/>
             </a:endParaRPr>
           </a:p>
+          <a:p>
+            <a:pPr algn="l">
+              <a:lnSpc>
+                <a:spcPts val="4781"/>
+              </a:lnSpc>
+            </a:pPr>
+            <a:r>
+              <a:rPr lang="en-US" sz="3400" b="1" dirty="0">
+                <a:solidFill>
+                  <a:schemeClr val="tx2"/>
+                </a:solidFill>
+                <a:latin typeface="Open Sans Bold"/>
+                <a:ea typeface="Open Sans Bold"/>
+                <a:cs typeface="Open Sans Bold"/>
+                <a:sym typeface="Open Sans Bold"/>
+              </a:rPr>
+              <a:t>Technical Features:</a:t>
+            </a:r>
+            <a:endParaRPr lang="ru-RU" sz="3400" b="1" dirty="0">
+              <a:solidFill>
+                <a:schemeClr val="tx2"/>
+              </a:solidFill>
+              <a:latin typeface="Open Sans Bold"/>
+              <a:ea typeface="Open Sans Bold"/>
+              <a:cs typeface="Open Sans Bold"/>
+              <a:sym typeface="Open Sans Bold"/>
+            </a:endParaRPr>
+          </a:p>
+          <a:p>
+            <a:pPr>
+              <a:lnSpc>
+                <a:spcPts val="4781"/>
+              </a:lnSpc>
+            </a:pPr>
+            <a:r>
+              <a:rPr lang="en-US" sz="3400" b="1" dirty="0"/>
+              <a:t>B-Tree Indexing</a:t>
+            </a:r>
+            <a:r>
+              <a:rPr lang="en-US" sz="3400" dirty="0">
+                <a:solidFill>
+                  <a:schemeClr val="tx2"/>
+                </a:solidFill>
+              </a:rPr>
+              <a:t>: Created the </a:t>
+            </a:r>
+            <a:r>
+              <a:rPr lang="en-US" sz="3400" dirty="0" err="1">
+                <a:solidFill>
+                  <a:schemeClr val="tx2"/>
+                </a:solidFill>
+              </a:rPr>
+              <a:t>idx_appointment_date</a:t>
+            </a:r>
+            <a:r>
+              <a:rPr lang="en-US" sz="3400" dirty="0">
+                <a:solidFill>
+                  <a:schemeClr val="tx2"/>
+                </a:solidFill>
+              </a:rPr>
+              <a:t> index on the </a:t>
+            </a:r>
+            <a:r>
+              <a:rPr lang="en-US" sz="3400" b="1" dirty="0">
+                <a:solidFill>
+                  <a:schemeClr val="tx2"/>
+                </a:solidFill>
+              </a:rPr>
+              <a:t>Appointment</a:t>
+            </a:r>
+            <a:r>
+              <a:rPr lang="en-US" sz="3400" dirty="0">
+                <a:solidFill>
+                  <a:schemeClr val="tx2"/>
+                </a:solidFill>
+              </a:rPr>
+              <a:t> table to optimize date-based queries</a:t>
+            </a:r>
+            <a:endParaRPr lang="en-US" sz="3400" b="1" dirty="0">
+              <a:solidFill>
+                <a:schemeClr val="tx2"/>
+              </a:solidFill>
+              <a:latin typeface="Open Sans Bold"/>
+              <a:ea typeface="Open Sans Bold"/>
+              <a:cs typeface="Open Sans Bold"/>
+              <a:sym typeface="Open Sans Bold"/>
+            </a:endParaRPr>
+          </a:p>
+          <a:p>
+            <a:pPr>
+              <a:lnSpc>
+                <a:spcPts val="4781"/>
+              </a:lnSpc>
+            </a:pPr>
+            <a:r>
+              <a:rPr lang="en-US" sz="3400" b="1" dirty="0"/>
+              <a:t>Performance Boost</a:t>
+            </a:r>
+            <a:r>
+              <a:rPr lang="en-US" sz="3400" dirty="0">
+                <a:solidFill>
+                  <a:schemeClr val="tx2"/>
+                </a:solidFill>
+              </a:rPr>
+              <a:t>: Shifted database execution from a slow </a:t>
+            </a:r>
+            <a:r>
+              <a:rPr lang="en-US" sz="3400" b="1" dirty="0">
+                <a:solidFill>
+                  <a:schemeClr val="tx2"/>
+                </a:solidFill>
+              </a:rPr>
+              <a:t>Sequential Scan</a:t>
+            </a:r>
+            <a:r>
+              <a:rPr lang="en-US" sz="3400" dirty="0">
+                <a:solidFill>
+                  <a:schemeClr val="tx2"/>
+                </a:solidFill>
+              </a:rPr>
+              <a:t> to a high-speed </a:t>
+            </a:r>
+            <a:r>
+              <a:rPr lang="en-US" sz="3400" b="1" dirty="0">
+                <a:solidFill>
+                  <a:schemeClr val="tx2"/>
+                </a:solidFill>
+              </a:rPr>
+              <a:t>Index Scan</a:t>
+            </a:r>
+            <a:r>
+              <a:rPr lang="en-US" sz="3400" dirty="0">
+                <a:solidFill>
+                  <a:schemeClr val="tx2"/>
+                </a:solidFill>
+              </a:rPr>
+              <a:t>.</a:t>
+            </a:r>
+            <a:endParaRPr lang="en-US" sz="3400" b="1" dirty="0">
+              <a:solidFill>
+                <a:schemeClr val="tx2"/>
+              </a:solidFill>
+              <a:latin typeface="Open Sans Bold"/>
+              <a:ea typeface="Open Sans Bold"/>
+              <a:cs typeface="Open Sans Bold"/>
+              <a:sym typeface="Open Sans Bold"/>
+            </a:endParaRPr>
+          </a:p>
+          <a:p>
+            <a:pPr>
+              <a:lnSpc>
+                <a:spcPts val="4781"/>
+              </a:lnSpc>
+            </a:pPr>
+            <a:r>
+              <a:rPr lang="en-US" sz="3400" b="1" dirty="0"/>
+              <a:t>Query Analysis</a:t>
+            </a:r>
+            <a:r>
+              <a:rPr lang="en-US" sz="3400" dirty="0">
+                <a:solidFill>
+                  <a:schemeClr val="tx2"/>
+                </a:solidFill>
+              </a:rPr>
+              <a:t>: Validated efficiency using the EXPLAIN ANALYZE command to monitor execution time.</a:t>
+            </a:r>
+            <a:endParaRPr lang="en-US" sz="3400" b="1" dirty="0">
+              <a:solidFill>
+                <a:schemeClr val="tx2"/>
+              </a:solidFill>
+              <a:latin typeface="Open Sans Bold"/>
+              <a:ea typeface="Open Sans Bold"/>
+              <a:cs typeface="Open Sans Bold"/>
+              <a:sym typeface="Open Sans Bold"/>
+            </a:endParaRPr>
+          </a:p>
+          <a:p>
+            <a:pPr>
+              <a:lnSpc>
+                <a:spcPts val="4781"/>
+              </a:lnSpc>
+            </a:pPr>
+            <a:r>
+              <a:rPr lang="en-US" sz="3400" b="1" dirty="0"/>
+              <a:t>Implementation</a:t>
+            </a:r>
+            <a:r>
+              <a:rPr lang="en-US" sz="3400" dirty="0">
+                <a:solidFill>
+                  <a:schemeClr val="tx2"/>
+                </a:solidFill>
+              </a:rPr>
+              <a:t>: Used </a:t>
+            </a:r>
+            <a:r>
+              <a:rPr lang="en-US" sz="3400" dirty="0" err="1">
+                <a:solidFill>
+                  <a:schemeClr val="tx2"/>
+                </a:solidFill>
+              </a:rPr>
+              <a:t>generate_series</a:t>
+            </a:r>
+            <a:r>
+              <a:rPr lang="en-US" sz="3400" dirty="0">
+                <a:solidFill>
+                  <a:schemeClr val="tx2"/>
+                </a:solidFill>
+              </a:rPr>
+              <a:t> to test the index against a dataset of 1,000 records,</a:t>
+            </a:r>
+            <a:endParaRPr lang="ru-RU" sz="3400" dirty="0">
+              <a:solidFill>
+                <a:schemeClr val="tx2"/>
+              </a:solidFill>
+              <a:latin typeface="Open Sans"/>
+              <a:ea typeface="Open Sans"/>
+              <a:cs typeface="Open Sans"/>
+              <a:sym typeface="Open Sans"/>
+            </a:endParaRPr>
+          </a:p>
         </p:txBody>
       </p:sp>
     </p:spTree>
+    <p:extLst>
+      <p:ext uri="{BB962C8B-B14F-4D97-AF65-F5344CB8AC3E}">
+        <p14:creationId xmlns:p14="http://schemas.microsoft.com/office/powerpoint/2010/main" val="2572308661"/>
+      </p:ext>
+    </p:extLst>
   </p:cSld>
   <p:clrMapOvr>
     <a:masterClrMapping/>
@@ -5721,14 +6481,6 @@
 <file path=ppt/slides/slide8.xml><?xml version="1.0" encoding="utf-8"?>
 <p:sld xmlns:a="http://schemas.openxmlformats.org/drawingml/2006/main" xmlns:r="http://schemas.openxmlformats.org/officeDocument/2006/relationships" xmlns:p="http://schemas.openxmlformats.org/presentationml/2006/main">
   <p:cSld>
-    <p:bg>
-      <p:bgPr>
-        <a:solidFill>
-          <a:srgbClr val="E3F4FF"/>
-        </a:solidFill>
-        <a:effectLst/>
-      </p:bgPr>
-    </p:bg>
     <p:spTree>
       <p:nvGrpSpPr>
         <p:cNvPr id="1" name=""/>
@@ -5743,130 +6495,42 @@
           <a:chExt cx="0" cy="0"/>
         </a:xfrm>
       </p:grpSpPr>
-      <p:sp>
-        <p:nvSpPr>
-          <p:cNvPr id="2" name="Freeform 2"/>
-          <p:cNvSpPr/>
-          <p:nvPr/>
-        </p:nvSpPr>
-        <p:spPr>
-          <a:xfrm flipH="1" flipV="1">
-            <a:off x="14972802" y="0"/>
-            <a:ext cx="3315198" cy="4370993"/>
-          </a:xfrm>
-          <a:custGeom>
-            <a:avLst/>
-            <a:gdLst/>
-            <a:ahLst/>
-            <a:cxnLst/>
-            <a:rect l="l" t="t" r="r" b="b"/>
-            <a:pathLst>
-              <a:path w="3315198" h="4370993">
-                <a:moveTo>
-                  <a:pt x="3315198" y="4370993"/>
-                </a:moveTo>
-                <a:lnTo>
-                  <a:pt x="0" y="4370993"/>
-                </a:lnTo>
-                <a:lnTo>
-                  <a:pt x="0" y="0"/>
-                </a:lnTo>
-                <a:lnTo>
-                  <a:pt x="3315198" y="0"/>
-                </a:lnTo>
-                <a:lnTo>
-                  <a:pt x="3315198" y="4370993"/>
-                </a:lnTo>
-                <a:close/>
-              </a:path>
-            </a:pathLst>
-          </a:custGeom>
-          <a:blipFill>
-            <a:blip>
-              <a:extLst>
-                <a:ext uri="{96DAC541-7B7A-43D3-8B79-37D633B846F1}">
-                  <asvg:svgBlip xmlns:asvg="http://schemas.microsoft.com/office/drawing/2016/SVG/main" r:embed="rId2"/>
-                </a:ext>
-              </a:extLst>
-            </a:blip>
-            <a:stretch>
-              <a:fillRect/>
-            </a:stretch>
-          </a:blipFill>
-        </p:spPr>
-        <p:txBody>
-          <a:bodyPr/>
-          <a:lstStyle/>
-          <a:p>
-            <a:endParaRPr lang="en-US"/>
-          </a:p>
-        </p:txBody>
-      </p:sp>
-      <p:sp>
-        <p:nvSpPr>
-          <p:cNvPr id="3" name="Freeform 3"/>
-          <p:cNvSpPr/>
-          <p:nvPr/>
-        </p:nvSpPr>
-        <p:spPr>
-          <a:xfrm rot="-10800000" flipH="1" flipV="1">
-            <a:off x="0" y="5916007"/>
-            <a:ext cx="3315198" cy="4370993"/>
-          </a:xfrm>
-          <a:custGeom>
-            <a:avLst/>
-            <a:gdLst/>
-            <a:ahLst/>
-            <a:cxnLst/>
-            <a:rect l="l" t="t" r="r" b="b"/>
-            <a:pathLst>
-              <a:path w="3315198" h="4370993">
-                <a:moveTo>
-                  <a:pt x="3315198" y="4370993"/>
-                </a:moveTo>
-                <a:lnTo>
-                  <a:pt x="0" y="4370993"/>
-                </a:lnTo>
-                <a:lnTo>
-                  <a:pt x="0" y="0"/>
-                </a:lnTo>
-                <a:lnTo>
-                  <a:pt x="3315198" y="0"/>
-                </a:lnTo>
-                <a:lnTo>
-                  <a:pt x="3315198" y="4370993"/>
-                </a:lnTo>
-                <a:close/>
-              </a:path>
-            </a:pathLst>
-          </a:custGeom>
-          <a:blipFill>
-            <a:blip>
-              <a:extLst>
-                <a:ext uri="{96DAC541-7B7A-43D3-8B79-37D633B846F1}">
-                  <asvg:svgBlip xmlns:asvg="http://schemas.microsoft.com/office/drawing/2016/SVG/main" r:embed="rId2"/>
-                </a:ext>
-              </a:extLst>
-            </a:blip>
-            <a:stretch>
-              <a:fillRect/>
-            </a:stretch>
-          </a:blipFill>
-        </p:spPr>
-        <p:txBody>
-          <a:bodyPr/>
-          <a:lstStyle/>
-          <a:p>
-            <a:endParaRPr lang="en-US"/>
-          </a:p>
-        </p:txBody>
-      </p:sp>
       <p:pic>
         <p:nvPicPr>
-          <p:cNvPr id="5" name="Picture 4">
+          <p:cNvPr id="2" name="Picture 1">
             <a:extLst>
               <a:ext uri="{FF2B5EF4-FFF2-40B4-BE49-F238E27FC236}">
-                <a16:creationId xmlns:a16="http://schemas.microsoft.com/office/drawing/2014/main" id="{0F09309B-471C-7C43-EF9C-A8D34F8518F9}"/>
+                <a16:creationId xmlns:a16="http://schemas.microsoft.com/office/drawing/2014/main" id="{9D41D483-3264-85B3-1360-61E0F13F3AD0}"/>
+              </a:ext>
+            </a:extLst>
+          </p:cNvPr>
+          <p:cNvPicPr>
+            <a:picLocks noChangeAspect="1"/>
+          </p:cNvPicPr>
+          <p:nvPr/>
+        </p:nvPicPr>
+        <p:blipFill>
+          <a:blip r:embed="rId2"/>
+          <a:stretch>
+            <a:fillRect/>
+          </a:stretch>
+        </p:blipFill>
+        <p:spPr>
+          <a:xfrm>
+            <a:off x="0" y="0"/>
+            <a:ext cx="9144000" cy="10287000"/>
+          </a:xfrm>
+          <a:prstGeom prst="rect">
+            <a:avLst/>
+          </a:prstGeom>
+        </p:spPr>
+      </p:pic>
+      <p:pic>
+        <p:nvPicPr>
+          <p:cNvPr id="3" name="Picture 2">
+            <a:extLst>
+              <a:ext uri="{FF2B5EF4-FFF2-40B4-BE49-F238E27FC236}">
+                <a16:creationId xmlns:a16="http://schemas.microsoft.com/office/drawing/2014/main" id="{1BACA78C-0EF4-B232-707C-5454FB3F02F8}"/>
               </a:ext>
             </a:extLst>
           </p:cNvPr>
@@ -5883,8 +6547,8 @@
         </p:blipFill>
         <p:spPr>
           <a:xfrm>
-            <a:off x="0" y="647700"/>
-            <a:ext cx="18252409" cy="8991600"/>
+            <a:off x="9144000" y="0"/>
+            <a:ext cx="9144000" cy="11315700"/>
           </a:xfrm>
           <a:prstGeom prst="rect">
             <a:avLst/>
@@ -5892,13 +6556,15 @@
         </p:spPr>
       </p:pic>
     </p:spTree>
+    <p:extLst>
+      <p:ext uri="{BB962C8B-B14F-4D97-AF65-F5344CB8AC3E}">
+        <p14:creationId xmlns:p14="http://schemas.microsoft.com/office/powerpoint/2010/main" val="3832242421"/>
+      </p:ext>
+    </p:extLst>
   </p:cSld>
   <p:clrMapOvr>
     <a:masterClrMapping/>
   </p:clrMapOvr>
-  <p:transition>
-    <p:fade/>
-  </p:transition>
 </p:sld>
 </file>
 
@@ -5935,8 +6601,8 @@
         </p:nvSpPr>
         <p:spPr>
           <a:xfrm flipV="1">
-            <a:off x="0" y="7112454"/>
-            <a:ext cx="5727460" cy="3174546"/>
+            <a:off x="0" y="0"/>
+            <a:ext cx="4366036" cy="3715100"/>
           </a:xfrm>
           <a:custGeom>
             <a:avLst/>
@@ -5945,21 +6611,21 @@
             <a:cxnLst/>
             <a:rect l="l" t="t" r="r" b="b"/>
             <a:pathLst>
-              <a:path w="5727460" h="3174546">
+              <a:path w="4366036" h="3715100">
                 <a:moveTo>
-                  <a:pt x="0" y="3174546"/>
+                  <a:pt x="0" y="3715100"/>
                 </a:moveTo>
                 <a:lnTo>
-                  <a:pt x="5727460" y="3174546"/>
-                </a:lnTo>
-                <a:lnTo>
-                  <a:pt x="5727460" y="0"/>
+                  <a:pt x="4366036" y="3715100"/>
+                </a:lnTo>
+                <a:lnTo>
+                  <a:pt x="4366036" y="0"/>
                 </a:lnTo>
                 <a:lnTo>
                   <a:pt x="0" y="0"/>
                 </a:lnTo>
                 <a:lnTo>
-                  <a:pt x="0" y="3174546"/>
+                  <a:pt x="0" y="3715100"/>
                 </a:lnTo>
                 <a:close/>
               </a:path>
@@ -5988,281 +6654,14 @@
       </p:sp>
       <p:sp>
         <p:nvSpPr>
-          <p:cNvPr id="3" name="TextBox 3"/>
-          <p:cNvSpPr txBox="1"/>
-          <p:nvPr/>
-        </p:nvSpPr>
-        <p:spPr>
-          <a:xfrm>
-            <a:off x="2346275" y="1191618"/>
-            <a:ext cx="13621079" cy="1004280"/>
-          </a:xfrm>
-          <a:prstGeom prst="rect">
-            <a:avLst/>
-          </a:prstGeom>
-        </p:spPr>
-        <p:txBody>
-          <a:bodyPr lIns="0" tIns="0" rIns="0" bIns="0" rtlCol="0" anchor="t">
-            <a:spAutoFit/>
-          </a:bodyPr>
-          <a:lstStyle/>
-          <a:p>
-            <a:pPr algn="ctr">
-              <a:lnSpc>
-                <a:spcPts val="8271"/>
-              </a:lnSpc>
-            </a:pPr>
-            <a:r>
-              <a:rPr lang="en-US" sz="5908">
-                <a:solidFill>
-                  <a:srgbClr val="071947"/>
-                </a:solidFill>
-                <a:latin typeface="Hammersmith One"/>
-                <a:ea typeface="Hammersmith One"/>
-                <a:cs typeface="Hammersmith One"/>
-                <a:sym typeface="Hammersmith One"/>
-              </a:rPr>
-              <a:t>Bridging the Gap: The Java Application</a:t>
-            </a:r>
-          </a:p>
-        </p:txBody>
-      </p:sp>
-      <p:sp>
-        <p:nvSpPr>
-          <p:cNvPr id="4" name="TextBox 4"/>
-          <p:cNvSpPr txBox="1"/>
-          <p:nvPr/>
-        </p:nvSpPr>
-        <p:spPr>
-          <a:xfrm>
-            <a:off x="2305935" y="2628548"/>
-            <a:ext cx="13661419" cy="6114687"/>
-          </a:xfrm>
-          <a:prstGeom prst="rect">
-            <a:avLst/>
-          </a:prstGeom>
-        </p:spPr>
-        <p:txBody>
-          <a:bodyPr lIns="0" tIns="0" rIns="0" bIns="0" rtlCol="0" anchor="t">
-            <a:spAutoFit/>
-          </a:bodyPr>
-          <a:lstStyle/>
-          <a:p>
-            <a:pPr marL="737335" lvl="1" indent="-368668" algn="l">
-              <a:lnSpc>
-                <a:spcPts val="4781"/>
-              </a:lnSpc>
-              <a:spcBef>
-                <a:spcPct val="0"/>
-              </a:spcBef>
-              <a:buFont typeface="Arial"/>
-              <a:buChar char="•"/>
-            </a:pPr>
-            <a:r>
-              <a:rPr lang="en-US" sz="3415" dirty="0">
-                <a:solidFill>
-                  <a:srgbClr val="071947"/>
-                </a:solidFill>
-                <a:latin typeface="Open Sans"/>
-                <a:ea typeface="Open Sans"/>
-                <a:cs typeface="Open Sans"/>
-                <a:sym typeface="Open Sans"/>
-              </a:rPr>
-              <a:t>We devel</a:t>
-            </a:r>
-            <a:r>
-              <a:rPr lang="en-US" sz="3415" u="none" strike="noStrike" dirty="0">
-                <a:solidFill>
-                  <a:srgbClr val="071947"/>
-                </a:solidFill>
-                <a:latin typeface="Open Sans"/>
-                <a:ea typeface="Open Sans"/>
-                <a:cs typeface="Open Sans"/>
-                <a:sym typeface="Open Sans"/>
-              </a:rPr>
-              <a:t>oped a functional application using Java and IntelliJ IDEA to interact with the PostgreSQL database.</a:t>
-            </a:r>
-          </a:p>
-          <a:p>
-            <a:pPr marL="737335" lvl="1" indent="-368668" algn="l">
-              <a:lnSpc>
-                <a:spcPts val="4781"/>
-              </a:lnSpc>
-              <a:spcBef>
-                <a:spcPct val="0"/>
-              </a:spcBef>
-              <a:buFont typeface="Arial"/>
-              <a:buChar char="•"/>
-            </a:pPr>
-            <a:r>
-              <a:rPr lang="en-US" sz="3415" u="none" strike="noStrike" dirty="0">
-                <a:solidFill>
-                  <a:srgbClr val="071947"/>
-                </a:solidFill>
-                <a:latin typeface="Open Sans"/>
-                <a:ea typeface="Open Sans"/>
-                <a:cs typeface="Open Sans"/>
-                <a:sym typeface="Open Sans"/>
-              </a:rPr>
-              <a:t>Connectivity: We used JDBC (Java Database Connectivity) as a translator between our code and the SQL server.</a:t>
-            </a:r>
-          </a:p>
-          <a:p>
-            <a:pPr marL="737335" lvl="1" indent="-368668" algn="l">
-              <a:lnSpc>
-                <a:spcPts val="4781"/>
-              </a:lnSpc>
-              <a:spcBef>
-                <a:spcPct val="0"/>
-              </a:spcBef>
-              <a:buFont typeface="Arial"/>
-              <a:buChar char="•"/>
-            </a:pPr>
-            <a:r>
-              <a:rPr lang="en-US" sz="3415" u="none" strike="noStrike" dirty="0">
-                <a:solidFill>
-                  <a:srgbClr val="071947"/>
-                </a:solidFill>
-                <a:latin typeface="Open Sans"/>
-                <a:ea typeface="Open Sans"/>
-                <a:cs typeface="Open Sans"/>
-                <a:sym typeface="Open Sans"/>
-              </a:rPr>
-              <a:t>Full CRUD Support: The application allows users to:</a:t>
-            </a:r>
-          </a:p>
-          <a:p>
-            <a:pPr marL="737335" lvl="1" indent="-368668" algn="l">
-              <a:lnSpc>
-                <a:spcPts val="4781"/>
-              </a:lnSpc>
-              <a:spcBef>
-                <a:spcPct val="0"/>
-              </a:spcBef>
-              <a:buFont typeface="Arial"/>
-              <a:buChar char="•"/>
-            </a:pPr>
-            <a:r>
-              <a:rPr lang="en-US" sz="3415" u="none" strike="noStrike" dirty="0">
-                <a:solidFill>
-                  <a:srgbClr val="071947"/>
-                </a:solidFill>
-                <a:latin typeface="Open Sans"/>
-                <a:ea typeface="Open Sans"/>
-                <a:cs typeface="Open Sans"/>
-                <a:sym typeface="Open Sans"/>
-              </a:rPr>
-              <a:t>Create: Register new patients.</a:t>
-            </a:r>
-          </a:p>
-          <a:p>
-            <a:pPr marL="737335" lvl="1" indent="-368668">
-              <a:lnSpc>
-                <a:spcPts val="4781"/>
-              </a:lnSpc>
-              <a:spcBef>
-                <a:spcPct val="0"/>
-              </a:spcBef>
-              <a:buFont typeface="Arial"/>
-              <a:buChar char="•"/>
-            </a:pPr>
-            <a:r>
-              <a:rPr lang="en-US" sz="3415" u="none" strike="noStrike" dirty="0">
-                <a:solidFill>
-                  <a:srgbClr val="071947"/>
-                </a:solidFill>
-                <a:latin typeface="Open Sans"/>
-                <a:ea typeface="Open Sans"/>
-                <a:cs typeface="Open Sans"/>
-                <a:sym typeface="Open Sans"/>
-              </a:rPr>
-              <a:t>Read: Search and view </a:t>
-            </a:r>
-            <a:r>
-              <a:rPr lang="en-US" sz="3415" dirty="0">
-                <a:solidFill>
-                  <a:srgbClr val="071947"/>
-                </a:solidFill>
-                <a:latin typeface="Open Sans"/>
-                <a:ea typeface="Open Sans"/>
-                <a:cs typeface="Open Sans"/>
-                <a:sym typeface="Open Sans"/>
-              </a:rPr>
-              <a:t>patients</a:t>
-            </a:r>
-            <a:r>
-              <a:rPr lang="en-US" sz="3415" u="none" strike="noStrike" dirty="0">
-                <a:solidFill>
-                  <a:srgbClr val="071947"/>
-                </a:solidFill>
-                <a:latin typeface="Open Sans"/>
-                <a:ea typeface="Open Sans"/>
-                <a:cs typeface="Open Sans"/>
-                <a:sym typeface="Open Sans"/>
-              </a:rPr>
-              <a:t>.</a:t>
-            </a:r>
-          </a:p>
-          <a:p>
-            <a:pPr marL="737335" lvl="1" indent="-368668" algn="l">
-              <a:lnSpc>
-                <a:spcPts val="4781"/>
-              </a:lnSpc>
-              <a:spcBef>
-                <a:spcPct val="0"/>
-              </a:spcBef>
-              <a:buFont typeface="Arial"/>
-              <a:buChar char="•"/>
-            </a:pPr>
-            <a:r>
-              <a:rPr lang="en-US" sz="3415" u="none" strike="noStrike" dirty="0">
-                <a:solidFill>
-                  <a:srgbClr val="071947"/>
-                </a:solidFill>
-                <a:latin typeface="Open Sans"/>
-                <a:ea typeface="Open Sans"/>
-                <a:cs typeface="Open Sans"/>
-                <a:sym typeface="Open Sans"/>
-              </a:rPr>
-              <a:t>Update: Modify patient details.</a:t>
-            </a:r>
-          </a:p>
-          <a:p>
-            <a:pPr marL="737335" lvl="1" indent="-368668" algn="l">
-              <a:lnSpc>
-                <a:spcPts val="4781"/>
-              </a:lnSpc>
-              <a:spcBef>
-                <a:spcPct val="0"/>
-              </a:spcBef>
-              <a:buFont typeface="Arial"/>
-              <a:buChar char="•"/>
-            </a:pPr>
-            <a:r>
-              <a:rPr lang="en-US" sz="3415" u="none" strike="noStrike" dirty="0">
-                <a:solidFill>
-                  <a:srgbClr val="071947"/>
-                </a:solidFill>
-                <a:latin typeface="Open Sans"/>
-                <a:ea typeface="Open Sans"/>
-                <a:cs typeface="Open Sans"/>
-                <a:sym typeface="Open Sans"/>
-              </a:rPr>
-              <a:t>Delete: Remove records when necessary. This demonstrates the real-world usability of our database design.</a:t>
-            </a:r>
-          </a:p>
-        </p:txBody>
-      </p:sp>
-      <p:sp>
-        <p:nvSpPr>
-          <p:cNvPr id="5" name="Freeform 5"/>
+          <p:cNvPr id="3" name="Freeform 3"/>
           <p:cNvSpPr/>
           <p:nvPr/>
         </p:nvSpPr>
         <p:spPr>
           <a:xfrm flipH="1">
-            <a:off x="12560540" y="-68755"/>
-            <a:ext cx="5727460" cy="3174546"/>
+            <a:off x="13921964" y="6571900"/>
+            <a:ext cx="4366036" cy="3715100"/>
           </a:xfrm>
           <a:custGeom>
             <a:avLst/>
@@ -6271,21 +6670,21 @@
             <a:cxnLst/>
             <a:rect l="l" t="t" r="r" b="b"/>
             <a:pathLst>
-              <a:path w="5727460" h="3174546">
+              <a:path w="4366036" h="3715100">
                 <a:moveTo>
-                  <a:pt x="5727460" y="0"/>
+                  <a:pt x="4366036" y="0"/>
                 </a:moveTo>
                 <a:lnTo>
                   <a:pt x="0" y="0"/>
                 </a:lnTo>
                 <a:lnTo>
-                  <a:pt x="0" y="3174546"/>
-                </a:lnTo>
-                <a:lnTo>
-                  <a:pt x="5727460" y="3174546"/>
-                </a:lnTo>
-                <a:lnTo>
-                  <a:pt x="5727460" y="0"/>
+                  <a:pt x="0" y="3715100"/>
+                </a:lnTo>
+                <a:lnTo>
+                  <a:pt x="4366036" y="3715100"/>
+                </a:lnTo>
+                <a:lnTo>
+                  <a:pt x="4366036" y="0"/>
                 </a:lnTo>
                 <a:close/>
               </a:path>
@@ -6312,11 +6711,238 @@
           </a:p>
         </p:txBody>
       </p:sp>
+      <p:sp>
+        <p:nvSpPr>
+          <p:cNvPr id="4" name="TextBox 4"/>
+          <p:cNvSpPr txBox="1"/>
+          <p:nvPr/>
+        </p:nvSpPr>
+        <p:spPr>
+          <a:xfrm>
+            <a:off x="3006629" y="923925"/>
+            <a:ext cx="12274742" cy="922410"/>
+          </a:xfrm>
+          <a:prstGeom prst="rect">
+            <a:avLst/>
+          </a:prstGeom>
+        </p:spPr>
+        <p:txBody>
+          <a:bodyPr lIns="0" tIns="0" rIns="0" bIns="0" rtlCol="0" anchor="t">
+            <a:spAutoFit/>
+          </a:bodyPr>
+          <a:lstStyle/>
+          <a:p>
+            <a:pPr algn="ctr">
+              <a:lnSpc>
+                <a:spcPts val="7518"/>
+              </a:lnSpc>
+            </a:pPr>
+            <a:r>
+              <a:rPr lang="en-US" sz="5370">
+                <a:solidFill>
+                  <a:srgbClr val="071947"/>
+                </a:solidFill>
+                <a:latin typeface="Hammersmith One"/>
+                <a:ea typeface="Hammersmith One"/>
+                <a:cs typeface="Hammersmith One"/>
+                <a:sym typeface="Hammersmith One"/>
+              </a:rPr>
+              <a:t>Database Implementation (MongoDB)</a:t>
+            </a:r>
+          </a:p>
+        </p:txBody>
+      </p:sp>
+      <p:sp>
+        <p:nvSpPr>
+          <p:cNvPr id="5" name="TextBox 5"/>
+          <p:cNvSpPr txBox="1"/>
+          <p:nvPr/>
+        </p:nvSpPr>
+        <p:spPr>
+          <a:xfrm>
+            <a:off x="1964733" y="2305890"/>
+            <a:ext cx="14358533" cy="6570932"/>
+          </a:xfrm>
+          <a:prstGeom prst="rect">
+            <a:avLst/>
+          </a:prstGeom>
+        </p:spPr>
+        <p:txBody>
+          <a:bodyPr lIns="0" tIns="0" rIns="0" bIns="0" rtlCol="0" anchor="t">
+            <a:spAutoFit/>
+          </a:bodyPr>
+          <a:lstStyle/>
+          <a:p>
+            <a:pPr algn="l">
+              <a:lnSpc>
+                <a:spcPts val="4781"/>
+              </a:lnSpc>
+            </a:pPr>
+            <a:r>
+              <a:rPr lang="en-US" sz="3415" dirty="0">
+                <a:solidFill>
+                  <a:srgbClr val="071947"/>
+                </a:solidFill>
+                <a:latin typeface="Open Sans"/>
+                <a:ea typeface="Open Sans"/>
+                <a:cs typeface="Open Sans"/>
+                <a:sym typeface="Open Sans"/>
+              </a:rPr>
+              <a:t>For the medical history part of our project, we chose MongoDB to handle non-relational data.</a:t>
+            </a:r>
+          </a:p>
+          <a:p>
+            <a:pPr marL="737335" lvl="1" indent="-368668" algn="l">
+              <a:lnSpc>
+                <a:spcPts val="4781"/>
+              </a:lnSpc>
+              <a:buFont typeface="Arial"/>
+              <a:buChar char="•"/>
+            </a:pPr>
+            <a:r>
+              <a:rPr lang="en-US" sz="3415" b="1" dirty="0">
+                <a:solidFill>
+                  <a:srgbClr val="071947"/>
+                </a:solidFill>
+                <a:latin typeface="Open Sans Bold"/>
+                <a:ea typeface="Open Sans Bold"/>
+                <a:cs typeface="Open Sans Bold"/>
+                <a:sym typeface="Open Sans Bold"/>
+              </a:rPr>
+              <a:t>Embedding Strategy:</a:t>
+            </a:r>
+            <a:r>
+              <a:rPr lang="en-US" sz="3415" dirty="0">
+                <a:solidFill>
+                  <a:srgbClr val="071947"/>
+                </a:solidFill>
+                <a:latin typeface="Open Sans"/>
+                <a:ea typeface="Open Sans"/>
+                <a:cs typeface="Open Sans"/>
+                <a:sym typeface="Open Sans"/>
+              </a:rPr>
+              <a:t> Instead of splitting data into many tables, we store surgery records and bills directly inside the Patient document.</a:t>
+            </a:r>
+          </a:p>
+          <a:p>
+            <a:pPr marL="737335" lvl="1" indent="-368668" algn="l">
+              <a:lnSpc>
+                <a:spcPts val="4781"/>
+              </a:lnSpc>
+              <a:buFont typeface="Arial"/>
+              <a:buChar char="•"/>
+            </a:pPr>
+            <a:r>
+              <a:rPr lang="en-US" sz="3415" b="1" dirty="0">
+                <a:solidFill>
+                  <a:srgbClr val="071947"/>
+                </a:solidFill>
+                <a:latin typeface="Open Sans Bold"/>
+                <a:ea typeface="Open Sans Bold"/>
+                <a:cs typeface="Open Sans Bold"/>
+                <a:sym typeface="Open Sans Bold"/>
+              </a:rPr>
+              <a:t>Performance Optimization:</a:t>
+            </a:r>
+            <a:r>
+              <a:rPr lang="en-US" sz="3415" dirty="0">
+                <a:solidFill>
+                  <a:srgbClr val="071947"/>
+                </a:solidFill>
+                <a:latin typeface="Open Sans"/>
+                <a:ea typeface="Open Sans"/>
+                <a:cs typeface="Open Sans"/>
+                <a:sym typeface="Open Sans"/>
+              </a:rPr>
+              <a:t> This design is optimized for "Read-Heavy" operations. A doctor can retrieve a patient’s entire history in a single query without using slow "Join" operations.</a:t>
+            </a:r>
+          </a:p>
+          <a:p>
+            <a:pPr marL="737335" lvl="1" indent="-368668" algn="l">
+              <a:lnSpc>
+                <a:spcPts val="4781"/>
+              </a:lnSpc>
+              <a:buFont typeface="Arial"/>
+              <a:buChar char="•"/>
+            </a:pPr>
+            <a:r>
+              <a:rPr lang="en-US" sz="3415" b="1" dirty="0">
+                <a:solidFill>
+                  <a:srgbClr val="071947"/>
+                </a:solidFill>
+                <a:latin typeface="Open Sans Bold"/>
+                <a:ea typeface="Open Sans Bold"/>
+                <a:cs typeface="Open Sans Bold"/>
+                <a:sym typeface="Open Sans Bold"/>
+              </a:rPr>
+              <a:t>Validation:</a:t>
+            </a:r>
+            <a:r>
+              <a:rPr lang="en-US" sz="3415" dirty="0">
+                <a:solidFill>
+                  <a:srgbClr val="071947"/>
+                </a:solidFill>
+                <a:latin typeface="Open Sans"/>
+                <a:ea typeface="Open Sans"/>
+                <a:cs typeface="Open Sans"/>
+                <a:sym typeface="Open Sans"/>
+              </a:rPr>
+              <a:t> We implemented </a:t>
+            </a:r>
+            <a:r>
+              <a:rPr lang="en-US" sz="3415" b="1" dirty="0">
+                <a:solidFill>
+                  <a:srgbClr val="071947"/>
+                </a:solidFill>
+                <a:latin typeface="Open Sans Bold"/>
+                <a:ea typeface="Open Sans Bold"/>
+                <a:cs typeface="Open Sans Bold"/>
+                <a:sym typeface="Open Sans Bold"/>
+              </a:rPr>
+              <a:t>JSON Schema Validation</a:t>
+            </a:r>
+            <a:r>
+              <a:rPr lang="en-US" sz="3415" dirty="0">
+                <a:solidFill>
+                  <a:srgbClr val="071947"/>
+                </a:solidFill>
+                <a:latin typeface="Open Sans"/>
+                <a:ea typeface="Open Sans"/>
+                <a:cs typeface="Open Sans"/>
+                <a:sym typeface="Open Sans"/>
+              </a:rPr>
+              <a:t> to enforce data types, making our NoSQL collections as reliable as SQL tables.</a:t>
+            </a:r>
+          </a:p>
+          <a:p>
+            <a:pPr algn="l">
+              <a:lnSpc>
+                <a:spcPts val="4781"/>
+              </a:lnSpc>
+              <a:spcBef>
+                <a:spcPct val="0"/>
+              </a:spcBef>
+            </a:pPr>
+            <a:endParaRPr lang="en-US" sz="3415" dirty="0">
+              <a:solidFill>
+                <a:srgbClr val="071947"/>
+              </a:solidFill>
+              <a:latin typeface="Open Sans"/>
+              <a:ea typeface="Open Sans"/>
+              <a:cs typeface="Open Sans"/>
+              <a:sym typeface="Open Sans"/>
+            </a:endParaRPr>
+          </a:p>
+        </p:txBody>
+      </p:sp>
     </p:spTree>
   </p:cSld>
   <p:clrMapOvr>
     <a:masterClrMapping/>
   </p:clrMapOvr>
+  <p:transition>
+    <p:fade/>
+  </p:transition>
 </p:sld>
 </file>
 
